--- a/docs/conversa-ceo/apresentacao.pptx
+++ b/docs/conversa-ceo/apresentacao.pptx
@@ -16,6 +16,13 @@
     <p:sldId id="264" r:id="rId15"/>
     <p:sldId id="265" r:id="rId16"/>
     <p:sldId id="266" r:id="rId17"/>
+    <p:sldId id="267" r:id="rId18"/>
+    <p:sldId id="268" r:id="rId19"/>
+    <p:sldId id="269" r:id="rId20"/>
+    <p:sldId id="270" r:id="rId21"/>
+    <p:sldId id="271" r:id="rId22"/>
+    <p:sldId id="272" r:id="rId23"/>
+    <p:sldId id="273" r:id="rId24"/>
   </p:sldIdLst>
   <p:sldSz cx="12191695" cy="6858000" type="screen4x3"/>
   <p:notesSz cx="6858000" cy="9144000"/>
@@ -3208,7 +3215,7 @@
                 </a:solidFill>
                 <a:latin typeface="Segoe UI"/>
               </a:rPr>
-              <a:t>Uma visão consolidada das frentes que conduzo hoje na companhia — do produto à infraestrutura, passando por dados, CS, suporte e times.</a:t>
+              <a:t>Uma visão consolidada e detalhada de todas as frentes que conduzo hoje na companhia — do produto à infraestrutura, passando por dados, CS, suporte e times.</a:t>
             </a:r>
           </a:p>
         </p:txBody>
@@ -3302,7 +3309,7 @@
                 </a:solidFill>
                 <a:latin typeface="Segoe UI"/>
               </a:rPr>
-              <a:t>PARA ONDE VAI</a:t>
+              <a:t>ÁREA 3 · ENGENHARIA</a:t>
             </a:r>
           </a:p>
         </p:txBody>
@@ -3315,8 +3322,8 @@
         </p:nvSpPr>
         <p:spPr>
           <a:xfrm>
-            <a:off x="822960" y="960120"/>
-            <a:ext cx="10515600" cy="1371600"/>
+            <a:off x="822960" y="914400"/>
+            <a:ext cx="10515600" cy="1280160"/>
           </a:xfrm>
           <a:prstGeom prst="rect">
             <a:avLst/>
@@ -3330,13 +3337,13 @@
           <a:lstStyle/>
           <a:p>
             <a:r>
-              <a:rPr sz="3400" b="1">
+              <a:rPr sz="3000" b="1">
                 <a:solidFill>
                   <a:srgbClr val="EAF0FB"/>
                 </a:solidFill>
                 <a:latin typeface="Segoe UI"/>
               </a:rPr>
-              <a:t>Estratégia de produto com IA — próximos 12 meses</a:t>
+              <a:t>Engenharia</a:t>
             </a:r>
           </a:p>
         </p:txBody>
@@ -3350,7 +3357,7 @@
         <p:spPr>
           <a:xfrm>
             <a:off x="822960" y="2194560"/>
-            <a:ext cx="10515600" cy="3931920"/>
+            <a:ext cx="5120640" cy="3931920"/>
           </a:xfrm>
           <a:prstGeom prst="rect">
             <a:avLst/>
@@ -3362,6 +3369,22 @@
             <a:spAutoFit/>
           </a:bodyPr>
           <a:lstStyle/>
+          <a:p>
+            <a:pPr>
+              <a:spcAft>
+                <a:spcPts val="600"/>
+              </a:spcAft>
+            </a:pPr>
+            <a:r>
+              <a:rPr sz="1250" b="1">
+                <a:solidFill>
+                  <a:srgbClr val="F4B740"/>
+                </a:solidFill>
+                <a:latin typeface="Segoe UI"/>
+              </a:rPr>
+              <a:t>DIRETORIA</a:t>
+            </a:r>
+          </a:p>
           <a:p>
             <a:pPr>
               <a:lnSpc>
@@ -3372,7 +3395,7 @@
               </a:spcAft>
             </a:pPr>
             <a:r>
-              <a:rPr sz="1600" b="1">
+              <a:rPr sz="1400" b="1">
                 <a:solidFill>
                   <a:srgbClr val="2DD4BF"/>
                 </a:solidFill>
@@ -3381,40 +3404,13 @@
               <a:t>▪  </a:t>
             </a:r>
             <a:r>
-              <a:rPr sz="1600" b="1">
-                <a:solidFill>
-                  <a:srgbClr val="EAF0FB"/>
-                </a:solidFill>
-                <a:latin typeface="Segoe UI"/>
-              </a:rPr>
-              <a:t>Produto 100% IA</a:t>
-            </a:r>
-            <a:r>
-              <a:rPr sz="1600" b="0">
-                <a:solidFill>
-                  <a:srgbClr val="9AA7BD"/>
-                </a:solidFill>
-                <a:latin typeface="Segoe UI"/>
-              </a:rPr>
-              <a:t> em escala: de R$30k para </a:t>
-            </a:r>
-            <a:r>
-              <a:rPr sz="1600" b="1">
-                <a:solidFill>
-                  <a:srgbClr val="EAF0FB"/>
-                </a:solidFill>
-                <a:latin typeface="Segoe UI"/>
-              </a:rPr>
-              <a:t>+R$100k de MRR</a:t>
-            </a:r>
-            <a:r>
-              <a:rPr sz="1600" b="0">
-                <a:solidFill>
-                  <a:srgbClr val="9AA7BD"/>
-                </a:solidFill>
-                <a:latin typeface="Segoe UI"/>
-              </a:rPr>
-              <a:t>, com pipeline de parceiros (iFood, TotalPass México)</a:t>
+              <a:rPr sz="1400" b="0">
+                <a:solidFill>
+                  <a:srgbClr val="9AA7BD"/>
+                </a:solidFill>
+                <a:latin typeface="Segoe UI"/>
+              </a:rPr>
+              <a:t>Evolução e acompanhamento semanal de qualidade de chamada</a:t>
             </a:r>
           </a:p>
           <a:p>
@@ -3427,7 +3423,7 @@
               </a:spcAft>
             </a:pPr>
             <a:r>
-              <a:rPr sz="1600" b="1">
+              <a:rPr sz="1400" b="1">
                 <a:solidFill>
                   <a:srgbClr val="2DD4BF"/>
                 </a:solidFill>
@@ -3436,22 +3432,22 @@
               <a:t>▪  </a:t>
             </a:r>
             <a:r>
-              <a:rPr sz="1600" b="1">
+              <a:rPr sz="1400" b="0">
+                <a:solidFill>
+                  <a:srgbClr val="9AA7BD"/>
+                </a:solidFill>
+                <a:latin typeface="Segoe UI"/>
+              </a:rPr>
+              <a:t>Consultoria de Segurança — </a:t>
+            </a:r>
+            <a:r>
+              <a:rPr sz="1400" b="1">
                 <a:solidFill>
                   <a:srgbClr val="EAF0FB"/>
                 </a:solidFill>
                 <a:latin typeface="Segoe UI"/>
               </a:rPr>
-              <a:t>ExABI</a:t>
-            </a:r>
-            <a:r>
-              <a:rPr sz="1600" b="0">
-                <a:solidFill>
-                  <a:srgbClr val="9AA7BD"/>
-                </a:solidFill>
-                <a:latin typeface="Segoe UI"/>
-              </a:rPr>
-              <a:t> — camada agêntica da Starbem como diferencial competitivo</a:t>
+              <a:t>Tempest</a:t>
             </a:r>
           </a:p>
           <a:p>
@@ -3464,7 +3460,7 @@
               </a:spcAft>
             </a:pPr>
             <a:r>
-              <a:rPr sz="1600" b="1">
+              <a:rPr sz="1400" b="1">
                 <a:solidFill>
                   <a:srgbClr val="2DD4BF"/>
                 </a:solidFill>
@@ -3473,22 +3469,13 @@
               <a:t>▪  </a:t>
             </a:r>
             <a:r>
-              <a:rPr sz="1600" b="1">
-                <a:solidFill>
-                  <a:srgbClr val="EAF0FB"/>
-                </a:solidFill>
-                <a:latin typeface="Segoe UI"/>
-              </a:rPr>
-              <a:t>StarBrain</a:t>
-            </a:r>
-            <a:r>
-              <a:rPr sz="1600" b="0">
-                <a:solidFill>
-                  <a:srgbClr val="9AA7BD"/>
-                </a:solidFill>
-                <a:latin typeface="Segoe UI"/>
-              </a:rPr>
-              <a:t> retroalimentado por dados: visão unificada de paciente e profissional</a:t>
+              <a:rPr sz="1400" b="0">
+                <a:solidFill>
+                  <a:srgbClr val="9AA7BD"/>
+                </a:solidFill>
+                <a:latin typeface="Segoe UI"/>
+              </a:rPr>
+              <a:t>Próximos passos de estruturação de Segurança</a:t>
             </a:r>
           </a:p>
           <a:p>
@@ -3501,7 +3488,7 @@
               </a:spcAft>
             </a:pPr>
             <a:r>
-              <a:rPr sz="1600" b="1">
+              <a:rPr sz="1400" b="1">
                 <a:solidFill>
                   <a:srgbClr val="2DD4BF"/>
                 </a:solidFill>
@@ -3510,22 +3497,22 @@
               <a:t>▪  </a:t>
             </a:r>
             <a:r>
-              <a:rPr sz="1600" b="1">
+              <a:rPr sz="1400" b="1">
                 <a:solidFill>
                   <a:srgbClr val="EAF0FB"/>
                 </a:solidFill>
                 <a:latin typeface="Segoe UI"/>
               </a:rPr>
-              <a:t>Datalake preditivo</a:t>
-            </a:r>
-            <a:r>
-              <a:rPr sz="1600" b="0">
-                <a:solidFill>
-                  <a:srgbClr val="9AA7BD"/>
-                </a:solidFill>
-                <a:latin typeface="Segoe UI"/>
-              </a:rPr>
-              <a:t> ligando dados a impacto financeiro do negócio</a:t>
+              <a:t>Shapeme</a:t>
+            </a:r>
+            <a:r>
+              <a:rPr sz="1400" b="0">
+                <a:solidFill>
+                  <a:srgbClr val="9AA7BD"/>
+                </a:solidFill>
+                <a:latin typeface="Segoe UI"/>
+              </a:rPr>
+              <a:t> — construção do produto</a:t>
             </a:r>
           </a:p>
           <a:p>
@@ -3538,7 +3525,7 @@
               </a:spcAft>
             </a:pPr>
             <a:r>
-              <a:rPr sz="1600" b="1">
+              <a:rPr sz="1400" b="1">
                 <a:solidFill>
                   <a:srgbClr val="2DD4BF"/>
                 </a:solidFill>
@@ -3547,7 +3534,16 @@
               <a:t>▪  </a:t>
             </a:r>
             <a:r>
-              <a:rPr sz="1600" b="1">
+              <a:rPr sz="1400" b="0">
+                <a:solidFill>
+                  <a:srgbClr val="9AA7BD"/>
+                </a:solidFill>
+                <a:latin typeface="Segoe UI"/>
+              </a:rPr>
+              <a:t>Visão de projeto </a:t>
+            </a:r>
+            <a:r>
+              <a:rPr sz="1400" b="1">
                 <a:solidFill>
                   <a:srgbClr val="EAF0FB"/>
                 </a:solidFill>
@@ -3555,14 +3551,70 @@
               </a:rPr>
               <a:t>Tiny Teams</a:t>
             </a:r>
-            <a:r>
-              <a:rPr sz="1600" b="0">
-                <a:solidFill>
-                  <a:srgbClr val="9AA7BD"/>
-                </a:solidFill>
-                <a:latin typeface="Segoe UI"/>
-              </a:rPr>
-              <a:t>: fazer mais com menos, escalando operação com IA</a:t>
+          </a:p>
+          <a:p>
+            <a:pPr>
+              <a:lnSpc>
+                <a:spcPct val="108000"/>
+              </a:lnSpc>
+              <a:spcAft>
+                <a:spcPts val="600"/>
+              </a:spcAft>
+            </a:pPr>
+            <a:r>
+              <a:rPr sz="1400" b="1">
+                <a:solidFill>
+                  <a:srgbClr val="2DD4BF"/>
+                </a:solidFill>
+                <a:latin typeface="Segoe UI"/>
+              </a:rPr>
+              <a:t>▪  </a:t>
+            </a:r>
+            <a:r>
+              <a:rPr sz="1400" b="0">
+                <a:solidFill>
+                  <a:srgbClr val="9AA7BD"/>
+                </a:solidFill>
+                <a:latin typeface="Segoe UI"/>
+              </a:rPr>
+              <a:t>Construção da plataforma Tiny Teams e novo modelo de operação</a:t>
+            </a:r>
+          </a:p>
+          <a:p>
+            <a:pPr>
+              <a:lnSpc>
+                <a:spcPct val="108000"/>
+              </a:lnSpc>
+              <a:spcAft>
+                <a:spcPts val="600"/>
+              </a:spcAft>
+            </a:pPr>
+            <a:r>
+              <a:rPr sz="1400" b="1">
+                <a:solidFill>
+                  <a:srgbClr val="2DD4BF"/>
+                </a:solidFill>
+                <a:latin typeface="Segoe UI"/>
+              </a:rPr>
+              <a:t>▪  </a:t>
+            </a:r>
+            <a:r>
+              <a:rPr sz="1400" b="0">
+                <a:solidFill>
+                  <a:srgbClr val="9AA7BD"/>
+                </a:solidFill>
+                <a:latin typeface="Segoe UI"/>
+              </a:rPr>
+              <a:t>Camada Agêntica Starbem — </a:t>
+            </a:r>
+            <a:r>
+              <a:rPr sz="1400" b="1">
+                <a:solidFill>
+                  <a:srgbClr val="EAF0FB"/>
+                </a:solidFill>
+                <a:latin typeface="Segoe UI"/>
+              </a:rPr>
+              <a:t>ExABI</a:t>
             </a:r>
           </a:p>
         </p:txBody>
@@ -3575,8 +3627,8 @@
         </p:nvSpPr>
         <p:spPr>
           <a:xfrm>
-            <a:off x="822960" y="6400800"/>
-            <a:ext cx="7315200" cy="365760"/>
+            <a:off x="6309360" y="2194560"/>
+            <a:ext cx="5120640" cy="3931920"/>
           </a:xfrm>
           <a:prstGeom prst="rect">
             <a:avLst/>
@@ -3589,6 +3641,157 @@
           </a:bodyPr>
           <a:lstStyle/>
           <a:p>
+            <a:pPr>
+              <a:spcAft>
+                <a:spcPts val="600"/>
+              </a:spcAft>
+            </a:pPr>
+            <a:r>
+              <a:rPr sz="1250" b="1">
+                <a:solidFill>
+                  <a:srgbClr val="F4B740"/>
+                </a:solidFill>
+                <a:latin typeface="Segoe UI"/>
+              </a:rPr>
+              <a:t>LIDERANÇA</a:t>
+            </a:r>
+          </a:p>
+          <a:p>
+            <a:pPr>
+              <a:lnSpc>
+                <a:spcPct val="108000"/>
+              </a:lnSpc>
+              <a:spcAft>
+                <a:spcPts val="600"/>
+              </a:spcAft>
+            </a:pPr>
+            <a:r>
+              <a:rPr sz="1400" b="1">
+                <a:solidFill>
+                  <a:srgbClr val="2DD4BF"/>
+                </a:solidFill>
+                <a:latin typeface="Segoe UI"/>
+              </a:rPr>
+              <a:t>▪  </a:t>
+            </a:r>
+            <a:r>
+              <a:rPr sz="1400" b="0">
+                <a:solidFill>
+                  <a:srgbClr val="9AA7BD"/>
+                </a:solidFill>
+                <a:latin typeface="Segoe UI"/>
+              </a:rPr>
+              <a:t>Desenvolvimento da líder para atuação estratégica no business</a:t>
+            </a:r>
+          </a:p>
+          <a:p>
+            <a:pPr>
+              <a:lnSpc>
+                <a:spcPct val="108000"/>
+              </a:lnSpc>
+              <a:spcAft>
+                <a:spcPts val="600"/>
+              </a:spcAft>
+            </a:pPr>
+            <a:r>
+              <a:rPr sz="1400" b="1">
+                <a:solidFill>
+                  <a:srgbClr val="2DD4BF"/>
+                </a:solidFill>
+                <a:latin typeface="Segoe UI"/>
+              </a:rPr>
+              <a:t>▪  </a:t>
+            </a:r>
+            <a:r>
+              <a:rPr sz="1400" b="0">
+                <a:solidFill>
+                  <a:srgbClr val="9AA7BD"/>
+                </a:solidFill>
+                <a:latin typeface="Segoe UI"/>
+              </a:rPr>
+              <a:t>Atuação direta na troca de pessoas-chave do time</a:t>
+            </a:r>
+          </a:p>
+          <a:p>
+            <a:pPr>
+              <a:lnSpc>
+                <a:spcPct val="108000"/>
+              </a:lnSpc>
+              <a:spcAft>
+                <a:spcPts val="600"/>
+              </a:spcAft>
+            </a:pPr>
+            <a:r>
+              <a:rPr sz="1400" b="1">
+                <a:solidFill>
+                  <a:srgbClr val="2DD4BF"/>
+                </a:solidFill>
+                <a:latin typeface="Segoe UI"/>
+              </a:rPr>
+              <a:t>▪  </a:t>
+            </a:r>
+            <a:r>
+              <a:rPr sz="1400" b="0">
+                <a:solidFill>
+                  <a:srgbClr val="9AA7BD"/>
+                </a:solidFill>
+                <a:latin typeface="Segoe UI"/>
+              </a:rPr>
+              <a:t>Desenvolvimento e expansão de consciência para novos modelos de operação de engenharia</a:t>
+            </a:r>
+          </a:p>
+          <a:p>
+            <a:pPr>
+              <a:lnSpc>
+                <a:spcPct val="108000"/>
+              </a:lnSpc>
+              <a:spcAft>
+                <a:spcPts val="600"/>
+              </a:spcAft>
+            </a:pPr>
+            <a:r>
+              <a:rPr sz="1400" b="1">
+                <a:solidFill>
+                  <a:srgbClr val="2DD4BF"/>
+                </a:solidFill>
+                <a:latin typeface="Segoe UI"/>
+              </a:rPr>
+              <a:t>▪  </a:t>
+            </a:r>
+            <a:r>
+              <a:rPr sz="1400" b="0">
+                <a:solidFill>
+                  <a:srgbClr val="9AA7BD"/>
+                </a:solidFill>
+                <a:latin typeface="Segoe UI"/>
+              </a:rPr>
+              <a:t>Aumento de escopo para ampliação de impacto, implantando engenharia cross-área (ex.: CS AI Engineering)</a:t>
+            </a:r>
+          </a:p>
+        </p:txBody>
+      </p:sp>
+      <p:sp>
+        <p:nvSpPr>
+          <p:cNvPr id="6" name="TextBox 5"/>
+          <p:cNvSpPr txBox="1"/>
+          <p:nvPr/>
+        </p:nvSpPr>
+        <p:spPr>
+          <a:xfrm>
+            <a:off x="822960" y="6400800"/>
+            <a:ext cx="8229600" cy="365760"/>
+          </a:xfrm>
+          <a:prstGeom prst="rect">
+            <a:avLst/>
+          </a:prstGeom>
+          <a:noFill/>
+        </p:spPr>
+        <p:txBody>
+          <a:bodyPr wrap="square">
+            <a:spAutoFit/>
+          </a:bodyPr>
+          <a:lstStyle/>
+          <a:p>
             <a:r>
               <a:rPr sz="900" b="0">
                 <a:solidFill>
@@ -3603,7 +3806,7 @@
       </p:sp>
       <p:sp>
         <p:nvSpPr>
-          <p:cNvPr id="6" name="TextBox 5"/>
+          <p:cNvPr id="7" name="TextBox 6"/>
           <p:cNvSpPr txBox="1"/>
           <p:nvPr/>
         </p:nvSpPr>
@@ -3691,7 +3894,7 @@
                 </a:solidFill>
                 <a:latin typeface="Segoe UI"/>
               </a:rPr>
-              <a:t>EM RESUMO</a:t>
+              <a:t>ÁREA 4 · DADOS</a:t>
             </a:r>
           </a:p>
         </p:txBody>
@@ -3704,8 +3907,8 @@
         </p:nvSpPr>
         <p:spPr>
           <a:xfrm>
-            <a:off x="822960" y="960120"/>
-            <a:ext cx="10515600" cy="1371600"/>
+            <a:off x="822960" y="914400"/>
+            <a:ext cx="10515600" cy="1280160"/>
           </a:xfrm>
           <a:prstGeom prst="rect">
             <a:avLst/>
@@ -3719,13 +3922,13 @@
           <a:lstStyle/>
           <a:p>
             <a:r>
-              <a:rPr sz="3400" b="1">
+              <a:rPr sz="3000" b="1">
                 <a:solidFill>
                   <a:srgbClr val="EAF0FB"/>
                 </a:solidFill>
                 <a:latin typeface="Segoe UI"/>
               </a:rPr>
-              <a:t>Uma visão consolidada — pronta para discutir</a:t>
+              <a:t>Dados</a:t>
             </a:r>
           </a:p>
         </p:txBody>
@@ -3738,8 +3941,8 @@
         </p:nvSpPr>
         <p:spPr>
           <a:xfrm>
-            <a:off x="822960" y="2011680"/>
-            <a:ext cx="10332720" cy="1645920"/>
+            <a:off x="822960" y="2194560"/>
+            <a:ext cx="5120640" cy="3931920"/>
           </a:xfrm>
           <a:prstGeom prst="rect">
             <a:avLst/>
@@ -3753,27 +3956,1716 @@
           <a:lstStyle/>
           <a:p>
             <a:pPr>
+              <a:spcAft>
+                <a:spcPts val="600"/>
+              </a:spcAft>
+            </a:pPr>
+            <a:r>
+              <a:rPr sz="1250" b="1">
+                <a:solidFill>
+                  <a:srgbClr val="F4B740"/>
+                </a:solidFill>
+                <a:latin typeface="Segoe UI"/>
+              </a:rPr>
+              <a:t>DIRETORIA</a:t>
+            </a:r>
+          </a:p>
+          <a:p>
+            <a:pPr>
               <a:lnSpc>
-                <a:spcPct val="130000"/>
+                <a:spcPct val="108000"/>
+              </a:lnSpc>
+              <a:spcAft>
+                <a:spcPts val="600"/>
+              </a:spcAft>
+            </a:pPr>
+            <a:r>
+              <a:rPr sz="1400" b="1">
+                <a:solidFill>
+                  <a:srgbClr val="2DD4BF"/>
+                </a:solidFill>
+                <a:latin typeface="Segoe UI"/>
+              </a:rPr>
+              <a:t>▪  </a:t>
+            </a:r>
+            <a:r>
+              <a:rPr sz="1400" b="0">
+                <a:solidFill>
+                  <a:srgbClr val="9AA7BD"/>
+                </a:solidFill>
+                <a:latin typeface="Segoe UI"/>
+              </a:rPr>
+              <a:t>Estruturação e construção do </a:t>
+            </a:r>
+            <a:r>
+              <a:rPr sz="1400" b="1">
+                <a:solidFill>
+                  <a:srgbClr val="EAF0FB"/>
+                </a:solidFill>
+                <a:latin typeface="Segoe UI"/>
+              </a:rPr>
+              <a:t>Datalake</a:t>
+            </a:r>
+            <a:r>
+              <a:rPr sz="1400" b="0">
+                <a:solidFill>
+                  <a:srgbClr val="9AA7BD"/>
+                </a:solidFill>
+                <a:latin typeface="Segoe UI"/>
+              </a:rPr>
+              <a:t> e da camada inteligente da Starbem para análises prescritivas e preditivas</a:t>
+            </a:r>
+          </a:p>
+          <a:p>
+            <a:pPr>
+              <a:lnSpc>
+                <a:spcPct val="108000"/>
+              </a:lnSpc>
+              <a:spcAft>
+                <a:spcPts val="600"/>
+              </a:spcAft>
+            </a:pPr>
+            <a:r>
+              <a:rPr sz="1400" b="1">
+                <a:solidFill>
+                  <a:srgbClr val="2DD4BF"/>
+                </a:solidFill>
+                <a:latin typeface="Segoe UI"/>
+              </a:rPr>
+              <a:t>▪  </a:t>
+            </a:r>
+            <a:r>
+              <a:rPr sz="1400" b="0">
+                <a:solidFill>
+                  <a:srgbClr val="9AA7BD"/>
+                </a:solidFill>
+                <a:latin typeface="Segoe UI"/>
+              </a:rPr>
+              <a:t>Construção e manutenção da camada de inteligência do negócio</a:t>
+            </a:r>
+          </a:p>
+          <a:p>
+            <a:pPr>
+              <a:lnSpc>
+                <a:spcPct val="108000"/>
+              </a:lnSpc>
+              <a:spcAft>
+                <a:spcPts val="600"/>
+              </a:spcAft>
+            </a:pPr>
+            <a:r>
+              <a:rPr sz="1400" b="1">
+                <a:solidFill>
+                  <a:srgbClr val="2DD4BF"/>
+                </a:solidFill>
+                <a:latin typeface="Segoe UI"/>
+              </a:rPr>
+              <a:t>▪  </a:t>
+            </a:r>
+            <a:r>
+              <a:rPr sz="1400" b="0">
+                <a:solidFill>
+                  <a:srgbClr val="9AA7BD"/>
+                </a:solidFill>
+                <a:latin typeface="Segoe UI"/>
+              </a:rPr>
+              <a:t>Reestruturação da arquitetura de dados da Starbem</a:t>
+            </a:r>
+          </a:p>
+          <a:p>
+            <a:pPr>
+              <a:lnSpc>
+                <a:spcPct val="108000"/>
+              </a:lnSpc>
+              <a:spcAft>
+                <a:spcPts val="600"/>
+              </a:spcAft>
+            </a:pPr>
+            <a:r>
+              <a:rPr sz="1400" b="1">
+                <a:solidFill>
+                  <a:srgbClr val="2DD4BF"/>
+                </a:solidFill>
+                <a:latin typeface="Segoe UI"/>
+              </a:rPr>
+              <a:t>▪  </a:t>
+            </a:r>
+            <a:r>
+              <a:rPr sz="1400" b="0">
+                <a:solidFill>
+                  <a:srgbClr val="9AA7BD"/>
+                </a:solidFill>
+                <a:latin typeface="Segoe UI"/>
+              </a:rPr>
+              <a:t>Atuação na contratação de novos profissionais</a:t>
+            </a:r>
+          </a:p>
+        </p:txBody>
+      </p:sp>
+      <p:sp>
+        <p:nvSpPr>
+          <p:cNvPr id="5" name="TextBox 4"/>
+          <p:cNvSpPr txBox="1"/>
+          <p:nvPr/>
+        </p:nvSpPr>
+        <p:spPr>
+          <a:xfrm>
+            <a:off x="6309360" y="2194560"/>
+            <a:ext cx="5120640" cy="3931920"/>
+          </a:xfrm>
+          <a:prstGeom prst="rect">
+            <a:avLst/>
+          </a:prstGeom>
+          <a:noFill/>
+        </p:spPr>
+        <p:txBody>
+          <a:bodyPr wrap="square">
+            <a:spAutoFit/>
+          </a:bodyPr>
+          <a:lstStyle/>
+          <a:p>
+            <a:pPr>
+              <a:spcAft>
+                <a:spcPts val="600"/>
+              </a:spcAft>
+            </a:pPr>
+            <a:r>
+              <a:rPr sz="1250" b="1">
+                <a:solidFill>
+                  <a:srgbClr val="F4B740"/>
+                </a:solidFill>
+                <a:latin typeface="Segoe UI"/>
+              </a:rPr>
+              <a:t>LIDERANÇA</a:t>
+            </a:r>
+          </a:p>
+          <a:p>
+            <a:pPr>
+              <a:lnSpc>
+                <a:spcPct val="108000"/>
+              </a:lnSpc>
+              <a:spcAft>
+                <a:spcPts val="600"/>
+              </a:spcAft>
+            </a:pPr>
+            <a:r>
+              <a:rPr sz="1400" b="1">
+                <a:solidFill>
+                  <a:srgbClr val="2DD4BF"/>
+                </a:solidFill>
+                <a:latin typeface="Segoe UI"/>
+              </a:rPr>
+              <a:t>▪  </a:t>
+            </a:r>
+            <a:r>
+              <a:rPr sz="1400" b="0">
+                <a:solidFill>
+                  <a:srgbClr val="9AA7BD"/>
+                </a:solidFill>
+                <a:latin typeface="Segoe UI"/>
+              </a:rPr>
+              <a:t>Atuação com </a:t>
+            </a:r>
+            <a:r>
+              <a:rPr sz="1400" b="1">
+                <a:solidFill>
+                  <a:srgbClr val="EAF0FB"/>
+                </a:solidFill>
+                <a:latin typeface="Segoe UI"/>
+              </a:rPr>
+              <a:t>PDI</a:t>
+            </a:r>
+            <a:r>
+              <a:rPr sz="1400" b="0">
+                <a:solidFill>
+                  <a:srgbClr val="9AA7BD"/>
+                </a:solidFill>
+                <a:latin typeface="Segoe UI"/>
+              </a:rPr>
+              <a:t> e desenvolvimento do time</a:t>
+            </a:r>
+          </a:p>
+          <a:p>
+            <a:pPr>
+              <a:lnSpc>
+                <a:spcPct val="108000"/>
+              </a:lnSpc>
+              <a:spcAft>
+                <a:spcPts val="600"/>
+              </a:spcAft>
+            </a:pPr>
+            <a:r>
+              <a:rPr sz="1400" b="1">
+                <a:solidFill>
+                  <a:srgbClr val="2DD4BF"/>
+                </a:solidFill>
+                <a:latin typeface="Segoe UI"/>
+              </a:rPr>
+              <a:t>▪  </a:t>
+            </a:r>
+            <a:r>
+              <a:rPr sz="1400" b="0">
+                <a:solidFill>
+                  <a:srgbClr val="9AA7BD"/>
+                </a:solidFill>
+                <a:latin typeface="Segoe UI"/>
+              </a:rPr>
+              <a:t>Acompanhamento semanal de tarefas</a:t>
+            </a:r>
+          </a:p>
+          <a:p>
+            <a:pPr>
+              <a:lnSpc>
+                <a:spcPct val="108000"/>
+              </a:lnSpc>
+              <a:spcAft>
+                <a:spcPts val="600"/>
+              </a:spcAft>
+            </a:pPr>
+            <a:r>
+              <a:rPr sz="1400" b="1">
+                <a:solidFill>
+                  <a:srgbClr val="2DD4BF"/>
+                </a:solidFill>
+                <a:latin typeface="Segoe UI"/>
+              </a:rPr>
+              <a:t>▪  </a:t>
+            </a:r>
+            <a:r>
+              <a:rPr sz="1400" b="0">
+                <a:solidFill>
+                  <a:srgbClr val="9AA7BD"/>
+                </a:solidFill>
+                <a:latin typeface="Segoe UI"/>
+              </a:rPr>
+              <a:t>People management para engajamento do Rodrigo</a:t>
+            </a:r>
+          </a:p>
+          <a:p>
+            <a:pPr>
+              <a:lnSpc>
+                <a:spcPct val="108000"/>
+              </a:lnSpc>
+              <a:spcAft>
+                <a:spcPts val="600"/>
+              </a:spcAft>
+            </a:pPr>
+            <a:r>
+              <a:rPr sz="1400" b="1">
+                <a:solidFill>
+                  <a:srgbClr val="2DD4BF"/>
+                </a:solidFill>
+                <a:latin typeface="Segoe UI"/>
+              </a:rPr>
+              <a:t>▪  </a:t>
+            </a:r>
+            <a:r>
+              <a:rPr sz="1400" b="0">
+                <a:solidFill>
+                  <a:srgbClr val="9AA7BD"/>
+                </a:solidFill>
+                <a:latin typeface="Segoe UI"/>
+              </a:rPr>
+              <a:t>Plano de crescimento da área com novo líder e segundo analista focado em análise preditiva e impacto financeiro</a:t>
+            </a:r>
+          </a:p>
+        </p:txBody>
+      </p:sp>
+      <p:sp>
+        <p:nvSpPr>
+          <p:cNvPr id="6" name="TextBox 5"/>
+          <p:cNvSpPr txBox="1"/>
+          <p:nvPr/>
+        </p:nvSpPr>
+        <p:spPr>
+          <a:xfrm>
+            <a:off x="822960" y="6400800"/>
+            <a:ext cx="8229600" cy="365760"/>
+          </a:xfrm>
+          <a:prstGeom prst="rect">
+            <a:avLst/>
+          </a:prstGeom>
+          <a:noFill/>
+        </p:spPr>
+        <p:txBody>
+          <a:bodyPr wrap="square">
+            <a:spAutoFit/>
+          </a:bodyPr>
+          <a:lstStyle/>
+          <a:p>
+            <a:r>
+              <a:rPr sz="900" b="0">
+                <a:solidFill>
+                  <a:srgbClr val="9AA7BD"/>
+                </a:solidFill>
+                <a:latin typeface="Segoe UI"/>
+              </a:rPr>
+              <a:t>Starbem · Áreas de Atuação &amp; Impacto</a:t>
+            </a:r>
+          </a:p>
+        </p:txBody>
+      </p:sp>
+      <p:sp>
+        <p:nvSpPr>
+          <p:cNvPr id="7" name="TextBox 6"/>
+          <p:cNvSpPr txBox="1"/>
+          <p:nvPr/>
+        </p:nvSpPr>
+        <p:spPr>
+          <a:xfrm>
+            <a:off x="10972800" y="6400800"/>
+            <a:ext cx="822960" cy="365760"/>
+          </a:xfrm>
+          <a:prstGeom prst="rect">
+            <a:avLst/>
+          </a:prstGeom>
+          <a:noFill/>
+        </p:spPr>
+        <p:txBody>
+          <a:bodyPr wrap="square">
+            <a:spAutoFit/>
+          </a:bodyPr>
+          <a:lstStyle/>
+          <a:p>
+            <a:pPr algn="ctr"/>
+            <a:r>
+              <a:rPr sz="900" b="0">
+                <a:solidFill>
+                  <a:srgbClr val="9AA7BD"/>
+                </a:solidFill>
+                <a:latin typeface="Segoe UI"/>
+              </a:rPr>
+              <a:t>11</a:t>
+            </a:r>
+          </a:p>
+        </p:txBody>
+      </p:sp>
+    </p:spTree>
+  </p:cSld>
+  <p:clrMapOvr>
+    <a:masterClrMapping/>
+  </p:clrMapOvr>
+</p:sld>
+</file>
+
+<file path=ppt/slides/slide12.xml><?xml version="1.0" encoding="utf-8"?>
+<p:sld xmlns:a="http://schemas.openxmlformats.org/drawingml/2006/main" xmlns:p="http://schemas.openxmlformats.org/presentationml/2006/main" xmlns:r="http://schemas.openxmlformats.org/officeDocument/2006/relationships">
+  <p:cSld>
+    <p:bg>
+      <p:bgPr>
+        <a:solidFill>
+          <a:srgbClr val="0B1020"/>
+        </a:solidFill>
+        <a:effectLst/>
+      </p:bgPr>
+    </p:bg>
+    <p:spTree>
+      <p:nvGrpSpPr>
+        <p:cNvPr id="1" name=""/>
+        <p:cNvGrpSpPr/>
+        <p:nvPr/>
+      </p:nvGrpSpPr>
+      <p:grpSpPr/>
+      <p:sp>
+        <p:nvSpPr>
+          <p:cNvPr id="2" name="TextBox 1"/>
+          <p:cNvSpPr txBox="1"/>
+          <p:nvPr/>
+        </p:nvSpPr>
+        <p:spPr>
+          <a:xfrm>
+            <a:off x="822960" y="502920"/>
+            <a:ext cx="10515600" cy="457200"/>
+          </a:xfrm>
+          <a:prstGeom prst="rect">
+            <a:avLst/>
+          </a:prstGeom>
+          <a:noFill/>
+        </p:spPr>
+        <p:txBody>
+          <a:bodyPr wrap="square">
+            <a:spAutoFit/>
+          </a:bodyPr>
+          <a:lstStyle/>
+          <a:p>
+            <a:r>
+              <a:rPr sz="1250" b="1">
+                <a:solidFill>
+                  <a:srgbClr val="2DD4BF"/>
+                </a:solidFill>
+                <a:latin typeface="Segoe UI"/>
+              </a:rPr>
+              <a:t>ÁREA 5 · IT &amp; SUPORTE</a:t>
+            </a:r>
+          </a:p>
+        </p:txBody>
+      </p:sp>
+      <p:sp>
+        <p:nvSpPr>
+          <p:cNvPr id="3" name="TextBox 2"/>
+          <p:cNvSpPr txBox="1"/>
+          <p:nvPr/>
+        </p:nvSpPr>
+        <p:spPr>
+          <a:xfrm>
+            <a:off x="822960" y="914400"/>
+            <a:ext cx="10515600" cy="1280160"/>
+          </a:xfrm>
+          <a:prstGeom prst="rect">
+            <a:avLst/>
+          </a:prstGeom>
+          <a:noFill/>
+        </p:spPr>
+        <p:txBody>
+          <a:bodyPr wrap="square">
+            <a:spAutoFit/>
+          </a:bodyPr>
+          <a:lstStyle/>
+          <a:p>
+            <a:r>
+              <a:rPr sz="3000" b="1">
+                <a:solidFill>
+                  <a:srgbClr val="EAF0FB"/>
+                </a:solidFill>
+                <a:latin typeface="Segoe UI"/>
+              </a:rPr>
+              <a:t>IT &amp; Suporte</a:t>
+            </a:r>
+          </a:p>
+        </p:txBody>
+      </p:sp>
+      <p:sp>
+        <p:nvSpPr>
+          <p:cNvPr id="4" name="TextBox 3"/>
+          <p:cNvSpPr txBox="1"/>
+          <p:nvPr/>
+        </p:nvSpPr>
+        <p:spPr>
+          <a:xfrm>
+            <a:off x="822960" y="2194560"/>
+            <a:ext cx="10607040" cy="3931920"/>
+          </a:xfrm>
+          <a:prstGeom prst="rect">
+            <a:avLst/>
+          </a:prstGeom>
+          <a:noFill/>
+        </p:spPr>
+        <p:txBody>
+          <a:bodyPr wrap="square">
+            <a:spAutoFit/>
+          </a:bodyPr>
+          <a:lstStyle/>
+          <a:p>
+            <a:pPr>
+              <a:spcAft>
+                <a:spcPts val="600"/>
+              </a:spcAft>
+            </a:pPr>
+            <a:r>
+              <a:rPr sz="1250" b="1">
+                <a:solidFill>
+                  <a:srgbClr val="F4B740"/>
+                </a:solidFill>
+                <a:latin typeface="Segoe UI"/>
+              </a:rPr>
+              <a:t>IT &amp; SUPORTE</a:t>
+            </a:r>
+          </a:p>
+          <a:p>
+            <a:pPr>
+              <a:lnSpc>
+                <a:spcPct val="108000"/>
+              </a:lnSpc>
+              <a:spcAft>
+                <a:spcPts val="600"/>
+              </a:spcAft>
+            </a:pPr>
+            <a:r>
+              <a:rPr sz="1500" b="1">
+                <a:solidFill>
+                  <a:srgbClr val="2DD4BF"/>
+                </a:solidFill>
+                <a:latin typeface="Segoe UI"/>
+              </a:rPr>
+              <a:t>▪  </a:t>
+            </a:r>
+            <a:r>
+              <a:rPr sz="1500" b="0">
+                <a:solidFill>
+                  <a:srgbClr val="9AA7BD"/>
+                </a:solidFill>
+                <a:latin typeface="Segoe UI"/>
+              </a:rPr>
+              <a:t>Construção e manutenção da estrutura de </a:t>
+            </a:r>
+            <a:r>
+              <a:rPr sz="1500" b="1">
+                <a:solidFill>
+                  <a:srgbClr val="EAF0FB"/>
+                </a:solidFill>
+                <a:latin typeface="Segoe UI"/>
+              </a:rPr>
+              <a:t>tickets</a:t>
+            </a:r>
+            <a:r>
+              <a:rPr sz="1500" b="0">
+                <a:solidFill>
+                  <a:srgbClr val="9AA7BD"/>
+                </a:solidFill>
+                <a:latin typeface="Segoe UI"/>
+              </a:rPr>
+              <a:t> e suporte</a:t>
+            </a:r>
+          </a:p>
+          <a:p>
+            <a:pPr>
+              <a:lnSpc>
+                <a:spcPct val="108000"/>
+              </a:lnSpc>
+              <a:spcAft>
+                <a:spcPts val="600"/>
+              </a:spcAft>
+            </a:pPr>
+            <a:r>
+              <a:rPr sz="1500" b="1">
+                <a:solidFill>
+                  <a:srgbClr val="2DD4BF"/>
+                </a:solidFill>
+                <a:latin typeface="Segoe UI"/>
+              </a:rPr>
+              <a:t>▪  </a:t>
+            </a:r>
+            <a:r>
+              <a:rPr sz="1500" b="0">
+                <a:solidFill>
+                  <a:srgbClr val="9AA7BD"/>
+                </a:solidFill>
+                <a:latin typeface="Segoe UI"/>
+              </a:rPr>
+              <a:t>Acompanhamento de evolução de tickets</a:t>
+            </a:r>
+          </a:p>
+          <a:p>
+            <a:pPr>
+              <a:lnSpc>
+                <a:spcPct val="108000"/>
+              </a:lnSpc>
+              <a:spcAft>
+                <a:spcPts val="600"/>
+              </a:spcAft>
+            </a:pPr>
+            <a:r>
+              <a:rPr sz="1500" b="1">
+                <a:solidFill>
+                  <a:srgbClr val="2DD4BF"/>
+                </a:solidFill>
+                <a:latin typeface="Segoe UI"/>
+              </a:rPr>
+              <a:t>▪  </a:t>
+            </a:r>
+            <a:r>
+              <a:rPr sz="1500" b="0">
+                <a:solidFill>
+                  <a:srgbClr val="9AA7BD"/>
+                </a:solidFill>
+                <a:latin typeface="Segoe UI"/>
+              </a:rPr>
+              <a:t>Aproximação entre </a:t>
+            </a:r>
+            <a:r>
+              <a:rPr sz="1500" b="1">
+                <a:solidFill>
+                  <a:srgbClr val="EAF0FB"/>
+                </a:solidFill>
+                <a:latin typeface="Segoe UI"/>
+              </a:rPr>
+              <a:t>Suporte, CS e Produto</a:t>
+            </a:r>
+            <a:r>
+              <a:rPr sz="1500" b="0">
+                <a:solidFill>
+                  <a:srgbClr val="9AA7BD"/>
+                </a:solidFill>
+                <a:latin typeface="Segoe UI"/>
+              </a:rPr>
+              <a:t> para evolução contínua</a:t>
+            </a:r>
+          </a:p>
+          <a:p>
+            <a:pPr>
+              <a:lnSpc>
+                <a:spcPct val="108000"/>
+              </a:lnSpc>
+              <a:spcAft>
+                <a:spcPts val="600"/>
+              </a:spcAft>
+            </a:pPr>
+            <a:r>
+              <a:rPr sz="1500" b="1">
+                <a:solidFill>
+                  <a:srgbClr val="2DD4BF"/>
+                </a:solidFill>
+                <a:latin typeface="Segoe UI"/>
+              </a:rPr>
+              <a:t>▪  </a:t>
+            </a:r>
+            <a:r>
+              <a:rPr sz="1500" b="0">
+                <a:solidFill>
+                  <a:srgbClr val="9AA7BD"/>
+                </a:solidFill>
+                <a:latin typeface="Segoe UI"/>
+              </a:rPr>
+              <a:t>Relacionamento e definição de estratégia para redução de custos no contrato de provedor de aluguel de PCs</a:t>
+            </a:r>
+          </a:p>
+          <a:p>
+            <a:pPr>
+              <a:lnSpc>
+                <a:spcPct val="108000"/>
+              </a:lnSpc>
+              <a:spcAft>
+                <a:spcPts val="600"/>
+              </a:spcAft>
+            </a:pPr>
+            <a:r>
+              <a:rPr sz="1500" b="1">
+                <a:solidFill>
+                  <a:srgbClr val="2DD4BF"/>
+                </a:solidFill>
+                <a:latin typeface="Segoe UI"/>
+              </a:rPr>
+              <a:t>▪  </a:t>
+            </a:r>
+            <a:r>
+              <a:rPr sz="1500" b="0">
+                <a:solidFill>
+                  <a:srgbClr val="9AA7BD"/>
+                </a:solidFill>
+                <a:latin typeface="Segoe UI"/>
+              </a:rPr>
+              <a:t>Definição da operação da área</a:t>
+            </a:r>
+          </a:p>
+        </p:txBody>
+      </p:sp>
+      <p:sp>
+        <p:nvSpPr>
+          <p:cNvPr id="5" name="TextBox 4"/>
+          <p:cNvSpPr txBox="1"/>
+          <p:nvPr/>
+        </p:nvSpPr>
+        <p:spPr>
+          <a:xfrm>
+            <a:off x="822960" y="6400800"/>
+            <a:ext cx="8229600" cy="365760"/>
+          </a:xfrm>
+          <a:prstGeom prst="rect">
+            <a:avLst/>
+          </a:prstGeom>
+          <a:noFill/>
+        </p:spPr>
+        <p:txBody>
+          <a:bodyPr wrap="square">
+            <a:spAutoFit/>
+          </a:bodyPr>
+          <a:lstStyle/>
+          <a:p>
+            <a:r>
+              <a:rPr sz="900" b="0">
+                <a:solidFill>
+                  <a:srgbClr val="9AA7BD"/>
+                </a:solidFill>
+                <a:latin typeface="Segoe UI"/>
+              </a:rPr>
+              <a:t>Starbem · Áreas de Atuação &amp; Impacto</a:t>
+            </a:r>
+          </a:p>
+        </p:txBody>
+      </p:sp>
+      <p:sp>
+        <p:nvSpPr>
+          <p:cNvPr id="6" name="TextBox 5"/>
+          <p:cNvSpPr txBox="1"/>
+          <p:nvPr/>
+        </p:nvSpPr>
+        <p:spPr>
+          <a:xfrm>
+            <a:off x="10972800" y="6400800"/>
+            <a:ext cx="822960" cy="365760"/>
+          </a:xfrm>
+          <a:prstGeom prst="rect">
+            <a:avLst/>
+          </a:prstGeom>
+          <a:noFill/>
+        </p:spPr>
+        <p:txBody>
+          <a:bodyPr wrap="square">
+            <a:spAutoFit/>
+          </a:bodyPr>
+          <a:lstStyle/>
+          <a:p>
+            <a:pPr algn="ctr"/>
+            <a:r>
+              <a:rPr sz="900" b="0">
+                <a:solidFill>
+                  <a:srgbClr val="9AA7BD"/>
+                </a:solidFill>
+                <a:latin typeface="Segoe UI"/>
+              </a:rPr>
+              <a:t>12</a:t>
+            </a:r>
+          </a:p>
+        </p:txBody>
+      </p:sp>
+    </p:spTree>
+  </p:cSld>
+  <p:clrMapOvr>
+    <a:masterClrMapping/>
+  </p:clrMapOvr>
+</p:sld>
+</file>
+
+<file path=ppt/slides/slide13.xml><?xml version="1.0" encoding="utf-8"?>
+<p:sld xmlns:a="http://schemas.openxmlformats.org/drawingml/2006/main" xmlns:p="http://schemas.openxmlformats.org/presentationml/2006/main" xmlns:r="http://schemas.openxmlformats.org/officeDocument/2006/relationships">
+  <p:cSld>
+    <p:bg>
+      <p:bgPr>
+        <a:solidFill>
+          <a:srgbClr val="0B1020"/>
+        </a:solidFill>
+        <a:effectLst/>
+      </p:bgPr>
+    </p:bg>
+    <p:spTree>
+      <p:nvGrpSpPr>
+        <p:cNvPr id="1" name=""/>
+        <p:cNvGrpSpPr/>
+        <p:nvPr/>
+      </p:nvGrpSpPr>
+      <p:grpSpPr/>
+      <p:sp>
+        <p:nvSpPr>
+          <p:cNvPr id="2" name="TextBox 1"/>
+          <p:cNvSpPr txBox="1"/>
+          <p:nvPr/>
+        </p:nvSpPr>
+        <p:spPr>
+          <a:xfrm>
+            <a:off x="822960" y="502920"/>
+            <a:ext cx="10515600" cy="457200"/>
+          </a:xfrm>
+          <a:prstGeom prst="rect">
+            <a:avLst/>
+          </a:prstGeom>
+          <a:noFill/>
+        </p:spPr>
+        <p:txBody>
+          <a:bodyPr wrap="square">
+            <a:spAutoFit/>
+          </a:bodyPr>
+          <a:lstStyle/>
+          <a:p>
+            <a:r>
+              <a:rPr sz="1250" b="1">
+                <a:solidFill>
+                  <a:srgbClr val="2DD4BF"/>
+                </a:solidFill>
+                <a:latin typeface="Segoe UI"/>
+              </a:rPr>
+              <a:t>ÁREA 6 · PRINCIPAL ENGINEER</a:t>
+            </a:r>
+          </a:p>
+        </p:txBody>
+      </p:sp>
+      <p:sp>
+        <p:nvSpPr>
+          <p:cNvPr id="3" name="TextBox 2"/>
+          <p:cNvSpPr txBox="1"/>
+          <p:nvPr/>
+        </p:nvSpPr>
+        <p:spPr>
+          <a:xfrm>
+            <a:off x="822960" y="914400"/>
+            <a:ext cx="10515600" cy="1280160"/>
+          </a:xfrm>
+          <a:prstGeom prst="rect">
+            <a:avLst/>
+          </a:prstGeom>
+          <a:noFill/>
+        </p:spPr>
+        <p:txBody>
+          <a:bodyPr wrap="square">
+            <a:spAutoFit/>
+          </a:bodyPr>
+          <a:lstStyle/>
+          <a:p>
+            <a:r>
+              <a:rPr sz="3000" b="1">
+                <a:solidFill>
+                  <a:srgbClr val="EAF0FB"/>
+                </a:solidFill>
+                <a:latin typeface="Segoe UI"/>
+              </a:rPr>
+              <a:t>Principal Engineer</a:t>
+            </a:r>
+          </a:p>
+        </p:txBody>
+      </p:sp>
+      <p:sp>
+        <p:nvSpPr>
+          <p:cNvPr id="4" name="TextBox 3"/>
+          <p:cNvSpPr txBox="1"/>
+          <p:nvPr/>
+        </p:nvSpPr>
+        <p:spPr>
+          <a:xfrm>
+            <a:off x="822960" y="2194560"/>
+            <a:ext cx="5120640" cy="3931920"/>
+          </a:xfrm>
+          <a:prstGeom prst="rect">
+            <a:avLst/>
+          </a:prstGeom>
+          <a:noFill/>
+        </p:spPr>
+        <p:txBody>
+          <a:bodyPr wrap="square">
+            <a:spAutoFit/>
+          </a:bodyPr>
+          <a:lstStyle/>
+          <a:p>
+            <a:pPr>
+              <a:lnSpc>
+                <a:spcPct val="108000"/>
+              </a:lnSpc>
+              <a:spcAft>
+                <a:spcPts val="600"/>
+              </a:spcAft>
+            </a:pPr>
+            <a:r>
+              <a:rPr sz="1400" b="1">
+                <a:solidFill>
+                  <a:srgbClr val="2DD4BF"/>
+                </a:solidFill>
+                <a:latin typeface="Segoe UI"/>
+              </a:rPr>
+              <a:t>▪  </a:t>
+            </a:r>
+            <a:r>
+              <a:rPr sz="1400" b="0">
+                <a:solidFill>
+                  <a:srgbClr val="9AA7BD"/>
+                </a:solidFill>
+                <a:latin typeface="Segoe UI"/>
+              </a:rPr>
+              <a:t>Análises semanais de bugs estruturais da operação (com Júlio)</a:t>
+            </a:r>
+          </a:p>
+          <a:p>
+            <a:pPr>
+              <a:lnSpc>
+                <a:spcPct val="108000"/>
+              </a:lnSpc>
+              <a:spcAft>
+                <a:spcPts val="600"/>
+              </a:spcAft>
+            </a:pPr>
+            <a:r>
+              <a:rPr sz="1400" b="1">
+                <a:solidFill>
+                  <a:srgbClr val="2DD4BF"/>
+                </a:solidFill>
+                <a:latin typeface="Segoe UI"/>
+              </a:rPr>
+              <a:t>▪  </a:t>
+            </a:r>
+            <a:r>
+              <a:rPr sz="1400" b="0">
+                <a:solidFill>
+                  <a:srgbClr val="9AA7BD"/>
+                </a:solidFill>
+                <a:latin typeface="Segoe UI"/>
+              </a:rPr>
+              <a:t>Desenho arquitetural de soluções da Starbem</a:t>
+            </a:r>
+          </a:p>
+          <a:p>
+            <a:pPr>
+              <a:lnSpc>
+                <a:spcPct val="108000"/>
+              </a:lnSpc>
+              <a:spcAft>
+                <a:spcPts val="600"/>
+              </a:spcAft>
+            </a:pPr>
+            <a:r>
+              <a:rPr sz="1400" b="1">
+                <a:solidFill>
+                  <a:srgbClr val="2DD4BF"/>
+                </a:solidFill>
+                <a:latin typeface="Segoe UI"/>
+              </a:rPr>
+              <a:t>▪  </a:t>
+            </a:r>
+            <a:r>
+              <a:rPr sz="1400" b="0">
+                <a:solidFill>
+                  <a:srgbClr val="9AA7BD"/>
+                </a:solidFill>
+                <a:latin typeface="Segoe UI"/>
+              </a:rPr>
+              <a:t>Relacionamento com provedor de nuvem</a:t>
+            </a:r>
+          </a:p>
+          <a:p>
+            <a:pPr>
+              <a:lnSpc>
+                <a:spcPct val="108000"/>
+              </a:lnSpc>
+              <a:spcAft>
+                <a:spcPts val="600"/>
+              </a:spcAft>
+            </a:pPr>
+            <a:r>
+              <a:rPr sz="1400" b="1">
+                <a:solidFill>
+                  <a:srgbClr val="2DD4BF"/>
+                </a:solidFill>
+                <a:latin typeface="Segoe UI"/>
+              </a:rPr>
+              <a:t>▪  </a:t>
+            </a:r>
+            <a:r>
+              <a:rPr sz="1400" b="0">
+                <a:solidFill>
+                  <a:srgbClr val="9AA7BD"/>
+                </a:solidFill>
+                <a:latin typeface="Segoe UI"/>
+              </a:rPr>
+              <a:t>Troca de parceiro </a:t>
+            </a:r>
+            <a:r>
+              <a:rPr sz="1400" b="1">
+                <a:solidFill>
+                  <a:srgbClr val="EAF0FB"/>
+                </a:solidFill>
+                <a:latin typeface="Segoe UI"/>
+              </a:rPr>
+              <a:t>AWS</a:t>
+            </a:r>
+          </a:p>
+        </p:txBody>
+      </p:sp>
+      <p:sp>
+        <p:nvSpPr>
+          <p:cNvPr id="5" name="TextBox 4"/>
+          <p:cNvSpPr txBox="1"/>
+          <p:nvPr/>
+        </p:nvSpPr>
+        <p:spPr>
+          <a:xfrm>
+            <a:off x="6309360" y="2194560"/>
+            <a:ext cx="5120640" cy="3931920"/>
+          </a:xfrm>
+          <a:prstGeom prst="rect">
+            <a:avLst/>
+          </a:prstGeom>
+          <a:noFill/>
+        </p:spPr>
+        <p:txBody>
+          <a:bodyPr wrap="square">
+            <a:spAutoFit/>
+          </a:bodyPr>
+          <a:lstStyle/>
+          <a:p>
+            <a:pPr>
+              <a:lnSpc>
+                <a:spcPct val="108000"/>
+              </a:lnSpc>
+              <a:spcAft>
+                <a:spcPts val="600"/>
+              </a:spcAft>
+            </a:pPr>
+            <a:r>
+              <a:rPr sz="1400" b="1">
+                <a:solidFill>
+                  <a:srgbClr val="2DD4BF"/>
+                </a:solidFill>
+                <a:latin typeface="Segoe UI"/>
+              </a:rPr>
+              <a:t>▪  </a:t>
+            </a:r>
+            <a:r>
+              <a:rPr sz="1400" b="0">
+                <a:solidFill>
+                  <a:srgbClr val="9AA7BD"/>
+                </a:solidFill>
+                <a:latin typeface="Segoe UI"/>
+              </a:rPr>
+              <a:t>Acompanhamento mensal de custos de nuvem</a:t>
+            </a:r>
+          </a:p>
+          <a:p>
+            <a:pPr>
+              <a:lnSpc>
+                <a:spcPct val="108000"/>
+              </a:lnSpc>
+              <a:spcAft>
+                <a:spcPts val="600"/>
+              </a:spcAft>
+            </a:pPr>
+            <a:r>
+              <a:rPr sz="1400" b="1">
+                <a:solidFill>
+                  <a:srgbClr val="2DD4BF"/>
+                </a:solidFill>
+                <a:latin typeface="Segoe UI"/>
+              </a:rPr>
+              <a:t>▪  </a:t>
+            </a:r>
+            <a:r>
+              <a:rPr sz="1400" b="0">
+                <a:solidFill>
+                  <a:srgbClr val="9AA7BD"/>
+                </a:solidFill>
+                <a:latin typeface="Segoe UI"/>
+              </a:rPr>
+              <a:t>Manutenção de </a:t>
+            </a:r>
+            <a:r>
+              <a:rPr sz="1400" b="1">
+                <a:solidFill>
+                  <a:srgbClr val="EAF0FB"/>
+                </a:solidFill>
+                <a:latin typeface="Segoe UI"/>
+              </a:rPr>
+              <a:t>custo zero</a:t>
+            </a:r>
+            <a:r>
+              <a:rPr sz="1400" b="0">
+                <a:solidFill>
+                  <a:srgbClr val="9AA7BD"/>
+                </a:solidFill>
+                <a:latin typeface="Segoe UI"/>
+              </a:rPr>
+              <a:t> de infraestrutura Starbem</a:t>
+            </a:r>
+          </a:p>
+          <a:p>
+            <a:pPr>
+              <a:lnSpc>
+                <a:spcPct val="108000"/>
+              </a:lnSpc>
+              <a:spcAft>
+                <a:spcPts val="600"/>
+              </a:spcAft>
+            </a:pPr>
+            <a:r>
+              <a:rPr sz="1400" b="1">
+                <a:solidFill>
+                  <a:srgbClr val="2DD4BF"/>
+                </a:solidFill>
+                <a:latin typeface="Segoe UI"/>
+              </a:rPr>
+              <a:t>▪  </a:t>
+            </a:r>
+            <a:r>
+              <a:rPr sz="1400" b="0">
+                <a:solidFill>
+                  <a:srgbClr val="9AA7BD"/>
+                </a:solidFill>
+                <a:latin typeface="Segoe UI"/>
+              </a:rPr>
+              <a:t>Relacionamento estratégico com fornecedores como </a:t>
+            </a:r>
+            <a:r>
+              <a:rPr sz="1400" b="1">
+                <a:solidFill>
+                  <a:srgbClr val="EAF0FB"/>
+                </a:solidFill>
+                <a:latin typeface="Segoe UI"/>
+              </a:rPr>
+              <a:t>Agora.io</a:t>
+            </a:r>
+            <a:r>
+              <a:rPr sz="1400" b="0">
+                <a:solidFill>
+                  <a:srgbClr val="9AA7BD"/>
+                </a:solidFill>
+                <a:latin typeface="Segoe UI"/>
+              </a:rPr>
+              <a:t> e </a:t>
+            </a:r>
+            <a:r>
+              <a:rPr sz="1400" b="1">
+                <a:solidFill>
+                  <a:srgbClr val="EAF0FB"/>
+                </a:solidFill>
+                <a:latin typeface="Segoe UI"/>
+              </a:rPr>
+              <a:t>Twilio</a:t>
+            </a:r>
+          </a:p>
+          <a:p>
+            <a:pPr>
+              <a:lnSpc>
+                <a:spcPct val="108000"/>
+              </a:lnSpc>
+              <a:spcAft>
+                <a:spcPts val="600"/>
+              </a:spcAft>
+            </a:pPr>
+            <a:r>
+              <a:rPr sz="1400" b="1">
+                <a:solidFill>
+                  <a:srgbClr val="2DD4BF"/>
+                </a:solidFill>
+                <a:latin typeface="Segoe UI"/>
+              </a:rPr>
+              <a:t>▪  </a:t>
+            </a:r>
+            <a:r>
+              <a:rPr sz="1400" b="0">
+                <a:solidFill>
+                  <a:srgbClr val="9AA7BD"/>
+                </a:solidFill>
+                <a:latin typeface="Segoe UI"/>
+              </a:rPr>
+              <a:t>Discussão de contrato para redução de custos com Agora e Twilio</a:t>
+            </a:r>
+          </a:p>
+        </p:txBody>
+      </p:sp>
+      <p:sp>
+        <p:nvSpPr>
+          <p:cNvPr id="6" name="TextBox 5"/>
+          <p:cNvSpPr txBox="1"/>
+          <p:nvPr/>
+        </p:nvSpPr>
+        <p:spPr>
+          <a:xfrm>
+            <a:off x="822960" y="6400800"/>
+            <a:ext cx="8229600" cy="365760"/>
+          </a:xfrm>
+          <a:prstGeom prst="rect">
+            <a:avLst/>
+          </a:prstGeom>
+          <a:noFill/>
+        </p:spPr>
+        <p:txBody>
+          <a:bodyPr wrap="square">
+            <a:spAutoFit/>
+          </a:bodyPr>
+          <a:lstStyle/>
+          <a:p>
+            <a:r>
+              <a:rPr sz="900" b="0">
+                <a:solidFill>
+                  <a:srgbClr val="9AA7BD"/>
+                </a:solidFill>
+                <a:latin typeface="Segoe UI"/>
+              </a:rPr>
+              <a:t>Starbem · Áreas de Atuação &amp; Impacto</a:t>
+            </a:r>
+          </a:p>
+        </p:txBody>
+      </p:sp>
+      <p:sp>
+        <p:nvSpPr>
+          <p:cNvPr id="7" name="TextBox 6"/>
+          <p:cNvSpPr txBox="1"/>
+          <p:nvPr/>
+        </p:nvSpPr>
+        <p:spPr>
+          <a:xfrm>
+            <a:off x="10972800" y="6400800"/>
+            <a:ext cx="822960" cy="365760"/>
+          </a:xfrm>
+          <a:prstGeom prst="rect">
+            <a:avLst/>
+          </a:prstGeom>
+          <a:noFill/>
+        </p:spPr>
+        <p:txBody>
+          <a:bodyPr wrap="square">
+            <a:spAutoFit/>
+          </a:bodyPr>
+          <a:lstStyle/>
+          <a:p>
+            <a:pPr algn="ctr"/>
+            <a:r>
+              <a:rPr sz="900" b="0">
+                <a:solidFill>
+                  <a:srgbClr val="9AA7BD"/>
+                </a:solidFill>
+                <a:latin typeface="Segoe UI"/>
+              </a:rPr>
+              <a:t>13</a:t>
+            </a:r>
+          </a:p>
+        </p:txBody>
+      </p:sp>
+    </p:spTree>
+  </p:cSld>
+  <p:clrMapOvr>
+    <a:masterClrMapping/>
+  </p:clrMapOvr>
+</p:sld>
+</file>
+
+<file path=ppt/slides/slide14.xml><?xml version="1.0" encoding="utf-8"?>
+<p:sld xmlns:a="http://schemas.openxmlformats.org/drawingml/2006/main" xmlns:p="http://schemas.openxmlformats.org/presentationml/2006/main" xmlns:r="http://schemas.openxmlformats.org/officeDocument/2006/relationships">
+  <p:cSld>
+    <p:bg>
+      <p:bgPr>
+        <a:solidFill>
+          <a:srgbClr val="0B1020"/>
+        </a:solidFill>
+        <a:effectLst/>
+      </p:bgPr>
+    </p:bg>
+    <p:spTree>
+      <p:nvGrpSpPr>
+        <p:cNvPr id="1" name=""/>
+        <p:cNvGrpSpPr/>
+        <p:nvPr/>
+      </p:nvGrpSpPr>
+      <p:grpSpPr/>
+      <p:sp>
+        <p:nvSpPr>
+          <p:cNvPr id="2" name="TextBox 1"/>
+          <p:cNvSpPr txBox="1"/>
+          <p:nvPr/>
+        </p:nvSpPr>
+        <p:spPr>
+          <a:xfrm>
+            <a:off x="822960" y="502920"/>
+            <a:ext cx="10515600" cy="457200"/>
+          </a:xfrm>
+          <a:prstGeom prst="rect">
+            <a:avLst/>
+          </a:prstGeom>
+          <a:noFill/>
+        </p:spPr>
+        <p:txBody>
+          <a:bodyPr wrap="square">
+            <a:spAutoFit/>
+          </a:bodyPr>
+          <a:lstStyle/>
+          <a:p>
+            <a:r>
+              <a:rPr sz="1250" b="1">
+                <a:solidFill>
+                  <a:srgbClr val="2DD4BF"/>
+                </a:solidFill>
+                <a:latin typeface="Segoe UI"/>
+              </a:rPr>
+              <a:t>CAMADA TRANSVERSAL</a:t>
+            </a:r>
+          </a:p>
+        </p:txBody>
+      </p:sp>
+      <p:sp>
+        <p:nvSpPr>
+          <p:cNvPr id="3" name="TextBox 2"/>
+          <p:cNvSpPr txBox="1"/>
+          <p:nvPr/>
+        </p:nvSpPr>
+        <p:spPr>
+          <a:xfrm>
+            <a:off x="822960" y="914400"/>
+            <a:ext cx="10515600" cy="1280160"/>
+          </a:xfrm>
+          <a:prstGeom prst="rect">
+            <a:avLst/>
+          </a:prstGeom>
+          <a:noFill/>
+        </p:spPr>
+        <p:txBody>
+          <a:bodyPr wrap="square">
+            <a:spAutoFit/>
+          </a:bodyPr>
+          <a:lstStyle/>
+          <a:p>
+            <a:r>
+              <a:rPr sz="3000" b="1">
+                <a:solidFill>
+                  <a:srgbClr val="EAF0FB"/>
+                </a:solidFill>
+                <a:latin typeface="Segoe UI"/>
+              </a:rPr>
+              <a:t>Estratégia Starbem</a:t>
+            </a:r>
+          </a:p>
+        </p:txBody>
+      </p:sp>
+      <p:sp>
+        <p:nvSpPr>
+          <p:cNvPr id="4" name="TextBox 3"/>
+          <p:cNvSpPr txBox="1"/>
+          <p:nvPr/>
+        </p:nvSpPr>
+        <p:spPr>
+          <a:xfrm>
+            <a:off x="822960" y="2194560"/>
+            <a:ext cx="10607040" cy="3931920"/>
+          </a:xfrm>
+          <a:prstGeom prst="rect">
+            <a:avLst/>
+          </a:prstGeom>
+          <a:noFill/>
+        </p:spPr>
+        <p:txBody>
+          <a:bodyPr wrap="square">
+            <a:spAutoFit/>
+          </a:bodyPr>
+          <a:lstStyle/>
+          <a:p>
+            <a:pPr>
+              <a:spcAft>
+                <a:spcPts val="600"/>
+              </a:spcAft>
+            </a:pPr>
+            <a:r>
+              <a:rPr sz="1250" b="1">
+                <a:solidFill>
+                  <a:srgbClr val="F4B740"/>
+                </a:solidFill>
+                <a:latin typeface="Segoe UI"/>
+              </a:rPr>
+              <a:t>ESTRATÉGIA</a:t>
+            </a:r>
+          </a:p>
+          <a:p>
+            <a:pPr>
+              <a:lnSpc>
+                <a:spcPct val="108000"/>
+              </a:lnSpc>
+              <a:spcAft>
+                <a:spcPts val="600"/>
+              </a:spcAft>
+            </a:pPr>
+            <a:r>
+              <a:rPr sz="1500" b="1">
+                <a:solidFill>
+                  <a:srgbClr val="2DD4BF"/>
+                </a:solidFill>
+                <a:latin typeface="Segoe UI"/>
+              </a:rPr>
+              <a:t>▪  </a:t>
+            </a:r>
+            <a:r>
+              <a:rPr sz="1500" b="0">
+                <a:solidFill>
+                  <a:srgbClr val="9AA7BD"/>
+                </a:solidFill>
+                <a:latin typeface="Segoe UI"/>
+              </a:rPr>
+              <a:t>Apoio na estruturação de </a:t>
+            </a:r>
+            <a:r>
+              <a:rPr sz="1500" b="1">
+                <a:solidFill>
+                  <a:srgbClr val="EAF0FB"/>
+                </a:solidFill>
+                <a:latin typeface="Segoe UI"/>
+              </a:rPr>
+              <a:t>OKRs</a:t>
+            </a:r>
+          </a:p>
+          <a:p>
+            <a:pPr>
+              <a:lnSpc>
+                <a:spcPct val="108000"/>
+              </a:lnSpc>
+              <a:spcAft>
+                <a:spcPts val="600"/>
+              </a:spcAft>
+            </a:pPr>
+            <a:r>
+              <a:rPr sz="1500" b="1">
+                <a:solidFill>
+                  <a:srgbClr val="2DD4BF"/>
+                </a:solidFill>
+                <a:latin typeface="Segoe UI"/>
+              </a:rPr>
+              <a:t>▪  </a:t>
+            </a:r>
+            <a:r>
+              <a:rPr sz="1500" b="0">
+                <a:solidFill>
+                  <a:srgbClr val="9AA7BD"/>
+                </a:solidFill>
+                <a:latin typeface="Segoe UI"/>
+              </a:rPr>
+              <a:t>Influência em múltiplas áreas e com múltiplos líderes para aumento de impacto</a:t>
+            </a:r>
+          </a:p>
+          <a:p>
+            <a:pPr>
+              <a:lnSpc>
+                <a:spcPct val="108000"/>
+              </a:lnSpc>
+              <a:spcAft>
+                <a:spcPts val="600"/>
+              </a:spcAft>
+            </a:pPr>
+            <a:r>
+              <a:rPr sz="1500" b="1">
+                <a:solidFill>
+                  <a:srgbClr val="2DD4BF"/>
+                </a:solidFill>
+                <a:latin typeface="Segoe UI"/>
+              </a:rPr>
+              <a:t>▪  </a:t>
+            </a:r>
+            <a:r>
+              <a:rPr sz="1500" b="0">
+                <a:solidFill>
+                  <a:srgbClr val="9AA7BD"/>
+                </a:solidFill>
+                <a:latin typeface="Segoe UI"/>
+              </a:rPr>
+              <a:t>Evolução nos processos de contratação para aumento de talentos no quadro de colaboradores</a:t>
+            </a:r>
+          </a:p>
+          <a:p>
+            <a:pPr>
+              <a:lnSpc>
+                <a:spcPct val="108000"/>
+              </a:lnSpc>
+              <a:spcAft>
+                <a:spcPts val="600"/>
+              </a:spcAft>
+            </a:pPr>
+            <a:r>
+              <a:rPr sz="1500" b="1">
+                <a:solidFill>
+                  <a:srgbClr val="2DD4BF"/>
+                </a:solidFill>
+                <a:latin typeface="Segoe UI"/>
+              </a:rPr>
+              <a:t>▪  </a:t>
+            </a:r>
+            <a:r>
+              <a:rPr sz="1500" b="0">
+                <a:solidFill>
+                  <a:srgbClr val="9AA7BD"/>
+                </a:solidFill>
+                <a:latin typeface="Segoe UI"/>
+              </a:rPr>
+              <a:t>Discussões estratégicas sobre o futuro dos produtos e construção de vantagem competitiva</a:t>
+            </a:r>
+          </a:p>
+        </p:txBody>
+      </p:sp>
+      <p:sp>
+        <p:nvSpPr>
+          <p:cNvPr id="5" name="TextBox 4"/>
+          <p:cNvSpPr txBox="1"/>
+          <p:nvPr/>
+        </p:nvSpPr>
+        <p:spPr>
+          <a:xfrm>
+            <a:off x="822960" y="6400800"/>
+            <a:ext cx="8229600" cy="365760"/>
+          </a:xfrm>
+          <a:prstGeom prst="rect">
+            <a:avLst/>
+          </a:prstGeom>
+          <a:noFill/>
+        </p:spPr>
+        <p:txBody>
+          <a:bodyPr wrap="square">
+            <a:spAutoFit/>
+          </a:bodyPr>
+          <a:lstStyle/>
+          <a:p>
+            <a:r>
+              <a:rPr sz="900" b="0">
+                <a:solidFill>
+                  <a:srgbClr val="9AA7BD"/>
+                </a:solidFill>
+                <a:latin typeface="Segoe UI"/>
+              </a:rPr>
+              <a:t>Starbem · Áreas de Atuação &amp; Impacto</a:t>
+            </a:r>
+          </a:p>
+        </p:txBody>
+      </p:sp>
+      <p:sp>
+        <p:nvSpPr>
+          <p:cNvPr id="6" name="TextBox 5"/>
+          <p:cNvSpPr txBox="1"/>
+          <p:nvPr/>
+        </p:nvSpPr>
+        <p:spPr>
+          <a:xfrm>
+            <a:off x="10972800" y="6400800"/>
+            <a:ext cx="822960" cy="365760"/>
+          </a:xfrm>
+          <a:prstGeom prst="rect">
+            <a:avLst/>
+          </a:prstGeom>
+          <a:noFill/>
+        </p:spPr>
+        <p:txBody>
+          <a:bodyPr wrap="square">
+            <a:spAutoFit/>
+          </a:bodyPr>
+          <a:lstStyle/>
+          <a:p>
+            <a:pPr algn="ctr"/>
+            <a:r>
+              <a:rPr sz="900" b="0">
+                <a:solidFill>
+                  <a:srgbClr val="9AA7BD"/>
+                </a:solidFill>
+                <a:latin typeface="Segoe UI"/>
+              </a:rPr>
+              <a:t>14</a:t>
+            </a:r>
+          </a:p>
+        </p:txBody>
+      </p:sp>
+    </p:spTree>
+  </p:cSld>
+  <p:clrMapOvr>
+    <a:masterClrMapping/>
+  </p:clrMapOvr>
+</p:sld>
+</file>
+
+<file path=ppt/slides/slide15.xml><?xml version="1.0" encoding="utf-8"?>
+<p:sld xmlns:a="http://schemas.openxmlformats.org/drawingml/2006/main" xmlns:p="http://schemas.openxmlformats.org/presentationml/2006/main" xmlns:r="http://schemas.openxmlformats.org/officeDocument/2006/relationships">
+  <p:cSld>
+    <p:bg>
+      <p:bgPr>
+        <a:solidFill>
+          <a:srgbClr val="0B1020"/>
+        </a:solidFill>
+        <a:effectLst/>
+      </p:bgPr>
+    </p:bg>
+    <p:spTree>
+      <p:nvGrpSpPr>
+        <p:cNvPr id="1" name=""/>
+        <p:cNvGrpSpPr/>
+        <p:nvPr/>
+      </p:nvGrpSpPr>
+      <p:grpSpPr/>
+      <p:sp>
+        <p:nvSpPr>
+          <p:cNvPr id="2" name="TextBox 1"/>
+          <p:cNvSpPr txBox="1"/>
+          <p:nvPr/>
+        </p:nvSpPr>
+        <p:spPr>
+          <a:xfrm>
+            <a:off x="822960" y="502920"/>
+            <a:ext cx="10515600" cy="457200"/>
+          </a:xfrm>
+          <a:prstGeom prst="rect">
+            <a:avLst/>
+          </a:prstGeom>
+          <a:noFill/>
+        </p:spPr>
+        <p:txBody>
+          <a:bodyPr wrap="square">
+            <a:spAutoFit/>
+          </a:bodyPr>
+          <a:lstStyle/>
+          <a:p>
+            <a:r>
+              <a:rPr sz="1250" b="1">
+                <a:solidFill>
+                  <a:srgbClr val="2DD4BF"/>
+                </a:solidFill>
+                <a:latin typeface="Segoe UI"/>
+              </a:rPr>
+              <a:t>O QUE CONECTA TODAS AS ÁREAS</a:t>
+            </a:r>
+          </a:p>
+        </p:txBody>
+      </p:sp>
+      <p:sp>
+        <p:nvSpPr>
+          <p:cNvPr id="3" name="TextBox 2"/>
+          <p:cNvSpPr txBox="1"/>
+          <p:nvPr/>
+        </p:nvSpPr>
+        <p:spPr>
+          <a:xfrm>
+            <a:off x="822960" y="914400"/>
+            <a:ext cx="10515600" cy="1280160"/>
+          </a:xfrm>
+          <a:prstGeom prst="rect">
+            <a:avLst/>
+          </a:prstGeom>
+          <a:noFill/>
+        </p:spPr>
+        <p:txBody>
+          <a:bodyPr wrap="square">
+            <a:spAutoFit/>
+          </a:bodyPr>
+          <a:lstStyle/>
+          <a:p>
+            <a:r>
+              <a:rPr sz="3000" b="1">
+                <a:solidFill>
+                  <a:srgbClr val="EAF0FB"/>
+                </a:solidFill>
+                <a:latin typeface="Segoe UI"/>
+              </a:rPr>
+              <a:t>Construí os times que sustentam a operação</a:t>
+            </a:r>
+          </a:p>
+        </p:txBody>
+      </p:sp>
+      <p:sp>
+        <p:nvSpPr>
+          <p:cNvPr id="4" name="TextBox 3"/>
+          <p:cNvSpPr txBox="1"/>
+          <p:nvPr/>
+        </p:nvSpPr>
+        <p:spPr>
+          <a:xfrm>
+            <a:off x="822960" y="1874519"/>
+            <a:ext cx="10332720" cy="914400"/>
+          </a:xfrm>
+          <a:prstGeom prst="rect">
+            <a:avLst/>
+          </a:prstGeom>
+          <a:noFill/>
+        </p:spPr>
+        <p:txBody>
+          <a:bodyPr wrap="square">
+            <a:spAutoFit/>
+          </a:bodyPr>
+          <a:lstStyle/>
+          <a:p>
+            <a:pPr>
+              <a:lnSpc>
+                <a:spcPct val="125000"/>
               </a:lnSpc>
             </a:pPr>
             <a:r>
-              <a:rPr sz="1700" b="0">
-                <a:solidFill>
-                  <a:srgbClr val="9AA7BD"/>
-                </a:solidFill>
-                <a:latin typeface="Segoe UI"/>
-              </a:rPr>
-              <a:t>Seis áreas de atuação, 15+ pessoas formadas, um produto de IA em crescimento acelerado e uma operação mais barata e mais confiável. Trouxe esse panorama para darmos visibilidade ao todo e </a:t>
-            </a:r>
-            <a:r>
               <a:rPr sz="1700" b="1">
                 <a:solidFill>
-                  <a:srgbClr val="EAF0FB"/>
-                </a:solidFill>
-                <a:latin typeface="Segoe UI"/>
-              </a:rPr>
-              <a:t>discutirmos juntos os próximos passos de cada frente.</a:t>
+                  <a:srgbClr val="2DD4BF"/>
+                </a:solidFill>
+                <a:latin typeface="Segoe UI"/>
+              </a:rPr>
+              <a:t>15+ pessoas</a:t>
+            </a:r>
+            <a:r>
+              <a:rPr sz="1600" b="0">
+                <a:solidFill>
+                  <a:srgbClr val="9AA7BD"/>
+                </a:solidFill>
+                <a:latin typeface="Segoe UI"/>
+              </a:rPr>
+              <a:t> contratadas e formadas em Tecnologia, Produto, Dados e Suporte. Por trás de cada área, um líder que estou desenvolvendo.</a:t>
             </a:r>
           </a:p>
         </p:txBody>
@@ -3786,12 +5678,12 @@
         </p:nvSpPr>
         <p:spPr>
           <a:xfrm>
-            <a:off x="822960" y="4206240"/>
-            <a:ext cx="1828800" cy="502920"/>
+            <a:off x="822960" y="3154680"/>
+            <a:ext cx="1207008" cy="502920"/>
           </a:xfrm>
           <a:prstGeom prst="roundRect">
             <a:avLst>
-              <a:gd name="adj" fmla="val 7000"/>
+              <a:gd name="adj" fmla="val 6000"/>
             </a:avLst>
           </a:prstGeom>
           <a:solidFill>
@@ -3834,8 +5726,8 @@
         </p:nvSpPr>
         <p:spPr>
           <a:xfrm>
-            <a:off x="822960" y="4206240"/>
-            <a:ext cx="1828800" cy="502920"/>
+            <a:off x="822960" y="3154680"/>
+            <a:ext cx="1207008" cy="502920"/>
           </a:xfrm>
           <a:prstGeom prst="rect">
             <a:avLst/>
@@ -3850,13 +5742,13 @@
           <a:p>
             <a:pPr algn="l"/>
             <a:r>
-              <a:rPr sz="1250" b="0">
+              <a:rPr sz="1300" b="1">
                 <a:solidFill>
                   <a:srgbClr val="EAF0FB"/>
                 </a:solidFill>
                 <a:latin typeface="Segoe UI"/>
               </a:rPr>
-              <a:t>Customer Success</a:t>
+              <a:t>Barbara</a:t>
             </a:r>
           </a:p>
         </p:txBody>
@@ -3869,12 +5761,12 @@
         </p:nvSpPr>
         <p:spPr>
           <a:xfrm>
-            <a:off x="2834640" y="4206240"/>
-            <a:ext cx="964692" cy="502920"/>
+            <a:off x="2176272" y="3154680"/>
+            <a:ext cx="1207008" cy="502920"/>
           </a:xfrm>
           <a:prstGeom prst="roundRect">
             <a:avLst>
-              <a:gd name="adj" fmla="val 7000"/>
+              <a:gd name="adj" fmla="val 6000"/>
             </a:avLst>
           </a:prstGeom>
           <a:solidFill>
@@ -3917,8 +5809,8 @@
         </p:nvSpPr>
         <p:spPr>
           <a:xfrm>
-            <a:off x="2834640" y="4206240"/>
-            <a:ext cx="964692" cy="502920"/>
+            <a:off x="2176272" y="3154680"/>
+            <a:ext cx="1207008" cy="502920"/>
           </a:xfrm>
           <a:prstGeom prst="rect">
             <a:avLst/>
@@ -3933,13 +5825,13 @@
           <a:p>
             <a:pPr algn="l"/>
             <a:r>
-              <a:rPr sz="1250" b="0">
+              <a:rPr sz="1300" b="1">
                 <a:solidFill>
                   <a:srgbClr val="EAF0FB"/>
                 </a:solidFill>
                 <a:latin typeface="Segoe UI"/>
               </a:rPr>
-              <a:t>Produto</a:t>
+              <a:t>Felipe</a:t>
             </a:r>
           </a:p>
         </p:txBody>
@@ -3952,12 +5844,12 @@
         </p:nvSpPr>
         <p:spPr>
           <a:xfrm>
-            <a:off x="3982212" y="4206240"/>
-            <a:ext cx="1252728" cy="502920"/>
+            <a:off x="3529584" y="3154680"/>
+            <a:ext cx="1207008" cy="502920"/>
           </a:xfrm>
           <a:prstGeom prst="roundRect">
             <a:avLst>
-              <a:gd name="adj" fmla="val 7000"/>
+              <a:gd name="adj" fmla="val 6000"/>
             </a:avLst>
           </a:prstGeom>
           <a:solidFill>
@@ -4000,8 +5892,8 @@
         </p:nvSpPr>
         <p:spPr>
           <a:xfrm>
-            <a:off x="3982212" y="4206240"/>
-            <a:ext cx="1252728" cy="502920"/>
+            <a:off x="3529584" y="3154680"/>
+            <a:ext cx="1207008" cy="502920"/>
           </a:xfrm>
           <a:prstGeom prst="rect">
             <a:avLst/>
@@ -4016,13 +5908,13 @@
           <a:p>
             <a:pPr algn="l"/>
             <a:r>
-              <a:rPr sz="1250" b="0">
+              <a:rPr sz="1300" b="1">
                 <a:solidFill>
                   <a:srgbClr val="EAF0FB"/>
                 </a:solidFill>
                 <a:latin typeface="Segoe UI"/>
               </a:rPr>
-              <a:t>Engenharia</a:t>
+              <a:t>Tenório</a:t>
             </a:r>
           </a:p>
         </p:txBody>
@@ -4035,12 +5927,12 @@
         </p:nvSpPr>
         <p:spPr>
           <a:xfrm>
-            <a:off x="5417820" y="4206240"/>
-            <a:ext cx="772668" cy="502920"/>
+            <a:off x="4882896" y="3154680"/>
+            <a:ext cx="1207008" cy="502920"/>
           </a:xfrm>
           <a:prstGeom prst="roundRect">
             <a:avLst>
-              <a:gd name="adj" fmla="val 7000"/>
+              <a:gd name="adj" fmla="val 6000"/>
             </a:avLst>
           </a:prstGeom>
           <a:solidFill>
@@ -4083,8 +5975,8 @@
         </p:nvSpPr>
         <p:spPr>
           <a:xfrm>
-            <a:off x="5417820" y="4206240"/>
-            <a:ext cx="772668" cy="502920"/>
+            <a:off x="4882896" y="3154680"/>
+            <a:ext cx="1207008" cy="502920"/>
           </a:xfrm>
           <a:prstGeom prst="rect">
             <a:avLst/>
@@ -4099,13 +5991,13 @@
           <a:p>
             <a:pPr algn="l"/>
             <a:r>
-              <a:rPr sz="1250" b="0">
+              <a:rPr sz="1300" b="1">
                 <a:solidFill>
                   <a:srgbClr val="EAF0FB"/>
                 </a:solidFill>
                 <a:latin typeface="Segoe UI"/>
               </a:rPr>
-              <a:t>Dados</a:t>
+              <a:t>Leo</a:t>
             </a:r>
           </a:p>
         </p:txBody>
@@ -4118,12 +6010,12 @@
         </p:nvSpPr>
         <p:spPr>
           <a:xfrm>
-            <a:off x="6373368" y="4206240"/>
-            <a:ext cx="1444752" cy="502920"/>
+            <a:off x="6236208" y="3154680"/>
+            <a:ext cx="1207008" cy="502920"/>
           </a:xfrm>
           <a:prstGeom prst="roundRect">
             <a:avLst>
-              <a:gd name="adj" fmla="val 7000"/>
+              <a:gd name="adj" fmla="val 6000"/>
             </a:avLst>
           </a:prstGeom>
           <a:solidFill>
@@ -4166,8 +6058,8 @@
         </p:nvSpPr>
         <p:spPr>
           <a:xfrm>
-            <a:off x="6373368" y="4206240"/>
-            <a:ext cx="1444752" cy="502920"/>
+            <a:off x="6236208" y="3154680"/>
+            <a:ext cx="1207008" cy="502920"/>
           </a:xfrm>
           <a:prstGeom prst="rect">
             <a:avLst/>
@@ -4182,13 +6074,13 @@
           <a:p>
             <a:pPr algn="l"/>
             <a:r>
-              <a:rPr sz="1250" b="0">
+              <a:rPr sz="1300" b="1">
                 <a:solidFill>
                   <a:srgbClr val="EAF0FB"/>
                 </a:solidFill>
                 <a:latin typeface="Segoe UI"/>
               </a:rPr>
-              <a:t>IT &amp; Suporte</a:t>
+              <a:t>Rodrigo</a:t>
             </a:r>
           </a:p>
         </p:txBody>
@@ -4201,12 +6093,12 @@
         </p:nvSpPr>
         <p:spPr>
           <a:xfrm>
-            <a:off x="8001000" y="4206240"/>
-            <a:ext cx="2116836" cy="502920"/>
+            <a:off x="7589520" y="3154680"/>
+            <a:ext cx="1207008" cy="502920"/>
           </a:xfrm>
           <a:prstGeom prst="roundRect">
             <a:avLst>
-              <a:gd name="adj" fmla="val 7000"/>
+              <a:gd name="adj" fmla="val 6000"/>
             </a:avLst>
           </a:prstGeom>
           <a:solidFill>
@@ -4249,8 +6141,8 @@
         </p:nvSpPr>
         <p:spPr>
           <a:xfrm>
-            <a:off x="8001000" y="4206240"/>
-            <a:ext cx="2116836" cy="502920"/>
+            <a:off x="7589520" y="3154680"/>
+            <a:ext cx="1207008" cy="502920"/>
           </a:xfrm>
           <a:prstGeom prst="rect">
             <a:avLst/>
@@ -4265,13 +6157,13 @@
           <a:p>
             <a:pPr algn="l"/>
             <a:r>
-              <a:rPr sz="1250" b="0">
+              <a:rPr sz="1300" b="1">
                 <a:solidFill>
                   <a:srgbClr val="EAF0FB"/>
                 </a:solidFill>
                 <a:latin typeface="Segoe UI"/>
               </a:rPr>
-              <a:t>Arquitetura &amp; Nuvem</a:t>
+              <a:t>Bruno</a:t>
             </a:r>
           </a:p>
         </p:txBody>
@@ -4284,12 +6176,12 @@
         </p:nvSpPr>
         <p:spPr>
           <a:xfrm>
-            <a:off x="822960" y="4846320"/>
-            <a:ext cx="1924812" cy="502920"/>
+            <a:off x="8942832" y="3154680"/>
+            <a:ext cx="1207008" cy="502920"/>
           </a:xfrm>
           <a:prstGeom prst="roundRect">
             <a:avLst>
-              <a:gd name="adj" fmla="val 7000"/>
+              <a:gd name="adj" fmla="val 6000"/>
             </a:avLst>
           </a:prstGeom>
           <a:solidFill>
@@ -4332,8 +6224,8 @@
         </p:nvSpPr>
         <p:spPr>
           <a:xfrm>
-            <a:off x="822960" y="4846320"/>
-            <a:ext cx="1924812" cy="502920"/>
+            <a:off x="8942832" y="3154680"/>
+            <a:ext cx="1207008" cy="502920"/>
           </a:xfrm>
           <a:prstGeom prst="rect">
             <a:avLst/>
@@ -4348,27 +6240,193 @@
           <a:p>
             <a:pPr algn="l"/>
             <a:r>
-              <a:rPr sz="1250" b="0">
+              <a:rPr sz="1300" b="1">
                 <a:solidFill>
                   <a:srgbClr val="EAF0FB"/>
                 </a:solidFill>
                 <a:latin typeface="Segoe UI"/>
               </a:rPr>
-              <a:t>Times &amp; Liderança</a:t>
-            </a:r>
-          </a:p>
-        </p:txBody>
-      </p:sp>
-      <p:sp>
-        <p:nvSpPr>
-          <p:cNvPr id="19" name="TextBox 18"/>
+              <a:t>Vitor</a:t>
+            </a:r>
+          </a:p>
+        </p:txBody>
+      </p:sp>
+      <p:sp>
+        <p:nvSpPr>
+          <p:cNvPr id="19" name="Rounded Rectangle 18"/>
+          <p:cNvSpPr/>
+          <p:nvPr/>
+        </p:nvSpPr>
+        <p:spPr>
+          <a:xfrm>
+            <a:off x="822960" y="3822191"/>
+            <a:ext cx="1207008" cy="502920"/>
+          </a:xfrm>
+          <a:prstGeom prst="roundRect">
+            <a:avLst>
+              <a:gd name="adj" fmla="val 6000"/>
+            </a:avLst>
+          </a:prstGeom>
+          <a:solidFill>
+            <a:srgbClr val="18223A"/>
+          </a:solidFill>
+          <a:ln w="12700">
+            <a:solidFill>
+              <a:srgbClr val="2A3652"/>
+            </a:solidFill>
+          </a:ln>
+          <a:effectLst/>
+        </p:spPr>
+        <p:style>
+          <a:lnRef idx="1">
+            <a:schemeClr val="accent1"/>
+          </a:lnRef>
+          <a:fillRef idx="3">
+            <a:schemeClr val="accent1"/>
+          </a:fillRef>
+          <a:effectRef idx="2">
+            <a:schemeClr val="accent1"/>
+          </a:effectRef>
+          <a:fontRef idx="minor">
+            <a:schemeClr val="lt1"/>
+          </a:fontRef>
+        </p:style>
+        <p:txBody>
+          <a:bodyPr rtlCol="0" anchor="ctr"/>
+          <a:lstStyle/>
+          <a:p>
+            <a:pPr algn="ctr"/>
+          </a:p>
+        </p:txBody>
+      </p:sp>
+      <p:sp>
+        <p:nvSpPr>
+          <p:cNvPr id="20" name="TextBox 19"/>
           <p:cNvSpPr txBox="1"/>
           <p:nvPr/>
         </p:nvSpPr>
         <p:spPr>
           <a:xfrm>
-            <a:off x="822960" y="6400800"/>
-            <a:ext cx="7315200" cy="365760"/>
+            <a:off x="822960" y="3822191"/>
+            <a:ext cx="1207008" cy="502920"/>
+          </a:xfrm>
+          <a:prstGeom prst="rect">
+            <a:avLst/>
+          </a:prstGeom>
+          <a:noFill/>
+        </p:spPr>
+        <p:txBody>
+          <a:bodyPr wrap="square" anchor="ctr">
+            <a:spAutoFit/>
+          </a:bodyPr>
+          <a:lstStyle/>
+          <a:p>
+            <a:pPr algn="l"/>
+            <a:r>
+              <a:rPr sz="1300" b="1">
+                <a:solidFill>
+                  <a:srgbClr val="EAF0FB"/>
+                </a:solidFill>
+                <a:latin typeface="Segoe UI"/>
+              </a:rPr>
+              <a:t>Humberto</a:t>
+            </a:r>
+          </a:p>
+        </p:txBody>
+      </p:sp>
+      <p:sp>
+        <p:nvSpPr>
+          <p:cNvPr id="21" name="Rounded Rectangle 20"/>
+          <p:cNvSpPr/>
+          <p:nvPr/>
+        </p:nvSpPr>
+        <p:spPr>
+          <a:xfrm>
+            <a:off x="2176272" y="3822191"/>
+            <a:ext cx="1207008" cy="502920"/>
+          </a:xfrm>
+          <a:prstGeom prst="roundRect">
+            <a:avLst>
+              <a:gd name="adj" fmla="val 6000"/>
+            </a:avLst>
+          </a:prstGeom>
+          <a:solidFill>
+            <a:srgbClr val="18223A"/>
+          </a:solidFill>
+          <a:ln w="12700">
+            <a:solidFill>
+              <a:srgbClr val="2A3652"/>
+            </a:solidFill>
+          </a:ln>
+          <a:effectLst/>
+        </p:spPr>
+        <p:style>
+          <a:lnRef idx="1">
+            <a:schemeClr val="accent1"/>
+          </a:lnRef>
+          <a:fillRef idx="3">
+            <a:schemeClr val="accent1"/>
+          </a:fillRef>
+          <a:effectRef idx="2">
+            <a:schemeClr val="accent1"/>
+          </a:effectRef>
+          <a:fontRef idx="minor">
+            <a:schemeClr val="lt1"/>
+          </a:fontRef>
+        </p:style>
+        <p:txBody>
+          <a:bodyPr rtlCol="0" anchor="ctr"/>
+          <a:lstStyle/>
+          <a:p>
+            <a:pPr algn="ctr"/>
+          </a:p>
+        </p:txBody>
+      </p:sp>
+      <p:sp>
+        <p:nvSpPr>
+          <p:cNvPr id="22" name="TextBox 21"/>
+          <p:cNvSpPr txBox="1"/>
+          <p:nvPr/>
+        </p:nvSpPr>
+        <p:spPr>
+          <a:xfrm>
+            <a:off x="2176272" y="3822191"/>
+            <a:ext cx="1207008" cy="502920"/>
+          </a:xfrm>
+          <a:prstGeom prst="rect">
+            <a:avLst/>
+          </a:prstGeom>
+          <a:noFill/>
+        </p:spPr>
+        <p:txBody>
+          <a:bodyPr wrap="square" anchor="ctr">
+            <a:spAutoFit/>
+          </a:bodyPr>
+          <a:lstStyle/>
+          <a:p>
+            <a:pPr algn="l"/>
+            <a:r>
+              <a:rPr sz="1300" b="1">
+                <a:solidFill>
+                  <a:srgbClr val="EAF0FB"/>
+                </a:solidFill>
+                <a:latin typeface="Segoe UI"/>
+              </a:rPr>
+              <a:t>Mila</a:t>
+            </a:r>
+          </a:p>
+        </p:txBody>
+      </p:sp>
+      <p:sp>
+        <p:nvSpPr>
+          <p:cNvPr id="23" name="TextBox 22"/>
+          <p:cNvSpPr txBox="1"/>
+          <p:nvPr/>
+        </p:nvSpPr>
+        <p:spPr>
+          <a:xfrm>
+            <a:off x="822960" y="4663440"/>
+            <a:ext cx="10332720" cy="914400"/>
           </a:xfrm>
           <a:prstGeom prst="rect">
             <a:avLst/>
@@ -4381,28 +6439,51 @@
           </a:bodyPr>
           <a:lstStyle/>
           <a:p>
-            <a:r>
-              <a:rPr sz="900" b="0">
-                <a:solidFill>
-                  <a:srgbClr val="9AA7BD"/>
-                </a:solidFill>
-                <a:latin typeface="Segoe UI"/>
-              </a:rPr>
-              <a:t>Starbem · Áreas de Atuação &amp; Impacto</a:t>
-            </a:r>
-          </a:p>
-        </p:txBody>
-      </p:sp>
-      <p:sp>
-        <p:nvSpPr>
-          <p:cNvPr id="20" name="TextBox 19"/>
+            <a:pPr>
+              <a:lnSpc>
+                <a:spcPct val="125000"/>
+              </a:lnSpc>
+            </a:pPr>
+            <a:r>
+              <a:rPr sz="1600" b="0">
+                <a:solidFill>
+                  <a:srgbClr val="9AA7BD"/>
+                </a:solidFill>
+                <a:latin typeface="Segoe UI"/>
+              </a:rPr>
+              <a:t>Resultado: um salto na </a:t>
+            </a:r>
+            <a:r>
+              <a:rPr sz="1600" b="1">
+                <a:solidFill>
+                  <a:srgbClr val="EAF0FB"/>
+                </a:solidFill>
+                <a:latin typeface="Segoe UI"/>
+              </a:rPr>
+              <a:t>qualidade percebida</a:t>
+            </a:r>
+            <a:r>
+              <a:rPr sz="1600" b="0">
+                <a:solidFill>
+                  <a:srgbClr val="9AA7BD"/>
+                </a:solidFill>
+                <a:latin typeface="Segoe UI"/>
+              </a:rPr>
+              <a:t> do time — consistência e confiabilidade que hoje são referência interna.</a:t>
+            </a:r>
+          </a:p>
+        </p:txBody>
+      </p:sp>
+      <p:sp>
+        <p:nvSpPr>
+          <p:cNvPr id="24" name="TextBox 23"/>
           <p:cNvSpPr txBox="1"/>
           <p:nvPr/>
         </p:nvSpPr>
         <p:spPr>
           <a:xfrm>
-            <a:off x="10972800" y="6400800"/>
-            <a:ext cx="822960" cy="365760"/>
+            <a:off x="822960" y="6400800"/>
+            <a:ext cx="8229600" cy="365760"/>
           </a:xfrm>
           <a:prstGeom prst="rect">
             <a:avLst/>
@@ -4415,6 +6496,40 @@
           </a:bodyPr>
           <a:lstStyle/>
           <a:p>
+            <a:r>
+              <a:rPr sz="900" b="0">
+                <a:solidFill>
+                  <a:srgbClr val="9AA7BD"/>
+                </a:solidFill>
+                <a:latin typeface="Segoe UI"/>
+              </a:rPr>
+              <a:t>Starbem · Áreas de Atuação &amp; Impacto</a:t>
+            </a:r>
+          </a:p>
+        </p:txBody>
+      </p:sp>
+      <p:sp>
+        <p:nvSpPr>
+          <p:cNvPr id="25" name="TextBox 24"/>
+          <p:cNvSpPr txBox="1"/>
+          <p:nvPr/>
+        </p:nvSpPr>
+        <p:spPr>
+          <a:xfrm>
+            <a:off x="10972800" y="6400800"/>
+            <a:ext cx="822960" cy="365760"/>
+          </a:xfrm>
+          <a:prstGeom prst="rect">
+            <a:avLst/>
+          </a:prstGeom>
+          <a:noFill/>
+        </p:spPr>
+        <p:txBody>
+          <a:bodyPr wrap="square">
+            <a:spAutoFit/>
+          </a:bodyPr>
+          <a:lstStyle/>
+          <a:p>
             <a:pPr algn="ctr"/>
             <a:r>
               <a:rPr sz="900" b="0">
@@ -4423,7 +6538,1693 @@
                 </a:solidFill>
                 <a:latin typeface="Segoe UI"/>
               </a:rPr>
-              <a:t>11</a:t>
+              <a:t>15</a:t>
+            </a:r>
+          </a:p>
+        </p:txBody>
+      </p:sp>
+    </p:spTree>
+  </p:cSld>
+  <p:clrMapOvr>
+    <a:masterClrMapping/>
+  </p:clrMapOvr>
+</p:sld>
+</file>
+
+<file path=ppt/slides/slide16.xml><?xml version="1.0" encoding="utf-8"?>
+<p:sld xmlns:a="http://schemas.openxmlformats.org/drawingml/2006/main" xmlns:p="http://schemas.openxmlformats.org/presentationml/2006/main" xmlns:r="http://schemas.openxmlformats.org/officeDocument/2006/relationships">
+  <p:cSld>
+    <p:bg>
+      <p:bgPr>
+        <a:solidFill>
+          <a:srgbClr val="0B1020"/>
+        </a:solidFill>
+        <a:effectLst/>
+      </p:bgPr>
+    </p:bg>
+    <p:spTree>
+      <p:nvGrpSpPr>
+        <p:cNvPr id="1" name=""/>
+        <p:cNvGrpSpPr/>
+        <p:nvPr/>
+      </p:nvGrpSpPr>
+      <p:grpSpPr/>
+      <p:sp>
+        <p:nvSpPr>
+          <p:cNvPr id="2" name="TextBox 1"/>
+          <p:cNvSpPr txBox="1"/>
+          <p:nvPr/>
+        </p:nvSpPr>
+        <p:spPr>
+          <a:xfrm>
+            <a:off x="822960" y="502920"/>
+            <a:ext cx="10515600" cy="457200"/>
+          </a:xfrm>
+          <a:prstGeom prst="rect">
+            <a:avLst/>
+          </a:prstGeom>
+          <a:noFill/>
+        </p:spPr>
+        <p:txBody>
+          <a:bodyPr wrap="square">
+            <a:spAutoFit/>
+          </a:bodyPr>
+          <a:lstStyle/>
+          <a:p>
+            <a:r>
+              <a:rPr sz="1250" b="1">
+                <a:solidFill>
+                  <a:srgbClr val="2DD4BF"/>
+                </a:solidFill>
+                <a:latin typeface="Segoe UI"/>
+              </a:rPr>
+              <a:t>DESTAQUES DO PERÍODO</a:t>
+            </a:r>
+          </a:p>
+        </p:txBody>
+      </p:sp>
+      <p:sp>
+        <p:nvSpPr>
+          <p:cNvPr id="3" name="TextBox 2"/>
+          <p:cNvSpPr txBox="1"/>
+          <p:nvPr/>
+        </p:nvSpPr>
+        <p:spPr>
+          <a:xfrm>
+            <a:off x="822960" y="914400"/>
+            <a:ext cx="10515600" cy="1280160"/>
+          </a:xfrm>
+          <a:prstGeom prst="rect">
+            <a:avLst/>
+          </a:prstGeom>
+          <a:noFill/>
+        </p:spPr>
+        <p:txBody>
+          <a:bodyPr wrap="square">
+            <a:spAutoFit/>
+          </a:bodyPr>
+          <a:lstStyle/>
+          <a:p>
+            <a:r>
+              <a:rPr sz="3000" b="1">
+                <a:solidFill>
+                  <a:srgbClr val="EAF0FB"/>
+                </a:solidFill>
+                <a:latin typeface="Segoe UI"/>
+              </a:rPr>
+              <a:t>Três entregas que mudaram o patamar</a:t>
+            </a:r>
+          </a:p>
+        </p:txBody>
+      </p:sp>
+      <p:sp>
+        <p:nvSpPr>
+          <p:cNvPr id="4" name="Rounded Rectangle 3"/>
+          <p:cNvSpPr/>
+          <p:nvPr/>
+        </p:nvSpPr>
+        <p:spPr>
+          <a:xfrm>
+            <a:off x="822960" y="2377440"/>
+            <a:ext cx="3337560" cy="2468880"/>
+          </a:xfrm>
+          <a:prstGeom prst="roundRect">
+            <a:avLst>
+              <a:gd name="adj" fmla="val 6000"/>
+            </a:avLst>
+          </a:prstGeom>
+          <a:solidFill>
+            <a:srgbClr val="18223A"/>
+          </a:solidFill>
+          <a:ln w="12700">
+            <a:solidFill>
+              <a:srgbClr val="2A3652"/>
+            </a:solidFill>
+          </a:ln>
+          <a:effectLst/>
+        </p:spPr>
+        <p:style>
+          <a:lnRef idx="1">
+            <a:schemeClr val="accent1"/>
+          </a:lnRef>
+          <a:fillRef idx="3">
+            <a:schemeClr val="accent1"/>
+          </a:fillRef>
+          <a:effectRef idx="2">
+            <a:schemeClr val="accent1"/>
+          </a:effectRef>
+          <a:fontRef idx="minor">
+            <a:schemeClr val="lt1"/>
+          </a:fontRef>
+        </p:style>
+        <p:txBody>
+          <a:bodyPr rtlCol="0" anchor="ctr"/>
+          <a:lstStyle/>
+          <a:p>
+            <a:pPr algn="ctr"/>
+          </a:p>
+        </p:txBody>
+      </p:sp>
+      <p:sp>
+        <p:nvSpPr>
+          <p:cNvPr id="5" name="TextBox 4"/>
+          <p:cNvSpPr txBox="1"/>
+          <p:nvPr/>
+        </p:nvSpPr>
+        <p:spPr>
+          <a:xfrm>
+            <a:off x="1097280" y="2697480"/>
+            <a:ext cx="2788920" cy="1920240"/>
+          </a:xfrm>
+          <a:prstGeom prst="rect">
+            <a:avLst/>
+          </a:prstGeom>
+          <a:noFill/>
+        </p:spPr>
+        <p:txBody>
+          <a:bodyPr wrap="square">
+            <a:spAutoFit/>
+          </a:bodyPr>
+          <a:lstStyle/>
+          <a:p>
+            <a:r>
+              <a:rPr sz="2900" b="1">
+                <a:solidFill>
+                  <a:srgbClr val="2DD4BF"/>
+                </a:solidFill>
+                <a:latin typeface="Segoe UI"/>
+              </a:rPr>
+              <a:t>R$30k → 100k</a:t>
+            </a:r>
+          </a:p>
+          <a:p>
+            <a:pPr>
+              <a:lnSpc>
+                <a:spcPct val="120000"/>
+              </a:lnSpc>
+              <a:spcBef>
+                <a:spcPts val="1000"/>
+              </a:spcBef>
+            </a:pPr>
+            <a:r>
+              <a:rPr sz="1350" b="0">
+                <a:solidFill>
+                  <a:srgbClr val="9AA7BD"/>
+                </a:solidFill>
+                <a:latin typeface="Segoe UI"/>
+              </a:rPr>
+              <a:t>MRR do novo produto 100% IA, puxado por iFood e TotalPass México</a:t>
+            </a:r>
+          </a:p>
+        </p:txBody>
+      </p:sp>
+      <p:sp>
+        <p:nvSpPr>
+          <p:cNvPr id="6" name="Rounded Rectangle 5"/>
+          <p:cNvSpPr/>
+          <p:nvPr/>
+        </p:nvSpPr>
+        <p:spPr>
+          <a:xfrm>
+            <a:off x="4425696" y="2377440"/>
+            <a:ext cx="3337560" cy="2468880"/>
+          </a:xfrm>
+          <a:prstGeom prst="roundRect">
+            <a:avLst>
+              <a:gd name="adj" fmla="val 6000"/>
+            </a:avLst>
+          </a:prstGeom>
+          <a:solidFill>
+            <a:srgbClr val="18223A"/>
+          </a:solidFill>
+          <a:ln w="12700">
+            <a:solidFill>
+              <a:srgbClr val="2A3652"/>
+            </a:solidFill>
+          </a:ln>
+          <a:effectLst/>
+        </p:spPr>
+        <p:style>
+          <a:lnRef idx="1">
+            <a:schemeClr val="accent1"/>
+          </a:lnRef>
+          <a:fillRef idx="3">
+            <a:schemeClr val="accent1"/>
+          </a:fillRef>
+          <a:effectRef idx="2">
+            <a:schemeClr val="accent1"/>
+          </a:effectRef>
+          <a:fontRef idx="minor">
+            <a:schemeClr val="lt1"/>
+          </a:fontRef>
+        </p:style>
+        <p:txBody>
+          <a:bodyPr rtlCol="0" anchor="ctr"/>
+          <a:lstStyle/>
+          <a:p>
+            <a:pPr algn="ctr"/>
+          </a:p>
+        </p:txBody>
+      </p:sp>
+      <p:sp>
+        <p:nvSpPr>
+          <p:cNvPr id="7" name="TextBox 6"/>
+          <p:cNvSpPr txBox="1"/>
+          <p:nvPr/>
+        </p:nvSpPr>
+        <p:spPr>
+          <a:xfrm>
+            <a:off x="4700016" y="2697480"/>
+            <a:ext cx="2788920" cy="1920240"/>
+          </a:xfrm>
+          <a:prstGeom prst="rect">
+            <a:avLst/>
+          </a:prstGeom>
+          <a:noFill/>
+        </p:spPr>
+        <p:txBody>
+          <a:bodyPr wrap="square">
+            <a:spAutoFit/>
+          </a:bodyPr>
+          <a:lstStyle/>
+          <a:p>
+            <a:r>
+              <a:rPr sz="2900" b="1">
+                <a:solidFill>
+                  <a:srgbClr val="2DD4BF"/>
+                </a:solidFill>
+                <a:latin typeface="Segoe UI"/>
+              </a:rPr>
+              <a:t>15+</a:t>
+            </a:r>
+          </a:p>
+          <a:p>
+            <a:pPr>
+              <a:lnSpc>
+                <a:spcPct val="120000"/>
+              </a:lnSpc>
+              <a:spcBef>
+                <a:spcPts val="1000"/>
+              </a:spcBef>
+            </a:pPr>
+            <a:r>
+              <a:rPr sz="1350" b="0">
+                <a:solidFill>
+                  <a:srgbClr val="9AA7BD"/>
+                </a:solidFill>
+                <a:latin typeface="Segoe UI"/>
+              </a:rPr>
+              <a:t>pessoas contratadas e formadas, com líderes em desenvolvimento</a:t>
+            </a:r>
+          </a:p>
+        </p:txBody>
+      </p:sp>
+      <p:sp>
+        <p:nvSpPr>
+          <p:cNvPr id="8" name="Rounded Rectangle 7"/>
+          <p:cNvSpPr/>
+          <p:nvPr/>
+        </p:nvSpPr>
+        <p:spPr>
+          <a:xfrm>
+            <a:off x="8028431" y="2377440"/>
+            <a:ext cx="3337560" cy="2468880"/>
+          </a:xfrm>
+          <a:prstGeom prst="roundRect">
+            <a:avLst>
+              <a:gd name="adj" fmla="val 6000"/>
+            </a:avLst>
+          </a:prstGeom>
+          <a:solidFill>
+            <a:srgbClr val="18223A"/>
+          </a:solidFill>
+          <a:ln w="12700">
+            <a:solidFill>
+              <a:srgbClr val="2A3652"/>
+            </a:solidFill>
+          </a:ln>
+          <a:effectLst/>
+        </p:spPr>
+        <p:style>
+          <a:lnRef idx="1">
+            <a:schemeClr val="accent1"/>
+          </a:lnRef>
+          <a:fillRef idx="3">
+            <a:schemeClr val="accent1"/>
+          </a:fillRef>
+          <a:effectRef idx="2">
+            <a:schemeClr val="accent1"/>
+          </a:effectRef>
+          <a:fontRef idx="minor">
+            <a:schemeClr val="lt1"/>
+          </a:fontRef>
+        </p:style>
+        <p:txBody>
+          <a:bodyPr rtlCol="0" anchor="ctr"/>
+          <a:lstStyle/>
+          <a:p>
+            <a:pPr algn="ctr"/>
+          </a:p>
+        </p:txBody>
+      </p:sp>
+      <p:sp>
+        <p:nvSpPr>
+          <p:cNvPr id="9" name="TextBox 8"/>
+          <p:cNvSpPr txBox="1"/>
+          <p:nvPr/>
+        </p:nvSpPr>
+        <p:spPr>
+          <a:xfrm>
+            <a:off x="8302752" y="2697480"/>
+            <a:ext cx="2788920" cy="1920240"/>
+          </a:xfrm>
+          <a:prstGeom prst="rect">
+            <a:avLst/>
+          </a:prstGeom>
+          <a:noFill/>
+        </p:spPr>
+        <p:txBody>
+          <a:bodyPr wrap="square">
+            <a:spAutoFit/>
+          </a:bodyPr>
+          <a:lstStyle/>
+          <a:p>
+            <a:r>
+              <a:rPr sz="2900" b="1">
+                <a:solidFill>
+                  <a:srgbClr val="2DD4BF"/>
+                </a:solidFill>
+                <a:latin typeface="Segoe UI"/>
+              </a:rPr>
+              <a:t>~R$800k</a:t>
+            </a:r>
+          </a:p>
+          <a:p>
+            <a:pPr>
+              <a:lnSpc>
+                <a:spcPct val="120000"/>
+              </a:lnSpc>
+              <a:spcBef>
+                <a:spcPts val="1000"/>
+              </a:spcBef>
+            </a:pPr>
+            <a:r>
+              <a:rPr sz="1350" b="0">
+                <a:solidFill>
+                  <a:srgbClr val="9AA7BD"/>
+                </a:solidFill>
+                <a:latin typeface="Segoe UI"/>
+              </a:rPr>
+              <a:t>de custo de nuvem evitado até dez/2026 (Azure → AWS + créditos)</a:t>
+            </a:r>
+          </a:p>
+        </p:txBody>
+      </p:sp>
+      <p:sp>
+        <p:nvSpPr>
+          <p:cNvPr id="10" name="TextBox 9"/>
+          <p:cNvSpPr txBox="1"/>
+          <p:nvPr/>
+        </p:nvSpPr>
+        <p:spPr>
+          <a:xfrm>
+            <a:off x="822960" y="5212080"/>
+            <a:ext cx="10515600" cy="914400"/>
+          </a:xfrm>
+          <a:prstGeom prst="rect">
+            <a:avLst/>
+          </a:prstGeom>
+          <a:noFill/>
+        </p:spPr>
+        <p:txBody>
+          <a:bodyPr wrap="square">
+            <a:spAutoFit/>
+          </a:bodyPr>
+          <a:lstStyle/>
+          <a:p>
+            <a:pPr>
+              <a:lnSpc>
+                <a:spcPct val="120000"/>
+              </a:lnSpc>
+            </a:pPr>
+            <a:r>
+              <a:rPr sz="1400" b="0">
+                <a:solidFill>
+                  <a:srgbClr val="9AA7BD"/>
+                </a:solidFill>
+                <a:latin typeface="Segoe UI"/>
+              </a:rPr>
+              <a:t>Além de receita habilitada em parcerias, risco mitigado em segurança e a base de dados pronta para decisões preditivas.</a:t>
+            </a:r>
+          </a:p>
+        </p:txBody>
+      </p:sp>
+      <p:sp>
+        <p:nvSpPr>
+          <p:cNvPr id="11" name="TextBox 10"/>
+          <p:cNvSpPr txBox="1"/>
+          <p:nvPr/>
+        </p:nvSpPr>
+        <p:spPr>
+          <a:xfrm>
+            <a:off x="822960" y="6400800"/>
+            <a:ext cx="8229600" cy="365760"/>
+          </a:xfrm>
+          <a:prstGeom prst="rect">
+            <a:avLst/>
+          </a:prstGeom>
+          <a:noFill/>
+        </p:spPr>
+        <p:txBody>
+          <a:bodyPr wrap="square">
+            <a:spAutoFit/>
+          </a:bodyPr>
+          <a:lstStyle/>
+          <a:p>
+            <a:r>
+              <a:rPr sz="900" b="0">
+                <a:solidFill>
+                  <a:srgbClr val="9AA7BD"/>
+                </a:solidFill>
+                <a:latin typeface="Segoe UI"/>
+              </a:rPr>
+              <a:t>Starbem · Áreas de Atuação &amp; Impacto</a:t>
+            </a:r>
+          </a:p>
+        </p:txBody>
+      </p:sp>
+      <p:sp>
+        <p:nvSpPr>
+          <p:cNvPr id="12" name="TextBox 11"/>
+          <p:cNvSpPr txBox="1"/>
+          <p:nvPr/>
+        </p:nvSpPr>
+        <p:spPr>
+          <a:xfrm>
+            <a:off x="10972800" y="6400800"/>
+            <a:ext cx="822960" cy="365760"/>
+          </a:xfrm>
+          <a:prstGeom prst="rect">
+            <a:avLst/>
+          </a:prstGeom>
+          <a:noFill/>
+        </p:spPr>
+        <p:txBody>
+          <a:bodyPr wrap="square">
+            <a:spAutoFit/>
+          </a:bodyPr>
+          <a:lstStyle/>
+          <a:p>
+            <a:pPr algn="ctr"/>
+            <a:r>
+              <a:rPr sz="900" b="0">
+                <a:solidFill>
+                  <a:srgbClr val="9AA7BD"/>
+                </a:solidFill>
+                <a:latin typeface="Segoe UI"/>
+              </a:rPr>
+              <a:t>16</a:t>
+            </a:r>
+          </a:p>
+        </p:txBody>
+      </p:sp>
+    </p:spTree>
+  </p:cSld>
+  <p:clrMapOvr>
+    <a:masterClrMapping/>
+  </p:clrMapOvr>
+</p:sld>
+</file>
+
+<file path=ppt/slides/slide17.xml><?xml version="1.0" encoding="utf-8"?>
+<p:sld xmlns:a="http://schemas.openxmlformats.org/drawingml/2006/main" xmlns:p="http://schemas.openxmlformats.org/presentationml/2006/main" xmlns:r="http://schemas.openxmlformats.org/officeDocument/2006/relationships">
+  <p:cSld>
+    <p:bg>
+      <p:bgPr>
+        <a:solidFill>
+          <a:srgbClr val="0B1020"/>
+        </a:solidFill>
+        <a:effectLst/>
+      </p:bgPr>
+    </p:bg>
+    <p:spTree>
+      <p:nvGrpSpPr>
+        <p:cNvPr id="1" name=""/>
+        <p:cNvGrpSpPr/>
+        <p:nvPr/>
+      </p:nvGrpSpPr>
+      <p:grpSpPr/>
+      <p:sp>
+        <p:nvSpPr>
+          <p:cNvPr id="2" name="TextBox 1"/>
+          <p:cNvSpPr txBox="1"/>
+          <p:nvPr/>
+        </p:nvSpPr>
+        <p:spPr>
+          <a:xfrm>
+            <a:off x="822960" y="502920"/>
+            <a:ext cx="10515600" cy="457200"/>
+          </a:xfrm>
+          <a:prstGeom prst="rect">
+            <a:avLst/>
+          </a:prstGeom>
+          <a:noFill/>
+        </p:spPr>
+        <p:txBody>
+          <a:bodyPr wrap="square">
+            <a:spAutoFit/>
+          </a:bodyPr>
+          <a:lstStyle/>
+          <a:p>
+            <a:r>
+              <a:rPr sz="1250" b="1">
+                <a:solidFill>
+                  <a:srgbClr val="2DD4BF"/>
+                </a:solidFill>
+                <a:latin typeface="Segoe UI"/>
+              </a:rPr>
+              <a:t>PARA ONDE VAI</a:t>
+            </a:r>
+          </a:p>
+        </p:txBody>
+      </p:sp>
+      <p:sp>
+        <p:nvSpPr>
+          <p:cNvPr id="3" name="TextBox 2"/>
+          <p:cNvSpPr txBox="1"/>
+          <p:nvPr/>
+        </p:nvSpPr>
+        <p:spPr>
+          <a:xfrm>
+            <a:off x="822960" y="914400"/>
+            <a:ext cx="10515600" cy="1280160"/>
+          </a:xfrm>
+          <a:prstGeom prst="rect">
+            <a:avLst/>
+          </a:prstGeom>
+          <a:noFill/>
+        </p:spPr>
+        <p:txBody>
+          <a:bodyPr wrap="square">
+            <a:spAutoFit/>
+          </a:bodyPr>
+          <a:lstStyle/>
+          <a:p>
+            <a:r>
+              <a:rPr sz="3000" b="1">
+                <a:solidFill>
+                  <a:srgbClr val="EAF0FB"/>
+                </a:solidFill>
+                <a:latin typeface="Segoe UI"/>
+              </a:rPr>
+              <a:t>Estratégia de produto com IA — próximos 12 meses</a:t>
+            </a:r>
+          </a:p>
+        </p:txBody>
+      </p:sp>
+      <p:sp>
+        <p:nvSpPr>
+          <p:cNvPr id="4" name="TextBox 3"/>
+          <p:cNvSpPr txBox="1"/>
+          <p:nvPr/>
+        </p:nvSpPr>
+        <p:spPr>
+          <a:xfrm>
+            <a:off x="822960" y="2194560"/>
+            <a:ext cx="10607040" cy="3931920"/>
+          </a:xfrm>
+          <a:prstGeom prst="rect">
+            <a:avLst/>
+          </a:prstGeom>
+          <a:noFill/>
+        </p:spPr>
+        <p:txBody>
+          <a:bodyPr wrap="square">
+            <a:spAutoFit/>
+          </a:bodyPr>
+          <a:lstStyle/>
+          <a:p>
+            <a:pPr>
+              <a:lnSpc>
+                <a:spcPct val="108000"/>
+              </a:lnSpc>
+              <a:spcAft>
+                <a:spcPts val="600"/>
+              </a:spcAft>
+            </a:pPr>
+            <a:r>
+              <a:rPr sz="1600" b="1">
+                <a:solidFill>
+                  <a:srgbClr val="2DD4BF"/>
+                </a:solidFill>
+                <a:latin typeface="Segoe UI"/>
+              </a:rPr>
+              <a:t>▪  </a:t>
+            </a:r>
+            <a:r>
+              <a:rPr sz="1600" b="1">
+                <a:solidFill>
+                  <a:srgbClr val="EAF0FB"/>
+                </a:solidFill>
+                <a:latin typeface="Segoe UI"/>
+              </a:rPr>
+              <a:t>Produto 100% IA</a:t>
+            </a:r>
+            <a:r>
+              <a:rPr sz="1600" b="0">
+                <a:solidFill>
+                  <a:srgbClr val="9AA7BD"/>
+                </a:solidFill>
+                <a:latin typeface="Segoe UI"/>
+              </a:rPr>
+              <a:t> em escala: de R$30k para </a:t>
+            </a:r>
+            <a:r>
+              <a:rPr sz="1600" b="1">
+                <a:solidFill>
+                  <a:srgbClr val="EAF0FB"/>
+                </a:solidFill>
+                <a:latin typeface="Segoe UI"/>
+              </a:rPr>
+              <a:t>+R$100k de MRR</a:t>
+            </a:r>
+            <a:r>
+              <a:rPr sz="1600" b="0">
+                <a:solidFill>
+                  <a:srgbClr val="9AA7BD"/>
+                </a:solidFill>
+                <a:latin typeface="Segoe UI"/>
+              </a:rPr>
+              <a:t>, com pipeline de parceiros (iFood, TotalPass México)</a:t>
+            </a:r>
+          </a:p>
+          <a:p>
+            <a:pPr>
+              <a:lnSpc>
+                <a:spcPct val="108000"/>
+              </a:lnSpc>
+              <a:spcAft>
+                <a:spcPts val="600"/>
+              </a:spcAft>
+            </a:pPr>
+            <a:r>
+              <a:rPr sz="1600" b="1">
+                <a:solidFill>
+                  <a:srgbClr val="2DD4BF"/>
+                </a:solidFill>
+                <a:latin typeface="Segoe UI"/>
+              </a:rPr>
+              <a:t>▪  </a:t>
+            </a:r>
+            <a:r>
+              <a:rPr sz="1600" b="1">
+                <a:solidFill>
+                  <a:srgbClr val="EAF0FB"/>
+                </a:solidFill>
+                <a:latin typeface="Segoe UI"/>
+              </a:rPr>
+              <a:t>ExABI</a:t>
+            </a:r>
+            <a:r>
+              <a:rPr sz="1600" b="0">
+                <a:solidFill>
+                  <a:srgbClr val="9AA7BD"/>
+                </a:solidFill>
+                <a:latin typeface="Segoe UI"/>
+              </a:rPr>
+              <a:t> — camada agêntica da Starbem como diferencial competitivo</a:t>
+            </a:r>
+          </a:p>
+          <a:p>
+            <a:pPr>
+              <a:lnSpc>
+                <a:spcPct val="108000"/>
+              </a:lnSpc>
+              <a:spcAft>
+                <a:spcPts val="600"/>
+              </a:spcAft>
+            </a:pPr>
+            <a:r>
+              <a:rPr sz="1600" b="1">
+                <a:solidFill>
+                  <a:srgbClr val="2DD4BF"/>
+                </a:solidFill>
+                <a:latin typeface="Segoe UI"/>
+              </a:rPr>
+              <a:t>▪  </a:t>
+            </a:r>
+            <a:r>
+              <a:rPr sz="1600" b="1">
+                <a:solidFill>
+                  <a:srgbClr val="EAF0FB"/>
+                </a:solidFill>
+                <a:latin typeface="Segoe UI"/>
+              </a:rPr>
+              <a:t>StarBrain</a:t>
+            </a:r>
+            <a:r>
+              <a:rPr sz="1600" b="0">
+                <a:solidFill>
+                  <a:srgbClr val="9AA7BD"/>
+                </a:solidFill>
+                <a:latin typeface="Segoe UI"/>
+              </a:rPr>
+              <a:t> retroalimentado por dados: visão unificada de paciente e profissional</a:t>
+            </a:r>
+          </a:p>
+          <a:p>
+            <a:pPr>
+              <a:lnSpc>
+                <a:spcPct val="108000"/>
+              </a:lnSpc>
+              <a:spcAft>
+                <a:spcPts val="600"/>
+              </a:spcAft>
+            </a:pPr>
+            <a:r>
+              <a:rPr sz="1600" b="1">
+                <a:solidFill>
+                  <a:srgbClr val="2DD4BF"/>
+                </a:solidFill>
+                <a:latin typeface="Segoe UI"/>
+              </a:rPr>
+              <a:t>▪  </a:t>
+            </a:r>
+            <a:r>
+              <a:rPr sz="1600" b="1">
+                <a:solidFill>
+                  <a:srgbClr val="EAF0FB"/>
+                </a:solidFill>
+                <a:latin typeface="Segoe UI"/>
+              </a:rPr>
+              <a:t>Datalake preditivo</a:t>
+            </a:r>
+            <a:r>
+              <a:rPr sz="1600" b="0">
+                <a:solidFill>
+                  <a:srgbClr val="9AA7BD"/>
+                </a:solidFill>
+                <a:latin typeface="Segoe UI"/>
+              </a:rPr>
+              <a:t> ligando dados a impacto financeiro do negócio</a:t>
+            </a:r>
+          </a:p>
+          <a:p>
+            <a:pPr>
+              <a:lnSpc>
+                <a:spcPct val="108000"/>
+              </a:lnSpc>
+              <a:spcAft>
+                <a:spcPts val="600"/>
+              </a:spcAft>
+            </a:pPr>
+            <a:r>
+              <a:rPr sz="1600" b="1">
+                <a:solidFill>
+                  <a:srgbClr val="2DD4BF"/>
+                </a:solidFill>
+                <a:latin typeface="Segoe UI"/>
+              </a:rPr>
+              <a:t>▪  </a:t>
+            </a:r>
+            <a:r>
+              <a:rPr sz="1600" b="1">
+                <a:solidFill>
+                  <a:srgbClr val="EAF0FB"/>
+                </a:solidFill>
+                <a:latin typeface="Segoe UI"/>
+              </a:rPr>
+              <a:t>Tiny Teams</a:t>
+            </a:r>
+            <a:r>
+              <a:rPr sz="1600" b="0">
+                <a:solidFill>
+                  <a:srgbClr val="9AA7BD"/>
+                </a:solidFill>
+                <a:latin typeface="Segoe UI"/>
+              </a:rPr>
+              <a:t>: fazer mais com menos, escalando operação com IA</a:t>
+            </a:r>
+          </a:p>
+        </p:txBody>
+      </p:sp>
+      <p:sp>
+        <p:nvSpPr>
+          <p:cNvPr id="5" name="TextBox 4"/>
+          <p:cNvSpPr txBox="1"/>
+          <p:nvPr/>
+        </p:nvSpPr>
+        <p:spPr>
+          <a:xfrm>
+            <a:off x="822960" y="6400800"/>
+            <a:ext cx="8229600" cy="365760"/>
+          </a:xfrm>
+          <a:prstGeom prst="rect">
+            <a:avLst/>
+          </a:prstGeom>
+          <a:noFill/>
+        </p:spPr>
+        <p:txBody>
+          <a:bodyPr wrap="square">
+            <a:spAutoFit/>
+          </a:bodyPr>
+          <a:lstStyle/>
+          <a:p>
+            <a:r>
+              <a:rPr sz="900" b="0">
+                <a:solidFill>
+                  <a:srgbClr val="9AA7BD"/>
+                </a:solidFill>
+                <a:latin typeface="Segoe UI"/>
+              </a:rPr>
+              <a:t>Starbem · Áreas de Atuação &amp; Impacto</a:t>
+            </a:r>
+          </a:p>
+        </p:txBody>
+      </p:sp>
+      <p:sp>
+        <p:nvSpPr>
+          <p:cNvPr id="6" name="TextBox 5"/>
+          <p:cNvSpPr txBox="1"/>
+          <p:nvPr/>
+        </p:nvSpPr>
+        <p:spPr>
+          <a:xfrm>
+            <a:off x="10972800" y="6400800"/>
+            <a:ext cx="822960" cy="365760"/>
+          </a:xfrm>
+          <a:prstGeom prst="rect">
+            <a:avLst/>
+          </a:prstGeom>
+          <a:noFill/>
+        </p:spPr>
+        <p:txBody>
+          <a:bodyPr wrap="square">
+            <a:spAutoFit/>
+          </a:bodyPr>
+          <a:lstStyle/>
+          <a:p>
+            <a:pPr algn="ctr"/>
+            <a:r>
+              <a:rPr sz="900" b="0">
+                <a:solidFill>
+                  <a:srgbClr val="9AA7BD"/>
+                </a:solidFill>
+                <a:latin typeface="Segoe UI"/>
+              </a:rPr>
+              <a:t>17</a:t>
+            </a:r>
+          </a:p>
+        </p:txBody>
+      </p:sp>
+    </p:spTree>
+  </p:cSld>
+  <p:clrMapOvr>
+    <a:masterClrMapping/>
+  </p:clrMapOvr>
+</p:sld>
+</file>
+
+<file path=ppt/slides/slide18.xml><?xml version="1.0" encoding="utf-8"?>
+<p:sld xmlns:a="http://schemas.openxmlformats.org/drawingml/2006/main" xmlns:p="http://schemas.openxmlformats.org/presentationml/2006/main" xmlns:r="http://schemas.openxmlformats.org/officeDocument/2006/relationships">
+  <p:cSld>
+    <p:bg>
+      <p:bgPr>
+        <a:solidFill>
+          <a:srgbClr val="0B1020"/>
+        </a:solidFill>
+        <a:effectLst/>
+      </p:bgPr>
+    </p:bg>
+    <p:spTree>
+      <p:nvGrpSpPr>
+        <p:cNvPr id="1" name=""/>
+        <p:cNvGrpSpPr/>
+        <p:nvPr/>
+      </p:nvGrpSpPr>
+      <p:grpSpPr/>
+      <p:sp>
+        <p:nvSpPr>
+          <p:cNvPr id="2" name="TextBox 1"/>
+          <p:cNvSpPr txBox="1"/>
+          <p:nvPr/>
+        </p:nvSpPr>
+        <p:spPr>
+          <a:xfrm>
+            <a:off x="822960" y="502920"/>
+            <a:ext cx="10515600" cy="457200"/>
+          </a:xfrm>
+          <a:prstGeom prst="rect">
+            <a:avLst/>
+          </a:prstGeom>
+          <a:noFill/>
+        </p:spPr>
+        <p:txBody>
+          <a:bodyPr wrap="square">
+            <a:spAutoFit/>
+          </a:bodyPr>
+          <a:lstStyle/>
+          <a:p>
+            <a:r>
+              <a:rPr sz="1250" b="1">
+                <a:solidFill>
+                  <a:srgbClr val="2DD4BF"/>
+                </a:solidFill>
+                <a:latin typeface="Segoe UI"/>
+              </a:rPr>
+              <a:t>EM RESUMO</a:t>
+            </a:r>
+          </a:p>
+        </p:txBody>
+      </p:sp>
+      <p:sp>
+        <p:nvSpPr>
+          <p:cNvPr id="3" name="TextBox 2"/>
+          <p:cNvSpPr txBox="1"/>
+          <p:nvPr/>
+        </p:nvSpPr>
+        <p:spPr>
+          <a:xfrm>
+            <a:off x="822960" y="914400"/>
+            <a:ext cx="10515600" cy="1280160"/>
+          </a:xfrm>
+          <a:prstGeom prst="rect">
+            <a:avLst/>
+          </a:prstGeom>
+          <a:noFill/>
+        </p:spPr>
+        <p:txBody>
+          <a:bodyPr wrap="square">
+            <a:spAutoFit/>
+          </a:bodyPr>
+          <a:lstStyle/>
+          <a:p>
+            <a:r>
+              <a:rPr sz="3000" b="1">
+                <a:solidFill>
+                  <a:srgbClr val="EAF0FB"/>
+                </a:solidFill>
+                <a:latin typeface="Segoe UI"/>
+              </a:rPr>
+              <a:t>Uma visão consolidada — pronta para discutir</a:t>
+            </a:r>
+          </a:p>
+        </p:txBody>
+      </p:sp>
+      <p:sp>
+        <p:nvSpPr>
+          <p:cNvPr id="4" name="TextBox 3"/>
+          <p:cNvSpPr txBox="1"/>
+          <p:nvPr/>
+        </p:nvSpPr>
+        <p:spPr>
+          <a:xfrm>
+            <a:off x="822960" y="2011680"/>
+            <a:ext cx="10332720" cy="1645920"/>
+          </a:xfrm>
+          <a:prstGeom prst="rect">
+            <a:avLst/>
+          </a:prstGeom>
+          <a:noFill/>
+        </p:spPr>
+        <p:txBody>
+          <a:bodyPr wrap="square">
+            <a:spAutoFit/>
+          </a:bodyPr>
+          <a:lstStyle/>
+          <a:p>
+            <a:pPr>
+              <a:lnSpc>
+                <a:spcPct val="130000"/>
+              </a:lnSpc>
+            </a:pPr>
+            <a:r>
+              <a:rPr sz="1700" b="0">
+                <a:solidFill>
+                  <a:srgbClr val="9AA7BD"/>
+                </a:solidFill>
+                <a:latin typeface="Segoe UI"/>
+              </a:rPr>
+              <a:t>Seis áreas de atuação detalhadas, 15+ pessoas formadas, um produto de IA em crescimento acelerado e uma operação mais barata e mais confiável. Trouxe esse panorama para darmos visibilidade ao todo e </a:t>
+            </a:r>
+            <a:r>
+              <a:rPr sz="1700" b="1">
+                <a:solidFill>
+                  <a:srgbClr val="EAF0FB"/>
+                </a:solidFill>
+                <a:latin typeface="Segoe UI"/>
+              </a:rPr>
+              <a:t>discutirmos juntos os próximos passos de cada frente.</a:t>
+            </a:r>
+          </a:p>
+        </p:txBody>
+      </p:sp>
+      <p:sp>
+        <p:nvSpPr>
+          <p:cNvPr id="5" name="Rounded Rectangle 4"/>
+          <p:cNvSpPr/>
+          <p:nvPr/>
+        </p:nvSpPr>
+        <p:spPr>
+          <a:xfrm>
+            <a:off x="822960" y="4206240"/>
+            <a:ext cx="1828800" cy="502920"/>
+          </a:xfrm>
+          <a:prstGeom prst="roundRect">
+            <a:avLst>
+              <a:gd name="adj" fmla="val 6000"/>
+            </a:avLst>
+          </a:prstGeom>
+          <a:solidFill>
+            <a:srgbClr val="18223A"/>
+          </a:solidFill>
+          <a:ln w="12700">
+            <a:solidFill>
+              <a:srgbClr val="2A3652"/>
+            </a:solidFill>
+          </a:ln>
+          <a:effectLst/>
+        </p:spPr>
+        <p:style>
+          <a:lnRef idx="1">
+            <a:schemeClr val="accent1"/>
+          </a:lnRef>
+          <a:fillRef idx="3">
+            <a:schemeClr val="accent1"/>
+          </a:fillRef>
+          <a:effectRef idx="2">
+            <a:schemeClr val="accent1"/>
+          </a:effectRef>
+          <a:fontRef idx="minor">
+            <a:schemeClr val="lt1"/>
+          </a:fontRef>
+        </p:style>
+        <p:txBody>
+          <a:bodyPr rtlCol="0" anchor="ctr"/>
+          <a:lstStyle/>
+          <a:p>
+            <a:pPr algn="ctr"/>
+          </a:p>
+        </p:txBody>
+      </p:sp>
+      <p:sp>
+        <p:nvSpPr>
+          <p:cNvPr id="6" name="TextBox 5"/>
+          <p:cNvSpPr txBox="1"/>
+          <p:nvPr/>
+        </p:nvSpPr>
+        <p:spPr>
+          <a:xfrm>
+            <a:off x="822960" y="4206240"/>
+            <a:ext cx="1828800" cy="502920"/>
+          </a:xfrm>
+          <a:prstGeom prst="rect">
+            <a:avLst/>
+          </a:prstGeom>
+          <a:noFill/>
+        </p:spPr>
+        <p:txBody>
+          <a:bodyPr wrap="square" anchor="ctr">
+            <a:spAutoFit/>
+          </a:bodyPr>
+          <a:lstStyle/>
+          <a:p>
+            <a:pPr algn="l"/>
+            <a:r>
+              <a:rPr sz="1250" b="0">
+                <a:solidFill>
+                  <a:srgbClr val="EAF0FB"/>
+                </a:solidFill>
+                <a:latin typeface="Segoe UI"/>
+              </a:rPr>
+              <a:t>Customer Success</a:t>
+            </a:r>
+          </a:p>
+        </p:txBody>
+      </p:sp>
+      <p:sp>
+        <p:nvSpPr>
+          <p:cNvPr id="7" name="Rounded Rectangle 6"/>
+          <p:cNvSpPr/>
+          <p:nvPr/>
+        </p:nvSpPr>
+        <p:spPr>
+          <a:xfrm>
+            <a:off x="2834640" y="4206240"/>
+            <a:ext cx="964692" cy="502920"/>
+          </a:xfrm>
+          <a:prstGeom prst="roundRect">
+            <a:avLst>
+              <a:gd name="adj" fmla="val 6000"/>
+            </a:avLst>
+          </a:prstGeom>
+          <a:solidFill>
+            <a:srgbClr val="18223A"/>
+          </a:solidFill>
+          <a:ln w="12700">
+            <a:solidFill>
+              <a:srgbClr val="2A3652"/>
+            </a:solidFill>
+          </a:ln>
+          <a:effectLst/>
+        </p:spPr>
+        <p:style>
+          <a:lnRef idx="1">
+            <a:schemeClr val="accent1"/>
+          </a:lnRef>
+          <a:fillRef idx="3">
+            <a:schemeClr val="accent1"/>
+          </a:fillRef>
+          <a:effectRef idx="2">
+            <a:schemeClr val="accent1"/>
+          </a:effectRef>
+          <a:fontRef idx="minor">
+            <a:schemeClr val="lt1"/>
+          </a:fontRef>
+        </p:style>
+        <p:txBody>
+          <a:bodyPr rtlCol="0" anchor="ctr"/>
+          <a:lstStyle/>
+          <a:p>
+            <a:pPr algn="ctr"/>
+          </a:p>
+        </p:txBody>
+      </p:sp>
+      <p:sp>
+        <p:nvSpPr>
+          <p:cNvPr id="8" name="TextBox 7"/>
+          <p:cNvSpPr txBox="1"/>
+          <p:nvPr/>
+        </p:nvSpPr>
+        <p:spPr>
+          <a:xfrm>
+            <a:off x="2834640" y="4206240"/>
+            <a:ext cx="964692" cy="502920"/>
+          </a:xfrm>
+          <a:prstGeom prst="rect">
+            <a:avLst/>
+          </a:prstGeom>
+          <a:noFill/>
+        </p:spPr>
+        <p:txBody>
+          <a:bodyPr wrap="square" anchor="ctr">
+            <a:spAutoFit/>
+          </a:bodyPr>
+          <a:lstStyle/>
+          <a:p>
+            <a:pPr algn="l"/>
+            <a:r>
+              <a:rPr sz="1250" b="0">
+                <a:solidFill>
+                  <a:srgbClr val="EAF0FB"/>
+                </a:solidFill>
+                <a:latin typeface="Segoe UI"/>
+              </a:rPr>
+              <a:t>Produto</a:t>
+            </a:r>
+          </a:p>
+        </p:txBody>
+      </p:sp>
+      <p:sp>
+        <p:nvSpPr>
+          <p:cNvPr id="9" name="Rounded Rectangle 8"/>
+          <p:cNvSpPr/>
+          <p:nvPr/>
+        </p:nvSpPr>
+        <p:spPr>
+          <a:xfrm>
+            <a:off x="3982212" y="4206240"/>
+            <a:ext cx="1252728" cy="502920"/>
+          </a:xfrm>
+          <a:prstGeom prst="roundRect">
+            <a:avLst>
+              <a:gd name="adj" fmla="val 6000"/>
+            </a:avLst>
+          </a:prstGeom>
+          <a:solidFill>
+            <a:srgbClr val="18223A"/>
+          </a:solidFill>
+          <a:ln w="12700">
+            <a:solidFill>
+              <a:srgbClr val="2A3652"/>
+            </a:solidFill>
+          </a:ln>
+          <a:effectLst/>
+        </p:spPr>
+        <p:style>
+          <a:lnRef idx="1">
+            <a:schemeClr val="accent1"/>
+          </a:lnRef>
+          <a:fillRef idx="3">
+            <a:schemeClr val="accent1"/>
+          </a:fillRef>
+          <a:effectRef idx="2">
+            <a:schemeClr val="accent1"/>
+          </a:effectRef>
+          <a:fontRef idx="minor">
+            <a:schemeClr val="lt1"/>
+          </a:fontRef>
+        </p:style>
+        <p:txBody>
+          <a:bodyPr rtlCol="0" anchor="ctr"/>
+          <a:lstStyle/>
+          <a:p>
+            <a:pPr algn="ctr"/>
+          </a:p>
+        </p:txBody>
+      </p:sp>
+      <p:sp>
+        <p:nvSpPr>
+          <p:cNvPr id="10" name="TextBox 9"/>
+          <p:cNvSpPr txBox="1"/>
+          <p:nvPr/>
+        </p:nvSpPr>
+        <p:spPr>
+          <a:xfrm>
+            <a:off x="3982212" y="4206240"/>
+            <a:ext cx="1252728" cy="502920"/>
+          </a:xfrm>
+          <a:prstGeom prst="rect">
+            <a:avLst/>
+          </a:prstGeom>
+          <a:noFill/>
+        </p:spPr>
+        <p:txBody>
+          <a:bodyPr wrap="square" anchor="ctr">
+            <a:spAutoFit/>
+          </a:bodyPr>
+          <a:lstStyle/>
+          <a:p>
+            <a:pPr algn="l"/>
+            <a:r>
+              <a:rPr sz="1250" b="0">
+                <a:solidFill>
+                  <a:srgbClr val="EAF0FB"/>
+                </a:solidFill>
+                <a:latin typeface="Segoe UI"/>
+              </a:rPr>
+              <a:t>Engenharia</a:t>
+            </a:r>
+          </a:p>
+        </p:txBody>
+      </p:sp>
+      <p:sp>
+        <p:nvSpPr>
+          <p:cNvPr id="11" name="Rounded Rectangle 10"/>
+          <p:cNvSpPr/>
+          <p:nvPr/>
+        </p:nvSpPr>
+        <p:spPr>
+          <a:xfrm>
+            <a:off x="5417820" y="4206240"/>
+            <a:ext cx="772668" cy="502920"/>
+          </a:xfrm>
+          <a:prstGeom prst="roundRect">
+            <a:avLst>
+              <a:gd name="adj" fmla="val 6000"/>
+            </a:avLst>
+          </a:prstGeom>
+          <a:solidFill>
+            <a:srgbClr val="18223A"/>
+          </a:solidFill>
+          <a:ln w="12700">
+            <a:solidFill>
+              <a:srgbClr val="2A3652"/>
+            </a:solidFill>
+          </a:ln>
+          <a:effectLst/>
+        </p:spPr>
+        <p:style>
+          <a:lnRef idx="1">
+            <a:schemeClr val="accent1"/>
+          </a:lnRef>
+          <a:fillRef idx="3">
+            <a:schemeClr val="accent1"/>
+          </a:fillRef>
+          <a:effectRef idx="2">
+            <a:schemeClr val="accent1"/>
+          </a:effectRef>
+          <a:fontRef idx="minor">
+            <a:schemeClr val="lt1"/>
+          </a:fontRef>
+        </p:style>
+        <p:txBody>
+          <a:bodyPr rtlCol="0" anchor="ctr"/>
+          <a:lstStyle/>
+          <a:p>
+            <a:pPr algn="ctr"/>
+          </a:p>
+        </p:txBody>
+      </p:sp>
+      <p:sp>
+        <p:nvSpPr>
+          <p:cNvPr id="12" name="TextBox 11"/>
+          <p:cNvSpPr txBox="1"/>
+          <p:nvPr/>
+        </p:nvSpPr>
+        <p:spPr>
+          <a:xfrm>
+            <a:off x="5417820" y="4206240"/>
+            <a:ext cx="772668" cy="502920"/>
+          </a:xfrm>
+          <a:prstGeom prst="rect">
+            <a:avLst/>
+          </a:prstGeom>
+          <a:noFill/>
+        </p:spPr>
+        <p:txBody>
+          <a:bodyPr wrap="square" anchor="ctr">
+            <a:spAutoFit/>
+          </a:bodyPr>
+          <a:lstStyle/>
+          <a:p>
+            <a:pPr algn="l"/>
+            <a:r>
+              <a:rPr sz="1250" b="0">
+                <a:solidFill>
+                  <a:srgbClr val="EAF0FB"/>
+                </a:solidFill>
+                <a:latin typeface="Segoe UI"/>
+              </a:rPr>
+              <a:t>Dados</a:t>
+            </a:r>
+          </a:p>
+        </p:txBody>
+      </p:sp>
+      <p:sp>
+        <p:nvSpPr>
+          <p:cNvPr id="13" name="Rounded Rectangle 12"/>
+          <p:cNvSpPr/>
+          <p:nvPr/>
+        </p:nvSpPr>
+        <p:spPr>
+          <a:xfrm>
+            <a:off x="6373368" y="4206240"/>
+            <a:ext cx="1444752" cy="502920"/>
+          </a:xfrm>
+          <a:prstGeom prst="roundRect">
+            <a:avLst>
+              <a:gd name="adj" fmla="val 6000"/>
+            </a:avLst>
+          </a:prstGeom>
+          <a:solidFill>
+            <a:srgbClr val="18223A"/>
+          </a:solidFill>
+          <a:ln w="12700">
+            <a:solidFill>
+              <a:srgbClr val="2A3652"/>
+            </a:solidFill>
+          </a:ln>
+          <a:effectLst/>
+        </p:spPr>
+        <p:style>
+          <a:lnRef idx="1">
+            <a:schemeClr val="accent1"/>
+          </a:lnRef>
+          <a:fillRef idx="3">
+            <a:schemeClr val="accent1"/>
+          </a:fillRef>
+          <a:effectRef idx="2">
+            <a:schemeClr val="accent1"/>
+          </a:effectRef>
+          <a:fontRef idx="minor">
+            <a:schemeClr val="lt1"/>
+          </a:fontRef>
+        </p:style>
+        <p:txBody>
+          <a:bodyPr rtlCol="0" anchor="ctr"/>
+          <a:lstStyle/>
+          <a:p>
+            <a:pPr algn="ctr"/>
+          </a:p>
+        </p:txBody>
+      </p:sp>
+      <p:sp>
+        <p:nvSpPr>
+          <p:cNvPr id="14" name="TextBox 13"/>
+          <p:cNvSpPr txBox="1"/>
+          <p:nvPr/>
+        </p:nvSpPr>
+        <p:spPr>
+          <a:xfrm>
+            <a:off x="6373368" y="4206240"/>
+            <a:ext cx="1444752" cy="502920"/>
+          </a:xfrm>
+          <a:prstGeom prst="rect">
+            <a:avLst/>
+          </a:prstGeom>
+          <a:noFill/>
+        </p:spPr>
+        <p:txBody>
+          <a:bodyPr wrap="square" anchor="ctr">
+            <a:spAutoFit/>
+          </a:bodyPr>
+          <a:lstStyle/>
+          <a:p>
+            <a:pPr algn="l"/>
+            <a:r>
+              <a:rPr sz="1250" b="0">
+                <a:solidFill>
+                  <a:srgbClr val="EAF0FB"/>
+                </a:solidFill>
+                <a:latin typeface="Segoe UI"/>
+              </a:rPr>
+              <a:t>IT &amp; Suporte</a:t>
+            </a:r>
+          </a:p>
+        </p:txBody>
+      </p:sp>
+      <p:sp>
+        <p:nvSpPr>
+          <p:cNvPr id="15" name="Rounded Rectangle 14"/>
+          <p:cNvSpPr/>
+          <p:nvPr/>
+        </p:nvSpPr>
+        <p:spPr>
+          <a:xfrm>
+            <a:off x="8001000" y="4206240"/>
+            <a:ext cx="2116836" cy="502920"/>
+          </a:xfrm>
+          <a:prstGeom prst="roundRect">
+            <a:avLst>
+              <a:gd name="adj" fmla="val 6000"/>
+            </a:avLst>
+          </a:prstGeom>
+          <a:solidFill>
+            <a:srgbClr val="18223A"/>
+          </a:solidFill>
+          <a:ln w="12700">
+            <a:solidFill>
+              <a:srgbClr val="2A3652"/>
+            </a:solidFill>
+          </a:ln>
+          <a:effectLst/>
+        </p:spPr>
+        <p:style>
+          <a:lnRef idx="1">
+            <a:schemeClr val="accent1"/>
+          </a:lnRef>
+          <a:fillRef idx="3">
+            <a:schemeClr val="accent1"/>
+          </a:fillRef>
+          <a:effectRef idx="2">
+            <a:schemeClr val="accent1"/>
+          </a:effectRef>
+          <a:fontRef idx="minor">
+            <a:schemeClr val="lt1"/>
+          </a:fontRef>
+        </p:style>
+        <p:txBody>
+          <a:bodyPr rtlCol="0" anchor="ctr"/>
+          <a:lstStyle/>
+          <a:p>
+            <a:pPr algn="ctr"/>
+          </a:p>
+        </p:txBody>
+      </p:sp>
+      <p:sp>
+        <p:nvSpPr>
+          <p:cNvPr id="16" name="TextBox 15"/>
+          <p:cNvSpPr txBox="1"/>
+          <p:nvPr/>
+        </p:nvSpPr>
+        <p:spPr>
+          <a:xfrm>
+            <a:off x="8001000" y="4206240"/>
+            <a:ext cx="2116836" cy="502920"/>
+          </a:xfrm>
+          <a:prstGeom prst="rect">
+            <a:avLst/>
+          </a:prstGeom>
+          <a:noFill/>
+        </p:spPr>
+        <p:txBody>
+          <a:bodyPr wrap="square" anchor="ctr">
+            <a:spAutoFit/>
+          </a:bodyPr>
+          <a:lstStyle/>
+          <a:p>
+            <a:pPr algn="l"/>
+            <a:r>
+              <a:rPr sz="1250" b="0">
+                <a:solidFill>
+                  <a:srgbClr val="EAF0FB"/>
+                </a:solidFill>
+                <a:latin typeface="Segoe UI"/>
+              </a:rPr>
+              <a:t>Arquitetura &amp; Nuvem</a:t>
+            </a:r>
+          </a:p>
+        </p:txBody>
+      </p:sp>
+      <p:sp>
+        <p:nvSpPr>
+          <p:cNvPr id="17" name="Rounded Rectangle 16"/>
+          <p:cNvSpPr/>
+          <p:nvPr/>
+        </p:nvSpPr>
+        <p:spPr>
+          <a:xfrm>
+            <a:off x="822960" y="4846320"/>
+            <a:ext cx="1924812" cy="502920"/>
+          </a:xfrm>
+          <a:prstGeom prst="roundRect">
+            <a:avLst>
+              <a:gd name="adj" fmla="val 6000"/>
+            </a:avLst>
+          </a:prstGeom>
+          <a:solidFill>
+            <a:srgbClr val="18223A"/>
+          </a:solidFill>
+          <a:ln w="12700">
+            <a:solidFill>
+              <a:srgbClr val="2A3652"/>
+            </a:solidFill>
+          </a:ln>
+          <a:effectLst/>
+        </p:spPr>
+        <p:style>
+          <a:lnRef idx="1">
+            <a:schemeClr val="accent1"/>
+          </a:lnRef>
+          <a:fillRef idx="3">
+            <a:schemeClr val="accent1"/>
+          </a:fillRef>
+          <a:effectRef idx="2">
+            <a:schemeClr val="accent1"/>
+          </a:effectRef>
+          <a:fontRef idx="minor">
+            <a:schemeClr val="lt1"/>
+          </a:fontRef>
+        </p:style>
+        <p:txBody>
+          <a:bodyPr rtlCol="0" anchor="ctr"/>
+          <a:lstStyle/>
+          <a:p>
+            <a:pPr algn="ctr"/>
+          </a:p>
+        </p:txBody>
+      </p:sp>
+      <p:sp>
+        <p:nvSpPr>
+          <p:cNvPr id="18" name="TextBox 17"/>
+          <p:cNvSpPr txBox="1"/>
+          <p:nvPr/>
+        </p:nvSpPr>
+        <p:spPr>
+          <a:xfrm>
+            <a:off x="822960" y="4846320"/>
+            <a:ext cx="1924812" cy="502920"/>
+          </a:xfrm>
+          <a:prstGeom prst="rect">
+            <a:avLst/>
+          </a:prstGeom>
+          <a:noFill/>
+        </p:spPr>
+        <p:txBody>
+          <a:bodyPr wrap="square" anchor="ctr">
+            <a:spAutoFit/>
+          </a:bodyPr>
+          <a:lstStyle/>
+          <a:p>
+            <a:pPr algn="l"/>
+            <a:r>
+              <a:rPr sz="1250" b="0">
+                <a:solidFill>
+                  <a:srgbClr val="EAF0FB"/>
+                </a:solidFill>
+                <a:latin typeface="Segoe UI"/>
+              </a:rPr>
+              <a:t>Times &amp; Liderança</a:t>
+            </a:r>
+          </a:p>
+        </p:txBody>
+      </p:sp>
+      <p:sp>
+        <p:nvSpPr>
+          <p:cNvPr id="19" name="TextBox 18"/>
+          <p:cNvSpPr txBox="1"/>
+          <p:nvPr/>
+        </p:nvSpPr>
+        <p:spPr>
+          <a:xfrm>
+            <a:off x="822960" y="6400800"/>
+            <a:ext cx="8229600" cy="365760"/>
+          </a:xfrm>
+          <a:prstGeom prst="rect">
+            <a:avLst/>
+          </a:prstGeom>
+          <a:noFill/>
+        </p:spPr>
+        <p:txBody>
+          <a:bodyPr wrap="square">
+            <a:spAutoFit/>
+          </a:bodyPr>
+          <a:lstStyle/>
+          <a:p>
+            <a:r>
+              <a:rPr sz="900" b="0">
+                <a:solidFill>
+                  <a:srgbClr val="9AA7BD"/>
+                </a:solidFill>
+                <a:latin typeface="Segoe UI"/>
+              </a:rPr>
+              <a:t>Starbem · Áreas de Atuação &amp; Impacto</a:t>
+            </a:r>
+          </a:p>
+        </p:txBody>
+      </p:sp>
+      <p:sp>
+        <p:nvSpPr>
+          <p:cNvPr id="20" name="TextBox 19"/>
+          <p:cNvSpPr txBox="1"/>
+          <p:nvPr/>
+        </p:nvSpPr>
+        <p:spPr>
+          <a:xfrm>
+            <a:off x="10972800" y="6400800"/>
+            <a:ext cx="822960" cy="365760"/>
+          </a:xfrm>
+          <a:prstGeom prst="rect">
+            <a:avLst/>
+          </a:prstGeom>
+          <a:noFill/>
+        </p:spPr>
+        <p:txBody>
+          <a:bodyPr wrap="square">
+            <a:spAutoFit/>
+          </a:bodyPr>
+          <a:lstStyle/>
+          <a:p>
+            <a:pPr algn="ctr"/>
+            <a:r>
+              <a:rPr sz="900" b="0">
+                <a:solidFill>
+                  <a:srgbClr val="9AA7BD"/>
+                </a:solidFill>
+                <a:latin typeface="Segoe UI"/>
+              </a:rPr>
+              <a:t>18</a:t>
             </a:r>
           </a:p>
         </p:txBody>
@@ -4496,8 +8297,8 @@
         </p:nvSpPr>
         <p:spPr>
           <a:xfrm>
-            <a:off x="822960" y="960120"/>
-            <a:ext cx="10515600" cy="1371600"/>
+            <a:off x="822960" y="914400"/>
+            <a:ext cx="10515600" cy="1280160"/>
           </a:xfrm>
           <a:prstGeom prst="rect">
             <a:avLst/>
@@ -4511,7 +8312,7 @@
           <a:lstStyle/>
           <a:p>
             <a:r>
-              <a:rPr sz="3400" b="1">
+              <a:rPr sz="3000" b="1">
                 <a:solidFill>
                   <a:srgbClr val="EAF0FB"/>
                 </a:solidFill>
@@ -4530,7 +8331,7 @@
         </p:nvSpPr>
         <p:spPr>
           <a:xfrm>
-            <a:off x="822960" y="1783080"/>
+            <a:off x="822960" y="1737360"/>
             <a:ext cx="10515600" cy="822960"/>
           </a:xfrm>
           <a:prstGeom prst="rect">
@@ -4574,7 +8375,7 @@
           </a:xfrm>
           <a:prstGeom prst="roundRect">
             <a:avLst>
-              <a:gd name="adj" fmla="val 7000"/>
+              <a:gd name="adj" fmla="val 6000"/>
             </a:avLst>
           </a:prstGeom>
           <a:solidFill>
@@ -4632,7 +8433,7 @@
           <a:lstStyle/>
           <a:p>
             <a:r>
-              <a:rPr sz="1600" b="1">
+              <a:rPr sz="1500" b="1">
                 <a:solidFill>
                   <a:srgbClr val="EAF0FB"/>
                 </a:solidFill>
@@ -4644,14 +8445,14 @@
           <a:p>
             <a:pPr>
               <a:lnSpc>
-                <a:spcPct val="115000"/>
+                <a:spcPct val="112000"/>
               </a:lnSpc>
               <a:spcBef>
                 <a:spcPts val="400"/>
               </a:spcBef>
             </a:pPr>
             <a:r>
-              <a:rPr sz="1150" b="0">
+              <a:rPr sz="1100" b="0">
                 <a:solidFill>
                   <a:srgbClr val="9AA7BD"/>
                 </a:solidFill>
@@ -4675,7 +8476,7 @@
           </a:xfrm>
           <a:prstGeom prst="roundRect">
             <a:avLst>
-              <a:gd name="adj" fmla="val 7000"/>
+              <a:gd name="adj" fmla="val 6000"/>
             </a:avLst>
           </a:prstGeom>
           <a:solidFill>
@@ -4733,32 +8534,32 @@
           <a:lstStyle/>
           <a:p>
             <a:r>
-              <a:rPr sz="1600" b="1">
+              <a:rPr sz="1500" b="1">
                 <a:solidFill>
                   <a:srgbClr val="EAF0FB"/>
                 </a:solidFill>
                 <a:latin typeface="Segoe UI"/>
               </a:rPr>
-              <a:t>Produto</a:t>
+              <a:t>Produto · 5 OKRs</a:t>
             </a:r>
           </a:p>
           <a:p>
             <a:pPr>
               <a:lnSpc>
-                <a:spcPct val="115000"/>
+                <a:spcPct val="112000"/>
               </a:lnSpc>
               <a:spcBef>
                 <a:spcPts val="400"/>
               </a:spcBef>
             </a:pPr>
             <a:r>
-              <a:rPr sz="1150" b="0">
-                <a:solidFill>
-                  <a:srgbClr val="9AA7BD"/>
-                </a:solidFill>
-                <a:latin typeface="Segoe UI"/>
-              </a:rPr>
-              <a:t>B2C, profissional, RH (NR1) e parcerias — 5 OKRs.</a:t>
+              <a:rPr sz="1100" b="0">
+                <a:solidFill>
+                  <a:srgbClr val="9AA7BD"/>
+                </a:solidFill>
+                <a:latin typeface="Segoe UI"/>
+              </a:rPr>
+              <a:t>Paciente, Profissional, RH (NR1) e Parcerias.</a:t>
             </a:r>
           </a:p>
         </p:txBody>
@@ -4776,7 +8577,7 @@
           </a:xfrm>
           <a:prstGeom prst="roundRect">
             <a:avLst>
-              <a:gd name="adj" fmla="val 7000"/>
+              <a:gd name="adj" fmla="val 6000"/>
             </a:avLst>
           </a:prstGeom>
           <a:solidFill>
@@ -4834,7 +8635,7 @@
           <a:lstStyle/>
           <a:p>
             <a:r>
-              <a:rPr sz="1600" b="1">
+              <a:rPr sz="1500" b="1">
                 <a:solidFill>
                   <a:srgbClr val="EAF0FB"/>
                 </a:solidFill>
@@ -4846,14 +8647,14 @@
           <a:p>
             <a:pPr>
               <a:lnSpc>
-                <a:spcPct val="115000"/>
+                <a:spcPct val="112000"/>
               </a:lnSpc>
               <a:spcBef>
                 <a:spcPts val="400"/>
               </a:spcBef>
             </a:pPr>
             <a:r>
-              <a:rPr sz="1150" b="0">
+              <a:rPr sz="1100" b="0">
                 <a:solidFill>
                   <a:srgbClr val="9AA7BD"/>
                 </a:solidFill>
@@ -4877,7 +8678,7 @@
           </a:xfrm>
           <a:prstGeom prst="roundRect">
             <a:avLst>
-              <a:gd name="adj" fmla="val 7000"/>
+              <a:gd name="adj" fmla="val 6000"/>
             </a:avLst>
           </a:prstGeom>
           <a:solidFill>
@@ -4935,7 +8736,7 @@
           <a:lstStyle/>
           <a:p>
             <a:r>
-              <a:rPr sz="1600" b="1">
+              <a:rPr sz="1500" b="1">
                 <a:solidFill>
                   <a:srgbClr val="EAF0FB"/>
                 </a:solidFill>
@@ -4947,14 +8748,14 @@
           <a:p>
             <a:pPr>
               <a:lnSpc>
-                <a:spcPct val="115000"/>
+                <a:spcPct val="112000"/>
               </a:lnSpc>
               <a:spcBef>
                 <a:spcPts val="400"/>
               </a:spcBef>
             </a:pPr>
             <a:r>
-              <a:rPr sz="1150" b="0">
+              <a:rPr sz="1100" b="0">
                 <a:solidFill>
                   <a:srgbClr val="9AA7BD"/>
                 </a:solidFill>
@@ -4978,7 +8779,7 @@
           </a:xfrm>
           <a:prstGeom prst="roundRect">
             <a:avLst>
-              <a:gd name="adj" fmla="val 7000"/>
+              <a:gd name="adj" fmla="val 6000"/>
             </a:avLst>
           </a:prstGeom>
           <a:solidFill>
@@ -5036,7 +8837,7 @@
           <a:lstStyle/>
           <a:p>
             <a:r>
-              <a:rPr sz="1600" b="1">
+              <a:rPr sz="1500" b="1">
                 <a:solidFill>
                   <a:srgbClr val="EAF0FB"/>
                 </a:solidFill>
@@ -5048,14 +8849,14 @@
           <a:p>
             <a:pPr>
               <a:lnSpc>
-                <a:spcPct val="115000"/>
+                <a:spcPct val="112000"/>
               </a:lnSpc>
               <a:spcBef>
                 <a:spcPts val="400"/>
               </a:spcBef>
             </a:pPr>
             <a:r>
-              <a:rPr sz="1150" b="0">
+              <a:rPr sz="1100" b="0">
                 <a:solidFill>
                   <a:srgbClr val="9AA7BD"/>
                 </a:solidFill>
@@ -5079,7 +8880,7 @@
           </a:xfrm>
           <a:prstGeom prst="roundRect">
             <a:avLst>
-              <a:gd name="adj" fmla="val 7000"/>
+              <a:gd name="adj" fmla="val 6000"/>
             </a:avLst>
           </a:prstGeom>
           <a:solidFill>
@@ -5137,7 +8938,7 @@
           <a:lstStyle/>
           <a:p>
             <a:r>
-              <a:rPr sz="1600" b="1">
+              <a:rPr sz="1500" b="1">
                 <a:solidFill>
                   <a:srgbClr val="EAF0FB"/>
                 </a:solidFill>
@@ -5149,14 +8950,14 @@
           <a:p>
             <a:pPr>
               <a:lnSpc>
-                <a:spcPct val="115000"/>
+                <a:spcPct val="112000"/>
               </a:lnSpc>
               <a:spcBef>
                 <a:spcPts val="400"/>
               </a:spcBef>
             </a:pPr>
             <a:r>
-              <a:rPr sz="1150" b="0">
+              <a:rPr sz="1100" b="0">
                 <a:solidFill>
                   <a:srgbClr val="9AA7BD"/>
                 </a:solidFill>
@@ -5176,7 +8977,7 @@
         <p:spPr>
           <a:xfrm>
             <a:off x="822960" y="6400800"/>
-            <a:ext cx="7315200" cy="365760"/>
+            <a:ext cx="8229600" cy="365760"/>
           </a:xfrm>
           <a:prstGeom prst="rect">
             <a:avLst/>
@@ -5304,8 +9105,8 @@
         </p:nvSpPr>
         <p:spPr>
           <a:xfrm>
-            <a:off x="822960" y="960120"/>
-            <a:ext cx="10515600" cy="1371600"/>
+            <a:off x="822960" y="914400"/>
+            <a:ext cx="10515600" cy="1280160"/>
           </a:xfrm>
           <a:prstGeom prst="rect">
             <a:avLst/>
@@ -5319,13 +9120,13 @@
           <a:lstStyle/>
           <a:p>
             <a:r>
-              <a:rPr sz="3400" b="1">
+              <a:rPr sz="3000" b="1">
                 <a:solidFill>
                   <a:srgbClr val="EAF0FB"/>
                 </a:solidFill>
                 <a:latin typeface="Segoe UI"/>
               </a:rPr>
-              <a:t>Estruturei o CS de ponta a ponta</a:t>
+              <a:t>Customer Success</a:t>
             </a:r>
           </a:p>
         </p:txBody>
@@ -5364,7 +9165,7 @@
                 </a:solidFill>
                 <a:latin typeface="Segoe UI"/>
               </a:rPr>
-              <a:t>OPERAÇÃO</a:t>
+              <a:t>DIRETORIA — OPERAÇÃO</a:t>
             </a:r>
           </a:p>
           <a:p>
@@ -5392,16 +9193,7 @@
                 </a:solidFill>
                 <a:latin typeface="Segoe UI"/>
               </a:rPr>
-              <a:t>Estruturação da área e do modelo de </a:t>
-            </a:r>
-            <a:r>
-              <a:rPr sz="1400" b="1">
-                <a:solidFill>
-                  <a:srgbClr val="EAF0FB"/>
-                </a:solidFill>
-                <a:latin typeface="Segoe UI"/>
-              </a:rPr>
-              <a:t>CSM</a:t>
+              <a:t>Estruturação da área</a:t>
             </a:r>
           </a:p>
           <a:p>
@@ -5429,7 +9221,7 @@
                 </a:solidFill>
                 <a:latin typeface="Segoe UI"/>
               </a:rPr>
-              <a:t>Novo modelo de operação de </a:t>
+              <a:t>Estrutura de </a:t>
             </a:r>
             <a:r>
               <a:rPr sz="1400" b="1">
@@ -5438,7 +9230,7 @@
                 </a:solidFill>
                 <a:latin typeface="Segoe UI"/>
               </a:rPr>
-              <a:t>implantação</a:t>
+              <a:t>CSM</a:t>
             </a:r>
           </a:p>
           <a:p>
@@ -5466,7 +9258,7 @@
                 </a:solidFill>
                 <a:latin typeface="Segoe UI"/>
               </a:rPr>
-              <a:t>Processo fim a fim: </a:t>
+              <a:t>Novo modelo de operação de </a:t>
             </a:r>
             <a:r>
               <a:rPr sz="1400" b="1">
@@ -5475,7 +9267,7 @@
                 </a:solidFill>
                 <a:latin typeface="Segoe UI"/>
               </a:rPr>
-              <a:t>Vendas → Implantação → Manutenção → Expansão</a:t>
+              <a:t>implantação</a:t>
             </a:r>
           </a:p>
           <a:p>
@@ -5503,46 +9295,7 @@
                 </a:solidFill>
                 <a:latin typeface="Segoe UI"/>
               </a:rPr>
-              <a:t>Automação e troca da liderança de CX</a:t>
-            </a:r>
-          </a:p>
-        </p:txBody>
-      </p:sp>
-      <p:sp>
-        <p:nvSpPr>
-          <p:cNvPr id="5" name="TextBox 4"/>
-          <p:cNvSpPr txBox="1"/>
-          <p:nvPr/>
-        </p:nvSpPr>
-        <p:spPr>
-          <a:xfrm>
-            <a:off x="6309360" y="2194560"/>
-            <a:ext cx="5120640" cy="3931920"/>
-          </a:xfrm>
-          <a:prstGeom prst="rect">
-            <a:avLst/>
-          </a:prstGeom>
-          <a:noFill/>
-        </p:spPr>
-        <p:txBody>
-          <a:bodyPr wrap="square">
-            <a:spAutoFit/>
-          </a:bodyPr>
-          <a:lstStyle/>
-          <a:p>
-            <a:pPr>
-              <a:spcAft>
-                <a:spcPts val="600"/>
-              </a:spcAft>
-            </a:pPr>
-            <a:r>
-              <a:rPr sz="1250" b="1">
-                <a:solidFill>
-                  <a:srgbClr val="F4B740"/>
-                </a:solidFill>
-                <a:latin typeface="Segoe UI"/>
-              </a:rPr>
-              <a:t>LIDERANÇA</a:t>
+              <a:t>Troca de liderança de CX</a:t>
             </a:r>
           </a:p>
           <a:p>
@@ -5570,7 +9323,16 @@
                 </a:solidFill>
                 <a:latin typeface="Segoe UI"/>
               </a:rPr>
-              <a:t>Plano de transformação da área</a:t>
+              <a:t>Implementação de </a:t>
+            </a:r>
+            <a:r>
+              <a:rPr sz="1400" b="1">
+                <a:solidFill>
+                  <a:srgbClr val="EAF0FB"/>
+                </a:solidFill>
+                <a:latin typeface="Segoe UI"/>
+              </a:rPr>
+              <a:t>automação</a:t>
             </a:r>
           </a:p>
           <a:p>
@@ -5598,7 +9360,16 @@
                 </a:solidFill>
                 <a:latin typeface="Segoe UI"/>
               </a:rPr>
-              <a:t>Desenvolvimento do líder para voar solo</a:t>
+              <a:t>Processo fim a fim: </a:t>
+            </a:r>
+            <a:r>
+              <a:rPr sz="1400" b="1">
+                <a:solidFill>
+                  <a:srgbClr val="EAF0FB"/>
+                </a:solidFill>
+                <a:latin typeface="Segoe UI"/>
+              </a:rPr>
+              <a:t>Vendas → Implantação → Manutenção → Expansão</a:t>
             </a:r>
           </a:p>
           <a:p>
@@ -5626,7 +9397,46 @@
                 </a:solidFill>
                 <a:latin typeface="Segoe UI"/>
               </a:rPr>
-              <a:t>Apoio nos processos seletivos e na escolha de pessoas</a:t>
+              <a:t>Novo modelo de operação (Thaís)</a:t>
+            </a:r>
+          </a:p>
+        </p:txBody>
+      </p:sp>
+      <p:sp>
+        <p:nvSpPr>
+          <p:cNvPr id="5" name="TextBox 4"/>
+          <p:cNvSpPr txBox="1"/>
+          <p:nvPr/>
+        </p:nvSpPr>
+        <p:spPr>
+          <a:xfrm>
+            <a:off x="6309360" y="2194560"/>
+            <a:ext cx="5120640" cy="3931920"/>
+          </a:xfrm>
+          <a:prstGeom prst="rect">
+            <a:avLst/>
+          </a:prstGeom>
+          <a:noFill/>
+        </p:spPr>
+        <p:txBody>
+          <a:bodyPr wrap="square">
+            <a:spAutoFit/>
+          </a:bodyPr>
+          <a:lstStyle/>
+          <a:p>
+            <a:pPr>
+              <a:spcAft>
+                <a:spcPts val="600"/>
+              </a:spcAft>
+            </a:pPr>
+            <a:r>
+              <a:rPr sz="1250" b="1">
+                <a:solidFill>
+                  <a:srgbClr val="F4B740"/>
+                </a:solidFill>
+                <a:latin typeface="Segoe UI"/>
+              </a:rPr>
+              <a:t>LIDERANÇA</a:t>
             </a:r>
           </a:p>
           <a:p>
@@ -5654,7 +9464,91 @@
                 </a:solidFill>
                 <a:latin typeface="Segoe UI"/>
               </a:rPr>
-              <a:t>Atuação direta na troca de pessoas-chave</a:t>
+              <a:t>Estruturação de plano de transformação da área</a:t>
+            </a:r>
+          </a:p>
+          <a:p>
+            <a:pPr>
+              <a:lnSpc>
+                <a:spcPct val="108000"/>
+              </a:lnSpc>
+              <a:spcAft>
+                <a:spcPts val="600"/>
+              </a:spcAft>
+            </a:pPr>
+            <a:r>
+              <a:rPr sz="1400" b="1">
+                <a:solidFill>
+                  <a:srgbClr val="2DD4BF"/>
+                </a:solidFill>
+                <a:latin typeface="Segoe UI"/>
+              </a:rPr>
+              <a:t>▪  </a:t>
+            </a:r>
+            <a:r>
+              <a:rPr sz="1400" b="0">
+                <a:solidFill>
+                  <a:srgbClr val="9AA7BD"/>
+                </a:solidFill>
+                <a:latin typeface="Segoe UI"/>
+              </a:rPr>
+              <a:t>Desenvolvimento do líder que ainda não está pronto para voar solo</a:t>
+            </a:r>
+          </a:p>
+          <a:p>
+            <a:pPr>
+              <a:lnSpc>
+                <a:spcPct val="108000"/>
+              </a:lnSpc>
+              <a:spcAft>
+                <a:spcPts val="600"/>
+              </a:spcAft>
+            </a:pPr>
+            <a:r>
+              <a:rPr sz="1400" b="1">
+                <a:solidFill>
+                  <a:srgbClr val="2DD4BF"/>
+                </a:solidFill>
+                <a:latin typeface="Segoe UI"/>
+              </a:rPr>
+              <a:t>▪  </a:t>
+            </a:r>
+            <a:r>
+              <a:rPr sz="1400" b="0">
+                <a:solidFill>
+                  <a:srgbClr val="9AA7BD"/>
+                </a:solidFill>
+                <a:latin typeface="Segoe UI"/>
+              </a:rPr>
+              <a:t>Apoio em todos os processos seletivos e desenvolvimento do líder para escolher pessoas</a:t>
+            </a:r>
+          </a:p>
+          <a:p>
+            <a:pPr>
+              <a:lnSpc>
+                <a:spcPct val="108000"/>
+              </a:lnSpc>
+              <a:spcAft>
+                <a:spcPts val="600"/>
+              </a:spcAft>
+            </a:pPr>
+            <a:r>
+              <a:rPr sz="1400" b="1">
+                <a:solidFill>
+                  <a:srgbClr val="2DD4BF"/>
+                </a:solidFill>
+                <a:latin typeface="Segoe UI"/>
+              </a:rPr>
+              <a:t>▪  </a:t>
+            </a:r>
+            <a:r>
+              <a:rPr sz="1400" b="0">
+                <a:solidFill>
+                  <a:srgbClr val="9AA7BD"/>
+                </a:solidFill>
+                <a:latin typeface="Segoe UI"/>
+              </a:rPr>
+              <a:t>Atuação direta na troca de pessoal-chave do time</a:t>
             </a:r>
           </a:p>
         </p:txBody>
@@ -5668,7 +9562,7 @@
         <p:spPr>
           <a:xfrm>
             <a:off x="822960" y="6400800"/>
-            <a:ext cx="7315200" cy="365760"/>
+            <a:ext cx="8229600" cy="365760"/>
           </a:xfrm>
           <a:prstGeom prst="rect">
             <a:avLst/>
@@ -5796,8 +9690,8 @@
         </p:nvSpPr>
         <p:spPr>
           <a:xfrm>
-            <a:off x="822960" y="960120"/>
-            <a:ext cx="10515600" cy="1371600"/>
+            <a:off x="822960" y="914400"/>
+            <a:ext cx="10515600" cy="1280160"/>
           </a:xfrm>
           <a:prstGeom prst="rect">
             <a:avLst/>
@@ -5811,13 +9705,13 @@
           <a:lstStyle/>
           <a:p>
             <a:r>
-              <a:rPr sz="3400" b="1">
+              <a:rPr sz="4000" b="1">
                 <a:solidFill>
                   <a:srgbClr val="EAF0FB"/>
                 </a:solidFill>
                 <a:latin typeface="Segoe UI"/>
               </a:rPr>
-              <a:t>Produto em quatro frentes simultâneas</a:t>
+              <a:t>Produto</a:t>
             </a:r>
           </a:p>
         </p:txBody>
@@ -5830,8 +9724,8 @@
         </p:nvSpPr>
         <p:spPr>
           <a:xfrm>
-            <a:off x="822960" y="2194560"/>
-            <a:ext cx="5120640" cy="3931920"/>
+            <a:off x="822960" y="1920240"/>
+            <a:ext cx="10515600" cy="640080"/>
           </a:xfrm>
           <a:prstGeom prst="rect">
             <a:avLst/>
@@ -5844,21 +9738,39 @@
           </a:bodyPr>
           <a:lstStyle/>
           <a:p>
-            <a:pPr>
-              <a:spcAft>
-                <a:spcPts val="600"/>
-              </a:spcAft>
-            </a:pPr>
-            <a:r>
-              <a:rPr sz="1250" b="1">
-                <a:solidFill>
-                  <a:srgbClr val="F4B740"/>
-                </a:solidFill>
-                <a:latin typeface="Segoe UI"/>
-              </a:rPr>
-              <a:t>PACIENTE (B2C)</a:t>
-            </a:r>
-          </a:p>
+            <a:r>
+              <a:rPr sz="1600" b="0">
+                <a:solidFill>
+                  <a:srgbClr val="9AA7BD"/>
+                </a:solidFill>
+                <a:latin typeface="Segoe UI"/>
+              </a:rPr>
+              <a:t>Quatro frentes de produto + liderança — uma página dedicada para cada:</a:t>
+            </a:r>
+          </a:p>
+        </p:txBody>
+      </p:sp>
+      <p:sp>
+        <p:nvSpPr>
+          <p:cNvPr id="5" name="TextBox 4"/>
+          <p:cNvSpPr txBox="1"/>
+          <p:nvPr/>
+        </p:nvSpPr>
+        <p:spPr>
+          <a:xfrm>
+            <a:off x="822960" y="2743200"/>
+            <a:ext cx="10515600" cy="3200400"/>
+          </a:xfrm>
+          <a:prstGeom prst="rect">
+            <a:avLst/>
+          </a:prstGeom>
+          <a:noFill/>
+        </p:spPr>
+        <p:txBody>
+          <a:bodyPr wrap="square">
+            <a:spAutoFit/>
+          </a:bodyPr>
+          <a:lstStyle/>
           <a:p>
             <a:pPr>
               <a:lnSpc>
@@ -5869,7 +9781,7 @@
               </a:spcAft>
             </a:pPr>
             <a:r>
-              <a:rPr sz="1300" b="1">
+              <a:rPr sz="1700" b="1">
                 <a:solidFill>
                   <a:srgbClr val="2DD4BF"/>
                 </a:solidFill>
@@ -5878,40 +9790,31 @@
               <a:t>▪  </a:t>
             </a:r>
             <a:r>
-              <a:rPr sz="1300" b="0">
-                <a:solidFill>
-                  <a:srgbClr val="9AA7BD"/>
-                </a:solidFill>
-                <a:latin typeface="Segoe UI"/>
-              </a:rPr>
-              <a:t>Cross Service, canal </a:t>
-            </a:r>
-            <a:r>
-              <a:rPr sz="1300" b="1">
+              <a:rPr sz="1700" b="0">
+                <a:solidFill>
+                  <a:srgbClr val="9AA7BD"/>
+                </a:solidFill>
+                <a:latin typeface="Segoe UI"/>
+              </a:rPr>
+              <a:t>Frente </a:t>
+            </a:r>
+            <a:r>
+              <a:rPr sz="1700" b="1">
                 <a:solidFill>
                   <a:srgbClr val="EAF0FB"/>
                 </a:solidFill>
                 <a:latin typeface="Segoe UI"/>
               </a:rPr>
-              <a:t>WhatsApp</a:t>
-            </a:r>
-            <a:r>
-              <a:rPr sz="1300" b="0">
-                <a:solidFill>
-                  <a:srgbClr val="9AA7BD"/>
-                </a:solidFill>
-                <a:latin typeface="Segoe UI"/>
-              </a:rPr>
-              <a:t>, </a:t>
-            </a:r>
-            <a:r>
-              <a:rPr sz="1300" b="1">
-                <a:solidFill>
-                  <a:srgbClr val="EAF0FB"/>
-                </a:solidFill>
-                <a:latin typeface="Segoe UI"/>
-              </a:rPr>
-              <a:t>StarBrain</a:t>
+              <a:t>Paciente</a:t>
+            </a:r>
+            <a:r>
+              <a:rPr sz="1700" b="0">
+                <a:solidFill>
+                  <a:srgbClr val="9AA7BD"/>
+                </a:solidFill>
+                <a:latin typeface="Segoe UI"/>
+              </a:rPr>
+              <a:t> — jornada B2C</a:t>
             </a:r>
           </a:p>
           <a:p>
@@ -5924,7 +9827,7 @@
               </a:spcAft>
             </a:pPr>
             <a:r>
-              <a:rPr sz="1300" b="1">
+              <a:rPr sz="1700" b="1">
                 <a:solidFill>
                   <a:srgbClr val="2DD4BF"/>
                 </a:solidFill>
@@ -5933,50 +9836,22 @@
               <a:t>▪  </a:t>
             </a:r>
             <a:r>
-              <a:rPr sz="1300" b="0">
-                <a:solidFill>
-                  <a:srgbClr val="9AA7BD"/>
-                </a:solidFill>
-                <a:latin typeface="Segoe UI"/>
-              </a:rPr>
-              <a:t>Jornada </a:t>
-            </a:r>
-            <a:r>
-              <a:rPr sz="1300" b="1">
+              <a:rPr sz="1700" b="0">
+                <a:solidFill>
+                  <a:srgbClr val="9AA7BD"/>
+                </a:solidFill>
+                <a:latin typeface="Segoe UI"/>
+              </a:rPr>
+              <a:t>Frente </a:t>
+            </a:r>
+            <a:r>
+              <a:rPr sz="1700" b="1">
                 <a:solidFill>
                   <a:srgbClr val="EAF0FB"/>
                 </a:solidFill>
                 <a:latin typeface="Segoe UI"/>
               </a:rPr>
-              <a:t>Shapeme</a:t>
-            </a:r>
-            <a:r>
-              <a:rPr sz="1300" b="0">
-                <a:solidFill>
-                  <a:srgbClr val="9AA7BD"/>
-                </a:solidFill>
-                <a:latin typeface="Segoe UI"/>
-              </a:rPr>
-              <a:t> e evolução do B2C + faturamento</a:t>
-            </a:r>
-          </a:p>
-          <a:p>
-            <a:pPr>
-              <a:spcBef>
-                <a:spcPts val="1200"/>
-              </a:spcBef>
-              <a:spcAft>
-                <a:spcPts val="600"/>
-              </a:spcAft>
-            </a:pPr>
-            <a:r>
-              <a:rPr sz="1250" b="1">
-                <a:solidFill>
-                  <a:srgbClr val="F4B740"/>
-                </a:solidFill>
-                <a:latin typeface="Segoe UI"/>
-              </a:rPr>
-              <a:t>PROFISSIONAL</a:t>
+              <a:t>Profissional</a:t>
             </a:r>
           </a:p>
           <a:p>
@@ -5989,7 +9864,7 @@
               </a:spcAft>
             </a:pPr>
             <a:r>
-              <a:rPr sz="1300" b="1">
+              <a:rPr sz="1700" b="1">
                 <a:solidFill>
                   <a:srgbClr val="2DD4BF"/>
                 </a:solidFill>
@@ -5998,22 +9873,31 @@
               <a:t>▪  </a:t>
             </a:r>
             <a:r>
-              <a:rPr sz="1300" b="0">
-                <a:solidFill>
-                  <a:srgbClr val="9AA7BD"/>
-                </a:solidFill>
-                <a:latin typeface="Segoe UI"/>
-              </a:rPr>
-              <a:t>Videochamadas, NPS, </a:t>
-            </a:r>
-            <a:r>
-              <a:rPr sz="1300" b="1">
+              <a:rPr sz="1700" b="0">
+                <a:solidFill>
+                  <a:srgbClr val="9AA7BD"/>
+                </a:solidFill>
+                <a:latin typeface="Segoe UI"/>
+              </a:rPr>
+              <a:t>Frente </a:t>
+            </a:r>
+            <a:r>
+              <a:rPr sz="1700" b="1">
                 <a:solidFill>
                   <a:srgbClr val="EAF0FB"/>
                 </a:solidFill>
                 <a:latin typeface="Segoe UI"/>
               </a:rPr>
-              <a:t>prontuário automatizado</a:t>
+              <a:t>RH</a:t>
+            </a:r>
+            <a:r>
+              <a:rPr sz="1700" b="0">
+                <a:solidFill>
+                  <a:srgbClr val="9AA7BD"/>
+                </a:solidFill>
+                <a:latin typeface="Segoe UI"/>
+              </a:rPr>
+              <a:t> (NR1)</a:t>
             </a:r>
           </a:p>
           <a:p>
@@ -6026,7 +9910,7 @@
               </a:spcAft>
             </a:pPr>
             <a:r>
-              <a:rPr sz="1300" b="1">
+              <a:rPr sz="1700" b="1">
                 <a:solidFill>
                   <a:srgbClr val="2DD4BF"/>
                 </a:solidFill>
@@ -6035,52 +9919,22 @@
               <a:t>▪  </a:t>
             </a:r>
             <a:r>
-              <a:rPr sz="1300" b="0">
-                <a:solidFill>
-                  <a:srgbClr val="9AA7BD"/>
-                </a:solidFill>
-                <a:latin typeface="Segoe UI"/>
-              </a:rPr>
-              <a:t>Automação de cadastro/consumo/NF · agendas e faturamento TP</a:t>
-            </a:r>
-          </a:p>
-        </p:txBody>
-      </p:sp>
-      <p:sp>
-        <p:nvSpPr>
-          <p:cNvPr id="5" name="TextBox 4"/>
-          <p:cNvSpPr txBox="1"/>
-          <p:nvPr/>
-        </p:nvSpPr>
-        <p:spPr>
-          <a:xfrm>
-            <a:off x="6309360" y="2194560"/>
-            <a:ext cx="5120640" cy="3931920"/>
-          </a:xfrm>
-          <a:prstGeom prst="rect">
-            <a:avLst/>
-          </a:prstGeom>
-          <a:noFill/>
-        </p:spPr>
-        <p:txBody>
-          <a:bodyPr wrap="square">
-            <a:spAutoFit/>
-          </a:bodyPr>
-          <a:lstStyle/>
-          <a:p>
-            <a:pPr>
-              <a:spcAft>
-                <a:spcPts val="600"/>
-              </a:spcAft>
-            </a:pPr>
-            <a:r>
-              <a:rPr sz="1250" b="1">
-                <a:solidFill>
-                  <a:srgbClr val="F4B740"/>
-                </a:solidFill>
-                <a:latin typeface="Segoe UI"/>
-              </a:rPr>
-              <a:t>RH (NR1)</a:t>
+              <a:rPr sz="1700" b="0">
+                <a:solidFill>
+                  <a:srgbClr val="9AA7BD"/>
+                </a:solidFill>
+                <a:latin typeface="Segoe UI"/>
+              </a:rPr>
+              <a:t>Frente </a:t>
+            </a:r>
+            <a:r>
+              <a:rPr sz="1700" b="1">
+                <a:solidFill>
+                  <a:srgbClr val="EAF0FB"/>
+                </a:solidFill>
+                <a:latin typeface="Segoe UI"/>
+              </a:rPr>
+              <a:t>Parcerias</a:t>
             </a:r>
           </a:p>
           <a:p>
@@ -6093,7 +9947,7 @@
               </a:spcAft>
             </a:pPr>
             <a:r>
-              <a:rPr sz="1300" b="1">
+              <a:rPr sz="1700" b="1">
                 <a:solidFill>
                   <a:srgbClr val="2DD4BF"/>
                 </a:solidFill>
@@ -6102,143 +9956,22 @@
               <a:t>▪  </a:t>
             </a:r>
             <a:r>
-              <a:rPr sz="1300" b="1">
+              <a:rPr sz="1700" b="1">
                 <a:solidFill>
                   <a:srgbClr val="EAF0FB"/>
                 </a:solidFill>
                 <a:latin typeface="Segoe UI"/>
               </a:rPr>
-              <a:t>NR1</a:t>
-            </a:r>
-            <a:r>
-              <a:rPr sz="1300" b="0">
-                <a:solidFill>
-                  <a:srgbClr val="9AA7BD"/>
-                </a:solidFill>
-                <a:latin typeface="Segoe UI"/>
-              </a:rPr>
-              <a:t> e Portal RH · multi-tiers (Produto 1–4)</a:t>
-            </a:r>
-          </a:p>
-          <a:p>
-            <a:pPr>
-              <a:lnSpc>
-                <a:spcPct val="108000"/>
-              </a:lnSpc>
-              <a:spcAft>
-                <a:spcPts val="600"/>
-              </a:spcAft>
-            </a:pPr>
-            <a:r>
-              <a:rPr sz="1300" b="1">
-                <a:solidFill>
-                  <a:srgbClr val="2DD4BF"/>
-                </a:solidFill>
-                <a:latin typeface="Segoe UI"/>
-              </a:rPr>
-              <a:t>▪  </a:t>
-            </a:r>
-            <a:r>
-              <a:rPr sz="1300" b="0">
-                <a:solidFill>
-                  <a:srgbClr val="9AA7BD"/>
-                </a:solidFill>
-                <a:latin typeface="Segoe UI"/>
-              </a:rPr>
-              <a:t>Reuniões comerciais com clientes</a:t>
-            </a:r>
-          </a:p>
-          <a:p>
-            <a:pPr>
-              <a:spcBef>
-                <a:spcPts val="1200"/>
-              </a:spcBef>
-              <a:spcAft>
-                <a:spcPts val="600"/>
-              </a:spcAft>
-            </a:pPr>
-            <a:r>
-              <a:rPr sz="1250" b="1">
-                <a:solidFill>
-                  <a:srgbClr val="F4B740"/>
-                </a:solidFill>
-                <a:latin typeface="Segoe UI"/>
-              </a:rPr>
-              <a:t>PARCERIAS</a:t>
-            </a:r>
-          </a:p>
-          <a:p>
-            <a:pPr>
-              <a:lnSpc>
-                <a:spcPct val="108000"/>
-              </a:lnSpc>
-              <a:spcAft>
-                <a:spcPts val="600"/>
-              </a:spcAft>
-            </a:pPr>
-            <a:r>
-              <a:rPr sz="1300" b="1">
-                <a:solidFill>
-                  <a:srgbClr val="2DD4BF"/>
-                </a:solidFill>
-                <a:latin typeface="Segoe UI"/>
-              </a:rPr>
-              <a:t>▪  </a:t>
-            </a:r>
-            <a:r>
-              <a:rPr sz="1300" b="0">
-                <a:solidFill>
-                  <a:srgbClr val="9AA7BD"/>
-                </a:solidFill>
-                <a:latin typeface="Segoe UI"/>
-              </a:rPr>
-              <a:t>API V2, </a:t>
-            </a:r>
-            <a:r>
-              <a:rPr sz="1300" b="1">
-                <a:solidFill>
-                  <a:srgbClr val="EAF0FB"/>
-                </a:solidFill>
-                <a:latin typeface="Segoe UI"/>
-              </a:rPr>
-              <a:t>iFood</a:t>
-            </a:r>
-            <a:r>
-              <a:rPr sz="1300" b="0">
-                <a:solidFill>
-                  <a:srgbClr val="9AA7BD"/>
-                </a:solidFill>
-                <a:latin typeface="Segoe UI"/>
-              </a:rPr>
-              <a:t>, TotalPass, Claro · custos de LLM</a:t>
-            </a:r>
-          </a:p>
-          <a:p>
-            <a:pPr>
-              <a:lnSpc>
-                <a:spcPct val="108000"/>
-              </a:lnSpc>
-              <a:spcAft>
-                <a:spcPts val="600"/>
-              </a:spcAft>
-            </a:pPr>
-            <a:r>
-              <a:rPr sz="1300" b="1">
-                <a:solidFill>
-                  <a:srgbClr val="2DD4BF"/>
-                </a:solidFill>
-                <a:latin typeface="Segoe UI"/>
-              </a:rPr>
-              <a:t>▪  </a:t>
-            </a:r>
-            <a:r>
-              <a:rPr sz="1300" b="0">
-                <a:solidFill>
-                  <a:srgbClr val="9AA7BD"/>
-                </a:solidFill>
-                <a:latin typeface="Segoe UI"/>
-              </a:rPr>
-              <a:t>Novos produtos para parceiros (Shapeme)</a:t>
+              <a:t>Liderança</a:t>
+            </a:r>
+            <a:r>
+              <a:rPr sz="1700" b="0">
+                <a:solidFill>
+                  <a:srgbClr val="9AA7BD"/>
+                </a:solidFill>
+                <a:latin typeface="Segoe UI"/>
+              </a:rPr>
+              <a:t> de Produto</a:t>
             </a:r>
           </a:p>
         </p:txBody>
@@ -6252,7 +9985,7 @@
         <p:spPr>
           <a:xfrm>
             <a:off x="822960" y="6400800"/>
-            <a:ext cx="7315200" cy="365760"/>
+            <a:ext cx="8229600" cy="365760"/>
           </a:xfrm>
           <a:prstGeom prst="rect">
             <a:avLst/>
@@ -6367,7 +10100,7 @@
                 </a:solidFill>
                 <a:latin typeface="Segoe UI"/>
               </a:rPr>
-              <a:t>ÁREA 3 · ENGENHARIA</a:t>
+              <a:t>ÁREA 2 · PRODUTO · FRENTE PACIENTE</a:t>
             </a:r>
           </a:p>
         </p:txBody>
@@ -6380,8 +10113,8 @@
         </p:nvSpPr>
         <p:spPr>
           <a:xfrm>
-            <a:off x="822960" y="960120"/>
-            <a:ext cx="10515600" cy="1371600"/>
+            <a:off x="822960" y="914400"/>
+            <a:ext cx="10515600" cy="1280160"/>
           </a:xfrm>
           <a:prstGeom prst="rect">
             <a:avLst/>
@@ -6395,13 +10128,13 @@
           <a:lstStyle/>
           <a:p>
             <a:r>
-              <a:rPr sz="3400" b="1">
+              <a:rPr sz="3000" b="1">
                 <a:solidFill>
                   <a:srgbClr val="EAF0FB"/>
                 </a:solidFill>
                 <a:latin typeface="Segoe UI"/>
               </a:rPr>
-              <a:t>Plataforma, segurança e IA</a:t>
+              <a:t>Paciente — Jornada B2C</a:t>
             </a:r>
           </a:p>
         </p:txBody>
@@ -6427,22 +10160,6 @@
             <a:spAutoFit/>
           </a:bodyPr>
           <a:lstStyle/>
-          <a:p>
-            <a:pPr>
-              <a:spcAft>
-                <a:spcPts val="600"/>
-              </a:spcAft>
-            </a:pPr>
-            <a:r>
-              <a:rPr sz="1250" b="1">
-                <a:solidFill>
-                  <a:srgbClr val="F4B740"/>
-                </a:solidFill>
-                <a:latin typeface="Segoe UI"/>
-              </a:rPr>
-              <a:t>CONSTRUÇÃO</a:t>
-            </a:r>
-          </a:p>
           <a:p>
             <a:pPr>
               <a:lnSpc>
@@ -6468,7 +10185,7 @@
                 </a:solidFill>
                 <a:latin typeface="Segoe UI"/>
               </a:rPr>
-              <a:t>Acompanhamento semanal da </a:t>
+              <a:t>Uso de múltiplos serviços — </a:t>
             </a:r>
             <a:r>
               <a:rPr sz="1400" b="1">
@@ -6477,7 +10194,7 @@
                 </a:solidFill>
                 <a:latin typeface="Segoe UI"/>
               </a:rPr>
-              <a:t>qualidade de chamada</a:t>
+              <a:t>Cross Service</a:t>
             </a:r>
           </a:p>
           <a:p>
@@ -6505,7 +10222,7 @@
                 </a:solidFill>
                 <a:latin typeface="Segoe UI"/>
               </a:rPr>
-              <a:t>Segurança com a </a:t>
+              <a:t>Novo canal </a:t>
             </a:r>
             <a:r>
               <a:rPr sz="1400" b="1">
@@ -6514,7 +10231,7 @@
                 </a:solidFill>
                 <a:latin typeface="Segoe UI"/>
               </a:rPr>
-              <a:t>Tempest</a:t>
+              <a:t>WhatsApp</a:t>
             </a:r>
             <a:r>
               <a:rPr sz="1400" b="0">
@@ -6523,7 +10240,7 @@
                 </a:solidFill>
                 <a:latin typeface="Segoe UI"/>
               </a:rPr>
-              <a:t> + próximos passos</a:t>
+              <a:t> para pacientes</a:t>
             </a:r>
           </a:p>
           <a:p>
@@ -6545,22 +10262,22 @@
               <a:t>▪  </a:t>
             </a:r>
             <a:r>
+              <a:rPr sz="1400" b="1">
+                <a:solidFill>
+                  <a:srgbClr val="EAF0FB"/>
+                </a:solidFill>
+                <a:latin typeface="Segoe UI"/>
+              </a:rPr>
+              <a:t>StarBrain</a:t>
+            </a:r>
+            <a:r>
               <a:rPr sz="1400" b="0">
                 <a:solidFill>
                   <a:srgbClr val="9AA7BD"/>
                 </a:solidFill>
                 <a:latin typeface="Segoe UI"/>
               </a:rPr>
-              <a:t>Construção do produto </a:t>
-            </a:r>
-            <a:r>
-              <a:rPr sz="1400" b="1">
-                <a:solidFill>
-                  <a:srgbClr val="EAF0FB"/>
-                </a:solidFill>
-                <a:latin typeface="Segoe UI"/>
-              </a:rPr>
-              <a:t>Shapeme</a:t>
+              <a:t> — Cérebro Central com visão unificada do paciente</a:t>
             </a:r>
           </a:p>
           <a:p>
@@ -6582,33 +10299,47 @@
               <a:t>▪  </a:t>
             </a:r>
             <a:r>
+              <a:rPr sz="1400" b="1">
+                <a:solidFill>
+                  <a:srgbClr val="EAF0FB"/>
+                </a:solidFill>
+                <a:latin typeface="Segoe UI"/>
+              </a:rPr>
+              <a:t>Shapeme</a:t>
+            </a:r>
+            <a:r>
               <a:rPr sz="1400" b="0">
                 <a:solidFill>
                   <a:srgbClr val="9AA7BD"/>
                 </a:solidFill>
                 <a:latin typeface="Segoe UI"/>
               </a:rPr>
-              <a:t>Plataforma </a:t>
-            </a:r>
-            <a:r>
-              <a:rPr sz="1400" b="1">
-                <a:solidFill>
-                  <a:srgbClr val="EAF0FB"/>
-                </a:solidFill>
-                <a:latin typeface="Segoe UI"/>
-              </a:rPr>
-              <a:t>Tiny Teams</a:t>
-            </a:r>
-            <a:r>
-              <a:rPr sz="1400" b="0">
-                <a:solidFill>
-                  <a:srgbClr val="9AA7BD"/>
-                </a:solidFill>
-                <a:latin typeface="Segoe UI"/>
-              </a:rPr>
-              <a:t> e novo modelo de operação</a:t>
-            </a:r>
-          </a:p>
+              <a:t> — Jornada comercial</a:t>
+            </a:r>
+          </a:p>
+        </p:txBody>
+      </p:sp>
+      <p:sp>
+        <p:nvSpPr>
+          <p:cNvPr id="5" name="TextBox 4"/>
+          <p:cNvSpPr txBox="1"/>
+          <p:nvPr/>
+        </p:nvSpPr>
+        <p:spPr>
+          <a:xfrm>
+            <a:off x="6309360" y="2194560"/>
+            <a:ext cx="5120640" cy="3931920"/>
+          </a:xfrm>
+          <a:prstGeom prst="rect">
+            <a:avLst/>
+          </a:prstGeom>
+          <a:noFill/>
+        </p:spPr>
+        <p:txBody>
+          <a:bodyPr wrap="square">
+            <a:spAutoFit/>
+          </a:bodyPr>
+          <a:lstStyle/>
           <a:p>
             <a:pPr>
               <a:lnSpc>
@@ -6628,61 +10359,22 @@
               <a:t>▪  </a:t>
             </a:r>
             <a:r>
+              <a:rPr sz="1400" b="1">
+                <a:solidFill>
+                  <a:srgbClr val="EAF0FB"/>
+                </a:solidFill>
+                <a:latin typeface="Segoe UI"/>
+              </a:rPr>
+              <a:t>Shapeme</a:t>
+            </a:r>
+            <a:r>
               <a:rPr sz="1400" b="0">
                 <a:solidFill>
                   <a:srgbClr val="9AA7BD"/>
                 </a:solidFill>
                 <a:latin typeface="Segoe UI"/>
               </a:rPr>
-              <a:t>Camada agêntica </a:t>
-            </a:r>
-            <a:r>
-              <a:rPr sz="1400" b="1">
-                <a:solidFill>
-                  <a:srgbClr val="EAF0FB"/>
-                </a:solidFill>
-                <a:latin typeface="Segoe UI"/>
-              </a:rPr>
-              <a:t>ExABI</a:t>
-            </a:r>
-          </a:p>
-        </p:txBody>
-      </p:sp>
-      <p:sp>
-        <p:nvSpPr>
-          <p:cNvPr id="5" name="TextBox 4"/>
-          <p:cNvSpPr txBox="1"/>
-          <p:nvPr/>
-        </p:nvSpPr>
-        <p:spPr>
-          <a:xfrm>
-            <a:off x="6309360" y="2194560"/>
-            <a:ext cx="5120640" cy="3931920"/>
-          </a:xfrm>
-          <a:prstGeom prst="rect">
-            <a:avLst/>
-          </a:prstGeom>
-          <a:noFill/>
-        </p:spPr>
-        <p:txBody>
-          <a:bodyPr wrap="square">
-            <a:spAutoFit/>
-          </a:bodyPr>
-          <a:lstStyle/>
-          <a:p>
-            <a:pPr>
-              <a:spcAft>
-                <a:spcPts val="600"/>
-              </a:spcAft>
-            </a:pPr>
-            <a:r>
-              <a:rPr sz="1250" b="1">
-                <a:solidFill>
-                  <a:srgbClr val="F4B740"/>
-                </a:solidFill>
-                <a:latin typeface="Segoe UI"/>
-              </a:rPr>
-              <a:t>LIDERANÇA</a:t>
+              <a:t> — Desenho da jornada</a:t>
             </a:r>
           </a:p>
           <a:p>
@@ -6710,7 +10402,16 @@
                 </a:solidFill>
                 <a:latin typeface="Segoe UI"/>
               </a:rPr>
-              <a:t>Desenvolvimento da líder para atuação estratégica</a:t>
+              <a:t>Evolução de jornada </a:t>
+            </a:r>
+            <a:r>
+              <a:rPr sz="1400" b="1">
+                <a:solidFill>
+                  <a:srgbClr val="EAF0FB"/>
+                </a:solidFill>
+                <a:latin typeface="Segoe UI"/>
+              </a:rPr>
+              <a:t>B2C</a:t>
             </a:r>
           </a:p>
           <a:p>
@@ -6738,81 +10439,7 @@
                 </a:solidFill>
                 <a:latin typeface="Segoe UI"/>
               </a:rPr>
-              <a:t>Troca de pessoas-chave</a:t>
-            </a:r>
-          </a:p>
-          <a:p>
-            <a:pPr>
-              <a:lnSpc>
-                <a:spcPct val="108000"/>
-              </a:lnSpc>
-              <a:spcAft>
-                <a:spcPts val="600"/>
-              </a:spcAft>
-            </a:pPr>
-            <a:r>
-              <a:rPr sz="1400" b="1">
-                <a:solidFill>
-                  <a:srgbClr val="2DD4BF"/>
-                </a:solidFill>
-                <a:latin typeface="Segoe UI"/>
-              </a:rPr>
-              <a:t>▪  </a:t>
-            </a:r>
-            <a:r>
-              <a:rPr sz="1400" b="0">
-                <a:solidFill>
-                  <a:srgbClr val="9AA7BD"/>
-                </a:solidFill>
-                <a:latin typeface="Segoe UI"/>
-              </a:rPr>
-              <a:t>Novos modelos de operação de engenharia</a:t>
-            </a:r>
-          </a:p>
-          <a:p>
-            <a:pPr>
-              <a:lnSpc>
-                <a:spcPct val="108000"/>
-              </a:lnSpc>
-              <a:spcAft>
-                <a:spcPts val="600"/>
-              </a:spcAft>
-            </a:pPr>
-            <a:r>
-              <a:rPr sz="1400" b="1">
-                <a:solidFill>
-                  <a:srgbClr val="2DD4BF"/>
-                </a:solidFill>
-                <a:latin typeface="Segoe UI"/>
-              </a:rPr>
-              <a:t>▪  </a:t>
-            </a:r>
-            <a:r>
-              <a:rPr sz="1400" b="0">
-                <a:solidFill>
-                  <a:srgbClr val="9AA7BD"/>
-                </a:solidFill>
-                <a:latin typeface="Segoe UI"/>
-              </a:rPr>
-              <a:t>Engenharia </a:t>
-            </a:r>
-            <a:r>
-              <a:rPr sz="1400" b="1">
-                <a:solidFill>
-                  <a:srgbClr val="EAF0FB"/>
-                </a:solidFill>
-                <a:latin typeface="Segoe UI"/>
-              </a:rPr>
-              <a:t>cross-área</a:t>
-            </a:r>
-            <a:r>
-              <a:rPr sz="1400" b="0">
-                <a:solidFill>
-                  <a:srgbClr val="9AA7BD"/>
-                </a:solidFill>
-                <a:latin typeface="Segoe UI"/>
-              </a:rPr>
-              <a:t> (ex.: CS AI Engineering)</a:t>
+              <a:t>Acompanhamento de faturamento e crescimento de B2C</a:t>
             </a:r>
           </a:p>
         </p:txBody>
@@ -6826,7 +10453,7 @@
         <p:spPr>
           <a:xfrm>
             <a:off x="822960" y="6400800"/>
-            <a:ext cx="7315200" cy="365760"/>
+            <a:ext cx="8229600" cy="365760"/>
           </a:xfrm>
           <a:prstGeom prst="rect">
             <a:avLst/>
@@ -6941,7 +10568,7 @@
                 </a:solidFill>
                 <a:latin typeface="Segoe UI"/>
               </a:rPr>
-              <a:t>ÁREA 4 · DADOS</a:t>
+              <a:t>ÁREA 2 · PRODUTO · FRENTE PROFISSIONAL</a:t>
             </a:r>
           </a:p>
         </p:txBody>
@@ -6954,8 +10581,8 @@
         </p:nvSpPr>
         <p:spPr>
           <a:xfrm>
-            <a:off x="822960" y="960120"/>
-            <a:ext cx="10515600" cy="1371600"/>
+            <a:off x="822960" y="914400"/>
+            <a:ext cx="10515600" cy="1280160"/>
           </a:xfrm>
           <a:prstGeom prst="rect">
             <a:avLst/>
@@ -6969,13 +10596,13 @@
           <a:lstStyle/>
           <a:p>
             <a:r>
-              <a:rPr sz="3400" b="1">
+              <a:rPr sz="3000" b="1">
                 <a:solidFill>
                   <a:srgbClr val="EAF0FB"/>
                 </a:solidFill>
                 <a:latin typeface="Segoe UI"/>
               </a:rPr>
-              <a:t>Da arquitetura à inteligência preditiva</a:t>
+              <a:t>Profissional</a:t>
             </a:r>
           </a:p>
         </p:txBody>
@@ -7001,22 +10628,6 @@
             <a:spAutoFit/>
           </a:bodyPr>
           <a:lstStyle/>
-          <a:p>
-            <a:pPr>
-              <a:spcAft>
-                <a:spcPts val="600"/>
-              </a:spcAft>
-            </a:pPr>
-            <a:r>
-              <a:rPr sz="1250" b="1">
-                <a:solidFill>
-                  <a:srgbClr val="F4B740"/>
-                </a:solidFill>
-                <a:latin typeface="Segoe UI"/>
-              </a:rPr>
-              <a:t>CONSTRUÇÃO</a:t>
-            </a:r>
-          </a:p>
           <a:p>
             <a:pPr>
               <a:lnSpc>
@@ -7042,7 +10653,7 @@
                 </a:solidFill>
                 <a:latin typeface="Segoe UI"/>
               </a:rPr>
-              <a:t>Estruturação do </a:t>
+              <a:t>Correção e acompanhamento de </a:t>
             </a:r>
             <a:r>
               <a:rPr sz="1400" b="1">
@@ -7051,16 +10662,7 @@
                 </a:solidFill>
                 <a:latin typeface="Segoe UI"/>
               </a:rPr>
-              <a:t>Datalake</a:t>
-            </a:r>
-            <a:r>
-              <a:rPr sz="1400" b="0">
-                <a:solidFill>
-                  <a:srgbClr val="9AA7BD"/>
-                </a:solidFill>
-                <a:latin typeface="Segoe UI"/>
-              </a:rPr>
-              <a:t> e da camada inteligente</a:t>
+              <a:t>videochamadas</a:t>
             </a:r>
           </a:p>
           <a:p>
@@ -7088,7 +10690,7 @@
                 </a:solidFill>
                 <a:latin typeface="Segoe UI"/>
               </a:rPr>
-              <a:t>Análises </a:t>
+              <a:t>Evolução de </a:t>
             </a:r>
             <a:r>
               <a:rPr sz="1400" b="1">
@@ -7097,7 +10699,7 @@
                 </a:solidFill>
                 <a:latin typeface="Segoe UI"/>
               </a:rPr>
-              <a:t>preditivas e prescritivas</a:t>
+              <a:t>NPS</a:t>
             </a:r>
           </a:p>
           <a:p>
@@ -7125,7 +10727,7 @@
                 </a:solidFill>
                 <a:latin typeface="Segoe UI"/>
               </a:rPr>
-              <a:t>Reestruturação da arquitetura de dados</a:t>
+              <a:t>Pesquisa de qualidade de atendimento</a:t>
             </a:r>
           </a:p>
           <a:p>
@@ -7153,46 +10755,7 @@
                 </a:solidFill>
                 <a:latin typeface="Segoe UI"/>
               </a:rPr>
-              <a:t>Camada de inteligência do negócio · contratações</a:t>
-            </a:r>
-          </a:p>
-        </p:txBody>
-      </p:sp>
-      <p:sp>
-        <p:nvSpPr>
-          <p:cNvPr id="5" name="TextBox 4"/>
-          <p:cNvSpPr txBox="1"/>
-          <p:nvPr/>
-        </p:nvSpPr>
-        <p:spPr>
-          <a:xfrm>
-            <a:off x="6309360" y="2194560"/>
-            <a:ext cx="5120640" cy="3931920"/>
-          </a:xfrm>
-          <a:prstGeom prst="rect">
-            <a:avLst/>
-          </a:prstGeom>
-          <a:noFill/>
-        </p:spPr>
-        <p:txBody>
-          <a:bodyPr wrap="square">
-            <a:spAutoFit/>
-          </a:bodyPr>
-          <a:lstStyle/>
-          <a:p>
-            <a:pPr>
-              <a:spcAft>
-                <a:spcPts val="600"/>
-              </a:spcAft>
-            </a:pPr>
-            <a:r>
-              <a:rPr sz="1250" b="1">
-                <a:solidFill>
-                  <a:srgbClr val="F4B740"/>
-                </a:solidFill>
-                <a:latin typeface="Segoe UI"/>
-              </a:rPr>
-              <a:t>LIDERANÇA</a:t>
+              <a:t>Pesquisa de infraestrutura profissional</a:t>
             </a:r>
           </a:p>
           <a:p>
@@ -7220,9 +10783,32 @@
                 </a:solidFill>
                 <a:latin typeface="Segoe UI"/>
               </a:rPr>
-              <a:t>PDI e desenvolvimento do time</a:t>
-            </a:r>
-          </a:p>
+              <a:t>Gravação e transcrição de chamada</a:t>
+            </a:r>
+          </a:p>
+        </p:txBody>
+      </p:sp>
+      <p:sp>
+        <p:nvSpPr>
+          <p:cNvPr id="5" name="TextBox 4"/>
+          <p:cNvSpPr txBox="1"/>
+          <p:nvPr/>
+        </p:nvSpPr>
+        <p:spPr>
+          <a:xfrm>
+            <a:off x="6309360" y="2194560"/>
+            <a:ext cx="5120640" cy="3931920"/>
+          </a:xfrm>
+          <a:prstGeom prst="rect">
+            <a:avLst/>
+          </a:prstGeom>
+          <a:noFill/>
+        </p:spPr>
+        <p:txBody>
+          <a:bodyPr wrap="square">
+            <a:spAutoFit/>
+          </a:bodyPr>
+          <a:lstStyle/>
           <a:p>
             <a:pPr>
               <a:lnSpc>
@@ -7248,7 +10834,16 @@
                 </a:solidFill>
                 <a:latin typeface="Segoe UI"/>
               </a:rPr>
-              <a:t>People management e engajamento (Rodrigo)</a:t>
+              <a:t>Construção de </a:t>
+            </a:r>
+            <a:r>
+              <a:rPr sz="1400" b="1">
+                <a:solidFill>
+                  <a:srgbClr val="EAF0FB"/>
+                </a:solidFill>
+                <a:latin typeface="Segoe UI"/>
+              </a:rPr>
+              <a:t>prontuário automatizado</a:t>
             </a:r>
           </a:p>
           <a:p>
@@ -7276,16 +10871,100 @@
                 </a:solidFill>
                 <a:latin typeface="Segoe UI"/>
               </a:rPr>
-              <a:t>Plano de crescimento: novo líder + analista de </a:t>
-            </a:r>
+              <a:t>Retroalimentação do cérebro central</a:t>
+            </a:r>
+          </a:p>
+          <a:p>
+            <a:pPr>
+              <a:lnSpc>
+                <a:spcPct val="108000"/>
+              </a:lnSpc>
+              <a:spcAft>
+                <a:spcPts val="600"/>
+              </a:spcAft>
+            </a:pPr>
             <a:r>
               <a:rPr sz="1400" b="1">
                 <a:solidFill>
+                  <a:srgbClr val="2DD4BF"/>
+                </a:solidFill>
+                <a:latin typeface="Segoe UI"/>
+              </a:rPr>
+              <a:t>▪  </a:t>
+            </a:r>
+            <a:r>
+              <a:rPr sz="1400" b="0">
+                <a:solidFill>
+                  <a:srgbClr val="9AA7BD"/>
+                </a:solidFill>
+                <a:latin typeface="Segoe UI"/>
+              </a:rPr>
+              <a:t>Planejamento de serviços de automação para o profissional: cadastro, consumo mensal, notas fiscais etc.</a:t>
+            </a:r>
+          </a:p>
+          <a:p>
+            <a:pPr>
+              <a:lnSpc>
+                <a:spcPct val="108000"/>
+              </a:lnSpc>
+              <a:spcAft>
+                <a:spcPts val="600"/>
+              </a:spcAft>
+            </a:pPr>
+            <a:r>
+              <a:rPr sz="1400" b="1">
+                <a:solidFill>
+                  <a:srgbClr val="2DD4BF"/>
+                </a:solidFill>
+                <a:latin typeface="Segoe UI"/>
+              </a:rPr>
+              <a:t>▪  </a:t>
+            </a:r>
+            <a:r>
+              <a:rPr sz="1400" b="0">
+                <a:solidFill>
+                  <a:srgbClr val="9AA7BD"/>
+                </a:solidFill>
+                <a:latin typeface="Segoe UI"/>
+              </a:rPr>
+              <a:t>Controle de agendas e faturamento </a:t>
+            </a:r>
+            <a:r>
+              <a:rPr sz="1400" b="1">
+                <a:solidFill>
                   <a:srgbClr val="EAF0FB"/>
                 </a:solidFill>
                 <a:latin typeface="Segoe UI"/>
               </a:rPr>
-              <a:t>impacto financeiro</a:t>
+              <a:t>TP</a:t>
+            </a:r>
+          </a:p>
+          <a:p>
+            <a:pPr>
+              <a:lnSpc>
+                <a:spcPct val="108000"/>
+              </a:lnSpc>
+              <a:spcAft>
+                <a:spcPts val="600"/>
+              </a:spcAft>
+            </a:pPr>
+            <a:r>
+              <a:rPr sz="1400" b="1">
+                <a:solidFill>
+                  <a:srgbClr val="2DD4BF"/>
+                </a:solidFill>
+                <a:latin typeface="Segoe UI"/>
+              </a:rPr>
+              <a:t>▪  </a:t>
+            </a:r>
+            <a:r>
+              <a:rPr sz="1400" b="0">
+                <a:solidFill>
+                  <a:srgbClr val="9AA7BD"/>
+                </a:solidFill>
+                <a:latin typeface="Segoe UI"/>
+              </a:rPr>
+              <a:t>Evolução e análise mensal de qualidade e melhorias para profissionais</a:t>
             </a:r>
           </a:p>
         </p:txBody>
@@ -7299,7 +10978,7 @@
         <p:spPr>
           <a:xfrm>
             <a:off x="822960" y="6400800"/>
-            <a:ext cx="7315200" cy="365760"/>
+            <a:ext cx="8229600" cy="365760"/>
           </a:xfrm>
           <a:prstGeom prst="rect">
             <a:avLst/>
@@ -7414,7 +11093,7 @@
                 </a:solidFill>
                 <a:latin typeface="Segoe UI"/>
               </a:rPr>
-              <a:t>ÁREAS 5 E 6 · IT &amp; SUPORTE · PRINCIPAL ENGINEER</a:t>
+              <a:t>ÁREA 2 · PRODUTO · FRENTE RH</a:t>
             </a:r>
           </a:p>
         </p:txBody>
@@ -7427,8 +11106,8 @@
         </p:nvSpPr>
         <p:spPr>
           <a:xfrm>
-            <a:off x="822960" y="960120"/>
-            <a:ext cx="10515600" cy="1371600"/>
+            <a:off x="822960" y="914400"/>
+            <a:ext cx="10515600" cy="1280160"/>
           </a:xfrm>
           <a:prstGeom prst="rect">
             <a:avLst/>
@@ -7442,13 +11121,13 @@
           <a:lstStyle/>
           <a:p>
             <a:r>
-              <a:rPr sz="3400" b="1">
+              <a:rPr sz="3000" b="1">
                 <a:solidFill>
                   <a:srgbClr val="EAF0FB"/>
                 </a:solidFill>
                 <a:latin typeface="Segoe UI"/>
               </a:rPr>
-              <a:t>A base que sustenta tudo</a:t>
+              <a:t>RH — NR1 &amp; Portal RH</a:t>
             </a:r>
           </a:p>
         </p:txBody>
@@ -7474,22 +11153,6 @@
             <a:spAutoFit/>
           </a:bodyPr>
           <a:lstStyle/>
-          <a:p>
-            <a:pPr>
-              <a:spcAft>
-                <a:spcPts val="600"/>
-              </a:spcAft>
-            </a:pPr>
-            <a:r>
-              <a:rPr sz="1250" b="1">
-                <a:solidFill>
-                  <a:srgbClr val="F4B740"/>
-                </a:solidFill>
-                <a:latin typeface="Segoe UI"/>
-              </a:rPr>
-              <a:t>IT &amp; SUPORTE</a:t>
-            </a:r>
-          </a:p>
           <a:p>
             <a:pPr>
               <a:lnSpc>
@@ -7515,7 +11178,7 @@
                 </a:solidFill>
                 <a:latin typeface="Segoe UI"/>
               </a:rPr>
-              <a:t>Estrutura de </a:t>
+              <a:t>Construção/evolução de </a:t>
             </a:r>
             <a:r>
               <a:rPr sz="1400" b="1">
@@ -7524,16 +11187,7 @@
                 </a:solidFill>
                 <a:latin typeface="Segoe UI"/>
               </a:rPr>
-              <a:t>tickets</a:t>
-            </a:r>
-            <a:r>
-              <a:rPr sz="1400" b="0">
-                <a:solidFill>
-                  <a:srgbClr val="9AA7BD"/>
-                </a:solidFill>
-                <a:latin typeface="Segoe UI"/>
-              </a:rPr>
-              <a:t> e acompanhamento contínuo</a:t>
+              <a:t>NR1</a:t>
             </a:r>
           </a:p>
           <a:p>
@@ -7561,7 +11215,7 @@
                 </a:solidFill>
                 <a:latin typeface="Segoe UI"/>
               </a:rPr>
-              <a:t>Integração </a:t>
+              <a:t>Construção/evolução do </a:t>
             </a:r>
             <a:r>
               <a:rPr sz="1400" b="1">
@@ -7570,7 +11224,7 @@
                 </a:solidFill>
                 <a:latin typeface="Segoe UI"/>
               </a:rPr>
-              <a:t>Suporte ↔ CS ↔ Produto</a:t>
+              <a:t>Portal RH</a:t>
             </a:r>
           </a:p>
           <a:p>
@@ -7598,46 +11252,7 @@
                 </a:solidFill>
                 <a:latin typeface="Segoe UI"/>
               </a:rPr>
-              <a:t>Redução de custo no contrato de aluguel de PCs</a:t>
-            </a:r>
-          </a:p>
-        </p:txBody>
-      </p:sp>
-      <p:sp>
-        <p:nvSpPr>
-          <p:cNvPr id="5" name="TextBox 4"/>
-          <p:cNvSpPr txBox="1"/>
-          <p:nvPr/>
-        </p:nvSpPr>
-        <p:spPr>
-          <a:xfrm>
-            <a:off x="6309360" y="2194560"/>
-            <a:ext cx="5120640" cy="3931920"/>
-          </a:xfrm>
-          <a:prstGeom prst="rect">
-            <a:avLst/>
-          </a:prstGeom>
-          <a:noFill/>
-        </p:spPr>
-        <p:txBody>
-          <a:bodyPr wrap="square">
-            <a:spAutoFit/>
-          </a:bodyPr>
-          <a:lstStyle/>
-          <a:p>
-            <a:pPr>
-              <a:spcAft>
-                <a:spcPts val="600"/>
-              </a:spcAft>
-            </a:pPr>
-            <a:r>
-              <a:rPr sz="1250" b="1">
-                <a:solidFill>
-                  <a:srgbClr val="F4B740"/>
-                </a:solidFill>
-                <a:latin typeface="Segoe UI"/>
-              </a:rPr>
-              <a:t>PRINCIPAL ENGINEER</a:t>
+              <a:t>Correção de problemas NR1 (Eduardo O.)</a:t>
             </a:r>
           </a:p>
           <a:p>
@@ -7665,27 +11280,32 @@
                 </a:solidFill>
                 <a:latin typeface="Segoe UI"/>
               </a:rPr>
-              <a:t>Análise semanal de </a:t>
-            </a:r>
-            <a:r>
-              <a:rPr sz="1400" b="1">
-                <a:solidFill>
-                  <a:srgbClr val="EAF0FB"/>
-                </a:solidFill>
-                <a:latin typeface="Segoe UI"/>
-              </a:rPr>
-              <a:t>bugs estruturais</a:t>
-            </a:r>
-            <a:r>
-              <a:rPr sz="1400" b="0">
-                <a:solidFill>
-                  <a:srgbClr val="9AA7BD"/>
-                </a:solidFill>
-                <a:latin typeface="Segoe UI"/>
-              </a:rPr>
-              <a:t> (com Júlio)</a:t>
-            </a:r>
-          </a:p>
+              <a:t>Planejamento e evolução do Portal RH para valor real ao RH</a:t>
+            </a:r>
+          </a:p>
+        </p:txBody>
+      </p:sp>
+      <p:sp>
+        <p:nvSpPr>
+          <p:cNvPr id="5" name="TextBox 4"/>
+          <p:cNvSpPr txBox="1"/>
+          <p:nvPr/>
+        </p:nvSpPr>
+        <p:spPr>
+          <a:xfrm>
+            <a:off x="6309360" y="2194560"/>
+            <a:ext cx="5120640" cy="3931920"/>
+          </a:xfrm>
+          <a:prstGeom prst="rect">
+            <a:avLst/>
+          </a:prstGeom>
+          <a:noFill/>
+        </p:spPr>
+        <p:txBody>
+          <a:bodyPr wrap="square">
+            <a:spAutoFit/>
+          </a:bodyPr>
+          <a:lstStyle/>
           <a:p>
             <a:pPr>
               <a:lnSpc>
@@ -7711,7 +11331,25 @@
                 </a:solidFill>
                 <a:latin typeface="Segoe UI"/>
               </a:rPr>
-              <a:t>Desenho arquitetural das soluções</a:t>
+              <a:t>Definição </a:t>
+            </a:r>
+            <a:r>
+              <a:rPr sz="1400" b="1">
+                <a:solidFill>
+                  <a:srgbClr val="EAF0FB"/>
+                </a:solidFill>
+                <a:latin typeface="Segoe UI"/>
+              </a:rPr>
+              <a:t>multi-tiers</a:t>
+            </a:r>
+            <a:r>
+              <a:rPr sz="1400" b="0">
+                <a:solidFill>
+                  <a:srgbClr val="9AA7BD"/>
+                </a:solidFill>
+                <a:latin typeface="Segoe UI"/>
+              </a:rPr>
+              <a:t> de NR1 para múltiplas demandas de clientes (Produto de 1 a 4)</a:t>
             </a:r>
           </a:p>
           <a:p>
@@ -7739,25 +11377,7 @@
                 </a:solidFill>
                 <a:latin typeface="Segoe UI"/>
               </a:rPr>
-              <a:t>Nuvem: </a:t>
-            </a:r>
-            <a:r>
-              <a:rPr sz="1400" b="1">
-                <a:solidFill>
-                  <a:srgbClr val="EAF0FB"/>
-                </a:solidFill>
-                <a:latin typeface="Segoe UI"/>
-              </a:rPr>
-              <a:t>troca AWS</a:t>
-            </a:r>
-            <a:r>
-              <a:rPr sz="1400" b="0">
-                <a:solidFill>
-                  <a:srgbClr val="9AA7BD"/>
-                </a:solidFill>
-                <a:latin typeface="Segoe UI"/>
-              </a:rPr>
-              <a:t> e custo de infra ~0</a:t>
+              <a:t>Reuniões comerciais com clientes — retirada de dúvidas sobre NR1</a:t>
             </a:r>
           </a:p>
           <a:p>
@@ -7785,7 +11405,7 @@
                 </a:solidFill>
                 <a:latin typeface="Segoe UI"/>
               </a:rPr>
-              <a:t>Fornecedores: </a:t>
+              <a:t>Evolução de dores em casos de falha de APIs em cliente B2B (</a:t>
             </a:r>
             <a:r>
               <a:rPr sz="1400" b="1">
@@ -7794,7 +11414,7 @@
                 </a:solidFill>
                 <a:latin typeface="Segoe UI"/>
               </a:rPr>
-              <a:t>Agora.io</a:t>
+              <a:t>iFood</a:t>
             </a:r>
             <a:r>
               <a:rPr sz="1400" b="0">
@@ -7803,25 +11423,7 @@
                 </a:solidFill>
                 <a:latin typeface="Segoe UI"/>
               </a:rPr>
-              <a:t> e </a:t>
-            </a:r>
-            <a:r>
-              <a:rPr sz="1400" b="1">
-                <a:solidFill>
-                  <a:srgbClr val="EAF0FB"/>
-                </a:solidFill>
-                <a:latin typeface="Segoe UI"/>
-              </a:rPr>
-              <a:t>Twilio</a:t>
-            </a:r>
-            <a:r>
-              <a:rPr sz="1400" b="0">
-                <a:solidFill>
-                  <a:srgbClr val="9AA7BD"/>
-                </a:solidFill>
-                <a:latin typeface="Segoe UI"/>
-              </a:rPr>
-              <a:t> (renegociação)</a:t>
+              <a:t>)</a:t>
             </a:r>
           </a:p>
         </p:txBody>
@@ -7835,7 +11437,7 @@
         <p:spPr>
           <a:xfrm>
             <a:off x="822960" y="6400800"/>
-            <a:ext cx="7315200" cy="365760"/>
+            <a:ext cx="8229600" cy="365760"/>
           </a:xfrm>
           <a:prstGeom prst="rect">
             <a:avLst/>
@@ -7950,7 +11552,7 @@
                 </a:solidFill>
                 <a:latin typeface="Segoe UI"/>
               </a:rPr>
-              <a:t>O QUE CONECTA TODAS AS ÁREAS</a:t>
+              <a:t>ÁREA 2 · PRODUTO · FRENTE PARCERIAS</a:t>
             </a:r>
           </a:p>
         </p:txBody>
@@ -7963,8 +11565,8 @@
         </p:nvSpPr>
         <p:spPr>
           <a:xfrm>
-            <a:off x="822960" y="960120"/>
-            <a:ext cx="10515600" cy="1371600"/>
+            <a:off x="822960" y="914400"/>
+            <a:ext cx="10515600" cy="1280160"/>
           </a:xfrm>
           <a:prstGeom prst="rect">
             <a:avLst/>
@@ -7978,13 +11580,13 @@
           <a:lstStyle/>
           <a:p>
             <a:r>
-              <a:rPr sz="3400" b="1">
+              <a:rPr sz="3000" b="1">
                 <a:solidFill>
                   <a:srgbClr val="EAF0FB"/>
                 </a:solidFill>
                 <a:latin typeface="Segoe UI"/>
               </a:rPr>
-              <a:t>Construí os times que sustentam a operação</a:t>
+              <a:t>Parcerias</a:t>
             </a:r>
           </a:p>
         </p:txBody>
@@ -7997,8 +11599,8 @@
         </p:nvSpPr>
         <p:spPr>
           <a:xfrm>
-            <a:off x="822960" y="1874519"/>
-            <a:ext cx="10332720" cy="914400"/>
+            <a:off x="822960" y="2194560"/>
+            <a:ext cx="5120640" cy="3931920"/>
           </a:xfrm>
           <a:prstGeom prst="rect">
             <a:avLst/>
@@ -8013,787 +11615,108 @@
           <a:p>
             <a:pPr>
               <a:lnSpc>
-                <a:spcPct val="125000"/>
+                <a:spcPct val="108000"/>
               </a:lnSpc>
+              <a:spcAft>
+                <a:spcPts val="600"/>
+              </a:spcAft>
             </a:pPr>
             <a:r>
-              <a:rPr sz="1700" b="1">
+              <a:rPr sz="1400" b="1">
                 <a:solidFill>
                   <a:srgbClr val="2DD4BF"/>
                 </a:solidFill>
                 <a:latin typeface="Segoe UI"/>
               </a:rPr>
-              <a:t>15+ pessoas</a:t>
-            </a:r>
-            <a:r>
-              <a:rPr sz="1600" b="0">
-                <a:solidFill>
-                  <a:srgbClr val="9AA7BD"/>
-                </a:solidFill>
-                <a:latin typeface="Segoe UI"/>
-              </a:rPr>
-              <a:t> contratadas e formadas em Tecnologia, Produto, Dados e Suporte. Por trás de cada área, um líder que estou desenvolvendo.</a:t>
-            </a:r>
-          </a:p>
-        </p:txBody>
-      </p:sp>
-      <p:sp>
-        <p:nvSpPr>
-          <p:cNvPr id="5" name="Rounded Rectangle 4"/>
-          <p:cNvSpPr/>
-          <p:nvPr/>
-        </p:nvSpPr>
-        <p:spPr>
-          <a:xfrm>
-            <a:off x="822960" y="3154680"/>
-            <a:ext cx="1207008" cy="502920"/>
-          </a:xfrm>
-          <a:prstGeom prst="roundRect">
-            <a:avLst>
-              <a:gd name="adj" fmla="val 7000"/>
-            </a:avLst>
-          </a:prstGeom>
-          <a:solidFill>
-            <a:srgbClr val="18223A"/>
-          </a:solidFill>
-          <a:ln w="12700">
-            <a:solidFill>
-              <a:srgbClr val="2A3652"/>
-            </a:solidFill>
-          </a:ln>
-          <a:effectLst/>
-        </p:spPr>
-        <p:style>
-          <a:lnRef idx="1">
-            <a:schemeClr val="accent1"/>
-          </a:lnRef>
-          <a:fillRef idx="3">
-            <a:schemeClr val="accent1"/>
-          </a:fillRef>
-          <a:effectRef idx="2">
-            <a:schemeClr val="accent1"/>
-          </a:effectRef>
-          <a:fontRef idx="minor">
-            <a:schemeClr val="lt1"/>
-          </a:fontRef>
-        </p:style>
-        <p:txBody>
-          <a:bodyPr rtlCol="0" anchor="ctr"/>
-          <a:lstStyle/>
-          <a:p>
-            <a:pPr algn="ctr"/>
-          </a:p>
-        </p:txBody>
-      </p:sp>
-      <p:sp>
-        <p:nvSpPr>
-          <p:cNvPr id="6" name="TextBox 5"/>
+              <a:t>▪  </a:t>
+            </a:r>
+            <a:r>
+              <a:rPr sz="1400" b="0">
+                <a:solidFill>
+                  <a:srgbClr val="9AA7BD"/>
+                </a:solidFill>
+                <a:latin typeface="Segoe UI"/>
+              </a:rPr>
+              <a:t>Análise de qualidade da </a:t>
+            </a:r>
+            <a:r>
+              <a:rPr sz="1400" b="1">
+                <a:solidFill>
+                  <a:srgbClr val="EAF0FB"/>
+                </a:solidFill>
+                <a:latin typeface="Segoe UI"/>
+              </a:rPr>
+              <a:t>API V2</a:t>
+            </a:r>
+          </a:p>
+          <a:p>
+            <a:pPr>
+              <a:lnSpc>
+                <a:spcPct val="108000"/>
+              </a:lnSpc>
+              <a:spcAft>
+                <a:spcPts val="600"/>
+              </a:spcAft>
+            </a:pPr>
+            <a:r>
+              <a:rPr sz="1400" b="1">
+                <a:solidFill>
+                  <a:srgbClr val="2DD4BF"/>
+                </a:solidFill>
+                <a:latin typeface="Segoe UI"/>
+              </a:rPr>
+              <a:t>▪  </a:t>
+            </a:r>
+            <a:r>
+              <a:rPr sz="1400" b="0">
+                <a:solidFill>
+                  <a:srgbClr val="9AA7BD"/>
+                </a:solidFill>
+                <a:latin typeface="Segoe UI"/>
+              </a:rPr>
+              <a:t>Atuações pontuais em problemas crônicos da API (ex.: iFood)</a:t>
+            </a:r>
+          </a:p>
+          <a:p>
+            <a:pPr>
+              <a:lnSpc>
+                <a:spcPct val="108000"/>
+              </a:lnSpc>
+              <a:spcAft>
+                <a:spcPts val="600"/>
+              </a:spcAft>
+            </a:pPr>
+            <a:r>
+              <a:rPr sz="1400" b="1">
+                <a:solidFill>
+                  <a:srgbClr val="2DD4BF"/>
+                </a:solidFill>
+                <a:latin typeface="Segoe UI"/>
+              </a:rPr>
+              <a:t>▪  </a:t>
+            </a:r>
+            <a:r>
+              <a:rPr sz="1400" b="0">
+                <a:solidFill>
+                  <a:srgbClr val="9AA7BD"/>
+                </a:solidFill>
+                <a:latin typeface="Segoe UI"/>
+              </a:rPr>
+              <a:t>Apoio à estrutura do time com pouco headcount</a:t>
+            </a:r>
+          </a:p>
+        </p:txBody>
+      </p:sp>
+      <p:sp>
+        <p:nvSpPr>
+          <p:cNvPr id="5" name="TextBox 4"/>
           <p:cNvSpPr txBox="1"/>
           <p:nvPr/>
         </p:nvSpPr>
         <p:spPr>
           <a:xfrm>
-            <a:off x="822960" y="3154680"/>
-            <a:ext cx="1207008" cy="502920"/>
-          </a:xfrm>
-          <a:prstGeom prst="rect">
-            <a:avLst/>
-          </a:prstGeom>
-          <a:noFill/>
-        </p:spPr>
-        <p:txBody>
-          <a:bodyPr wrap="square" anchor="ctr">
-            <a:spAutoFit/>
-          </a:bodyPr>
-          <a:lstStyle/>
-          <a:p>
-            <a:pPr algn="l"/>
-            <a:r>
-              <a:rPr sz="1300" b="1">
-                <a:solidFill>
-                  <a:srgbClr val="EAF0FB"/>
-                </a:solidFill>
-                <a:latin typeface="Segoe UI"/>
-              </a:rPr>
-              <a:t>Barbara</a:t>
-            </a:r>
-          </a:p>
-        </p:txBody>
-      </p:sp>
-      <p:sp>
-        <p:nvSpPr>
-          <p:cNvPr id="7" name="Rounded Rectangle 6"/>
-          <p:cNvSpPr/>
-          <p:nvPr/>
-        </p:nvSpPr>
-        <p:spPr>
-          <a:xfrm>
-            <a:off x="2176272" y="3154680"/>
-            <a:ext cx="1207008" cy="502920"/>
-          </a:xfrm>
-          <a:prstGeom prst="roundRect">
-            <a:avLst>
-              <a:gd name="adj" fmla="val 7000"/>
-            </a:avLst>
-          </a:prstGeom>
-          <a:solidFill>
-            <a:srgbClr val="18223A"/>
-          </a:solidFill>
-          <a:ln w="12700">
-            <a:solidFill>
-              <a:srgbClr val="2A3652"/>
-            </a:solidFill>
-          </a:ln>
-          <a:effectLst/>
-        </p:spPr>
-        <p:style>
-          <a:lnRef idx="1">
-            <a:schemeClr val="accent1"/>
-          </a:lnRef>
-          <a:fillRef idx="3">
-            <a:schemeClr val="accent1"/>
-          </a:fillRef>
-          <a:effectRef idx="2">
-            <a:schemeClr val="accent1"/>
-          </a:effectRef>
-          <a:fontRef idx="minor">
-            <a:schemeClr val="lt1"/>
-          </a:fontRef>
-        </p:style>
-        <p:txBody>
-          <a:bodyPr rtlCol="0" anchor="ctr"/>
-          <a:lstStyle/>
-          <a:p>
-            <a:pPr algn="ctr"/>
-          </a:p>
-        </p:txBody>
-      </p:sp>
-      <p:sp>
-        <p:nvSpPr>
-          <p:cNvPr id="8" name="TextBox 7"/>
-          <p:cNvSpPr txBox="1"/>
-          <p:nvPr/>
-        </p:nvSpPr>
-        <p:spPr>
-          <a:xfrm>
-            <a:off x="2176272" y="3154680"/>
-            <a:ext cx="1207008" cy="502920"/>
-          </a:xfrm>
-          <a:prstGeom prst="rect">
-            <a:avLst/>
-          </a:prstGeom>
-          <a:noFill/>
-        </p:spPr>
-        <p:txBody>
-          <a:bodyPr wrap="square" anchor="ctr">
-            <a:spAutoFit/>
-          </a:bodyPr>
-          <a:lstStyle/>
-          <a:p>
-            <a:pPr algn="l"/>
-            <a:r>
-              <a:rPr sz="1300" b="1">
-                <a:solidFill>
-                  <a:srgbClr val="EAF0FB"/>
-                </a:solidFill>
-                <a:latin typeface="Segoe UI"/>
-              </a:rPr>
-              <a:t>Felipe</a:t>
-            </a:r>
-          </a:p>
-        </p:txBody>
-      </p:sp>
-      <p:sp>
-        <p:nvSpPr>
-          <p:cNvPr id="9" name="Rounded Rectangle 8"/>
-          <p:cNvSpPr/>
-          <p:nvPr/>
-        </p:nvSpPr>
-        <p:spPr>
-          <a:xfrm>
-            <a:off x="3529584" y="3154680"/>
-            <a:ext cx="1207008" cy="502920"/>
-          </a:xfrm>
-          <a:prstGeom prst="roundRect">
-            <a:avLst>
-              <a:gd name="adj" fmla="val 7000"/>
-            </a:avLst>
-          </a:prstGeom>
-          <a:solidFill>
-            <a:srgbClr val="18223A"/>
-          </a:solidFill>
-          <a:ln w="12700">
-            <a:solidFill>
-              <a:srgbClr val="2A3652"/>
-            </a:solidFill>
-          </a:ln>
-          <a:effectLst/>
-        </p:spPr>
-        <p:style>
-          <a:lnRef idx="1">
-            <a:schemeClr val="accent1"/>
-          </a:lnRef>
-          <a:fillRef idx="3">
-            <a:schemeClr val="accent1"/>
-          </a:fillRef>
-          <a:effectRef idx="2">
-            <a:schemeClr val="accent1"/>
-          </a:effectRef>
-          <a:fontRef idx="minor">
-            <a:schemeClr val="lt1"/>
-          </a:fontRef>
-        </p:style>
-        <p:txBody>
-          <a:bodyPr rtlCol="0" anchor="ctr"/>
-          <a:lstStyle/>
-          <a:p>
-            <a:pPr algn="ctr"/>
-          </a:p>
-        </p:txBody>
-      </p:sp>
-      <p:sp>
-        <p:nvSpPr>
-          <p:cNvPr id="10" name="TextBox 9"/>
-          <p:cNvSpPr txBox="1"/>
-          <p:nvPr/>
-        </p:nvSpPr>
-        <p:spPr>
-          <a:xfrm>
-            <a:off x="3529584" y="3154680"/>
-            <a:ext cx="1207008" cy="502920"/>
-          </a:xfrm>
-          <a:prstGeom prst="rect">
-            <a:avLst/>
-          </a:prstGeom>
-          <a:noFill/>
-        </p:spPr>
-        <p:txBody>
-          <a:bodyPr wrap="square" anchor="ctr">
-            <a:spAutoFit/>
-          </a:bodyPr>
-          <a:lstStyle/>
-          <a:p>
-            <a:pPr algn="l"/>
-            <a:r>
-              <a:rPr sz="1300" b="1">
-                <a:solidFill>
-                  <a:srgbClr val="EAF0FB"/>
-                </a:solidFill>
-                <a:latin typeface="Segoe UI"/>
-              </a:rPr>
-              <a:t>Tenório</a:t>
-            </a:r>
-          </a:p>
-        </p:txBody>
-      </p:sp>
-      <p:sp>
-        <p:nvSpPr>
-          <p:cNvPr id="11" name="Rounded Rectangle 10"/>
-          <p:cNvSpPr/>
-          <p:nvPr/>
-        </p:nvSpPr>
-        <p:spPr>
-          <a:xfrm>
-            <a:off x="4882896" y="3154680"/>
-            <a:ext cx="1207008" cy="502920"/>
-          </a:xfrm>
-          <a:prstGeom prst="roundRect">
-            <a:avLst>
-              <a:gd name="adj" fmla="val 7000"/>
-            </a:avLst>
-          </a:prstGeom>
-          <a:solidFill>
-            <a:srgbClr val="18223A"/>
-          </a:solidFill>
-          <a:ln w="12700">
-            <a:solidFill>
-              <a:srgbClr val="2A3652"/>
-            </a:solidFill>
-          </a:ln>
-          <a:effectLst/>
-        </p:spPr>
-        <p:style>
-          <a:lnRef idx="1">
-            <a:schemeClr val="accent1"/>
-          </a:lnRef>
-          <a:fillRef idx="3">
-            <a:schemeClr val="accent1"/>
-          </a:fillRef>
-          <a:effectRef idx="2">
-            <a:schemeClr val="accent1"/>
-          </a:effectRef>
-          <a:fontRef idx="minor">
-            <a:schemeClr val="lt1"/>
-          </a:fontRef>
-        </p:style>
-        <p:txBody>
-          <a:bodyPr rtlCol="0" anchor="ctr"/>
-          <a:lstStyle/>
-          <a:p>
-            <a:pPr algn="ctr"/>
-          </a:p>
-        </p:txBody>
-      </p:sp>
-      <p:sp>
-        <p:nvSpPr>
-          <p:cNvPr id="12" name="TextBox 11"/>
-          <p:cNvSpPr txBox="1"/>
-          <p:nvPr/>
-        </p:nvSpPr>
-        <p:spPr>
-          <a:xfrm>
-            <a:off x="4882896" y="3154680"/>
-            <a:ext cx="1207008" cy="502920"/>
-          </a:xfrm>
-          <a:prstGeom prst="rect">
-            <a:avLst/>
-          </a:prstGeom>
-          <a:noFill/>
-        </p:spPr>
-        <p:txBody>
-          <a:bodyPr wrap="square" anchor="ctr">
-            <a:spAutoFit/>
-          </a:bodyPr>
-          <a:lstStyle/>
-          <a:p>
-            <a:pPr algn="l"/>
-            <a:r>
-              <a:rPr sz="1300" b="1">
-                <a:solidFill>
-                  <a:srgbClr val="EAF0FB"/>
-                </a:solidFill>
-                <a:latin typeface="Segoe UI"/>
-              </a:rPr>
-              <a:t>Leo</a:t>
-            </a:r>
-          </a:p>
-        </p:txBody>
-      </p:sp>
-      <p:sp>
-        <p:nvSpPr>
-          <p:cNvPr id="13" name="Rounded Rectangle 12"/>
-          <p:cNvSpPr/>
-          <p:nvPr/>
-        </p:nvSpPr>
-        <p:spPr>
-          <a:xfrm>
-            <a:off x="6236208" y="3154680"/>
-            <a:ext cx="1207008" cy="502920"/>
-          </a:xfrm>
-          <a:prstGeom prst="roundRect">
-            <a:avLst>
-              <a:gd name="adj" fmla="val 7000"/>
-            </a:avLst>
-          </a:prstGeom>
-          <a:solidFill>
-            <a:srgbClr val="18223A"/>
-          </a:solidFill>
-          <a:ln w="12700">
-            <a:solidFill>
-              <a:srgbClr val="2A3652"/>
-            </a:solidFill>
-          </a:ln>
-          <a:effectLst/>
-        </p:spPr>
-        <p:style>
-          <a:lnRef idx="1">
-            <a:schemeClr val="accent1"/>
-          </a:lnRef>
-          <a:fillRef idx="3">
-            <a:schemeClr val="accent1"/>
-          </a:fillRef>
-          <a:effectRef idx="2">
-            <a:schemeClr val="accent1"/>
-          </a:effectRef>
-          <a:fontRef idx="minor">
-            <a:schemeClr val="lt1"/>
-          </a:fontRef>
-        </p:style>
-        <p:txBody>
-          <a:bodyPr rtlCol="0" anchor="ctr"/>
-          <a:lstStyle/>
-          <a:p>
-            <a:pPr algn="ctr"/>
-          </a:p>
-        </p:txBody>
-      </p:sp>
-      <p:sp>
-        <p:nvSpPr>
-          <p:cNvPr id="14" name="TextBox 13"/>
-          <p:cNvSpPr txBox="1"/>
-          <p:nvPr/>
-        </p:nvSpPr>
-        <p:spPr>
-          <a:xfrm>
-            <a:off x="6236208" y="3154680"/>
-            <a:ext cx="1207008" cy="502920"/>
-          </a:xfrm>
-          <a:prstGeom prst="rect">
-            <a:avLst/>
-          </a:prstGeom>
-          <a:noFill/>
-        </p:spPr>
-        <p:txBody>
-          <a:bodyPr wrap="square" anchor="ctr">
-            <a:spAutoFit/>
-          </a:bodyPr>
-          <a:lstStyle/>
-          <a:p>
-            <a:pPr algn="l"/>
-            <a:r>
-              <a:rPr sz="1300" b="1">
-                <a:solidFill>
-                  <a:srgbClr val="EAF0FB"/>
-                </a:solidFill>
-                <a:latin typeface="Segoe UI"/>
-              </a:rPr>
-              <a:t>Rodrigo</a:t>
-            </a:r>
-          </a:p>
-        </p:txBody>
-      </p:sp>
-      <p:sp>
-        <p:nvSpPr>
-          <p:cNvPr id="15" name="Rounded Rectangle 14"/>
-          <p:cNvSpPr/>
-          <p:nvPr/>
-        </p:nvSpPr>
-        <p:spPr>
-          <a:xfrm>
-            <a:off x="7589520" y="3154680"/>
-            <a:ext cx="1207008" cy="502920"/>
-          </a:xfrm>
-          <a:prstGeom prst="roundRect">
-            <a:avLst>
-              <a:gd name="adj" fmla="val 7000"/>
-            </a:avLst>
-          </a:prstGeom>
-          <a:solidFill>
-            <a:srgbClr val="18223A"/>
-          </a:solidFill>
-          <a:ln w="12700">
-            <a:solidFill>
-              <a:srgbClr val="2A3652"/>
-            </a:solidFill>
-          </a:ln>
-          <a:effectLst/>
-        </p:spPr>
-        <p:style>
-          <a:lnRef idx="1">
-            <a:schemeClr val="accent1"/>
-          </a:lnRef>
-          <a:fillRef idx="3">
-            <a:schemeClr val="accent1"/>
-          </a:fillRef>
-          <a:effectRef idx="2">
-            <a:schemeClr val="accent1"/>
-          </a:effectRef>
-          <a:fontRef idx="minor">
-            <a:schemeClr val="lt1"/>
-          </a:fontRef>
-        </p:style>
-        <p:txBody>
-          <a:bodyPr rtlCol="0" anchor="ctr"/>
-          <a:lstStyle/>
-          <a:p>
-            <a:pPr algn="ctr"/>
-          </a:p>
-        </p:txBody>
-      </p:sp>
-      <p:sp>
-        <p:nvSpPr>
-          <p:cNvPr id="16" name="TextBox 15"/>
-          <p:cNvSpPr txBox="1"/>
-          <p:nvPr/>
-        </p:nvSpPr>
-        <p:spPr>
-          <a:xfrm>
-            <a:off x="7589520" y="3154680"/>
-            <a:ext cx="1207008" cy="502920"/>
-          </a:xfrm>
-          <a:prstGeom prst="rect">
-            <a:avLst/>
-          </a:prstGeom>
-          <a:noFill/>
-        </p:spPr>
-        <p:txBody>
-          <a:bodyPr wrap="square" anchor="ctr">
-            <a:spAutoFit/>
-          </a:bodyPr>
-          <a:lstStyle/>
-          <a:p>
-            <a:pPr algn="l"/>
-            <a:r>
-              <a:rPr sz="1300" b="1">
-                <a:solidFill>
-                  <a:srgbClr val="EAF0FB"/>
-                </a:solidFill>
-                <a:latin typeface="Segoe UI"/>
-              </a:rPr>
-              <a:t>Bruno</a:t>
-            </a:r>
-          </a:p>
-        </p:txBody>
-      </p:sp>
-      <p:sp>
-        <p:nvSpPr>
-          <p:cNvPr id="17" name="Rounded Rectangle 16"/>
-          <p:cNvSpPr/>
-          <p:nvPr/>
-        </p:nvSpPr>
-        <p:spPr>
-          <a:xfrm>
-            <a:off x="8942832" y="3154680"/>
-            <a:ext cx="1207008" cy="502920"/>
-          </a:xfrm>
-          <a:prstGeom prst="roundRect">
-            <a:avLst>
-              <a:gd name="adj" fmla="val 7000"/>
-            </a:avLst>
-          </a:prstGeom>
-          <a:solidFill>
-            <a:srgbClr val="18223A"/>
-          </a:solidFill>
-          <a:ln w="12700">
-            <a:solidFill>
-              <a:srgbClr val="2A3652"/>
-            </a:solidFill>
-          </a:ln>
-          <a:effectLst/>
-        </p:spPr>
-        <p:style>
-          <a:lnRef idx="1">
-            <a:schemeClr val="accent1"/>
-          </a:lnRef>
-          <a:fillRef idx="3">
-            <a:schemeClr val="accent1"/>
-          </a:fillRef>
-          <a:effectRef idx="2">
-            <a:schemeClr val="accent1"/>
-          </a:effectRef>
-          <a:fontRef idx="minor">
-            <a:schemeClr val="lt1"/>
-          </a:fontRef>
-        </p:style>
-        <p:txBody>
-          <a:bodyPr rtlCol="0" anchor="ctr"/>
-          <a:lstStyle/>
-          <a:p>
-            <a:pPr algn="ctr"/>
-          </a:p>
-        </p:txBody>
-      </p:sp>
-      <p:sp>
-        <p:nvSpPr>
-          <p:cNvPr id="18" name="TextBox 17"/>
-          <p:cNvSpPr txBox="1"/>
-          <p:nvPr/>
-        </p:nvSpPr>
-        <p:spPr>
-          <a:xfrm>
-            <a:off x="8942832" y="3154680"/>
-            <a:ext cx="1207008" cy="502920"/>
-          </a:xfrm>
-          <a:prstGeom prst="rect">
-            <a:avLst/>
-          </a:prstGeom>
-          <a:noFill/>
-        </p:spPr>
-        <p:txBody>
-          <a:bodyPr wrap="square" anchor="ctr">
-            <a:spAutoFit/>
-          </a:bodyPr>
-          <a:lstStyle/>
-          <a:p>
-            <a:pPr algn="l"/>
-            <a:r>
-              <a:rPr sz="1300" b="1">
-                <a:solidFill>
-                  <a:srgbClr val="EAF0FB"/>
-                </a:solidFill>
-                <a:latin typeface="Segoe UI"/>
-              </a:rPr>
-              <a:t>Vitor</a:t>
-            </a:r>
-          </a:p>
-        </p:txBody>
-      </p:sp>
-      <p:sp>
-        <p:nvSpPr>
-          <p:cNvPr id="19" name="Rounded Rectangle 18"/>
-          <p:cNvSpPr/>
-          <p:nvPr/>
-        </p:nvSpPr>
-        <p:spPr>
-          <a:xfrm>
-            <a:off x="822960" y="3822191"/>
-            <a:ext cx="1207008" cy="502920"/>
-          </a:xfrm>
-          <a:prstGeom prst="roundRect">
-            <a:avLst>
-              <a:gd name="adj" fmla="val 7000"/>
-            </a:avLst>
-          </a:prstGeom>
-          <a:solidFill>
-            <a:srgbClr val="18223A"/>
-          </a:solidFill>
-          <a:ln w="12700">
-            <a:solidFill>
-              <a:srgbClr val="2A3652"/>
-            </a:solidFill>
-          </a:ln>
-          <a:effectLst/>
-        </p:spPr>
-        <p:style>
-          <a:lnRef idx="1">
-            <a:schemeClr val="accent1"/>
-          </a:lnRef>
-          <a:fillRef idx="3">
-            <a:schemeClr val="accent1"/>
-          </a:fillRef>
-          <a:effectRef idx="2">
-            <a:schemeClr val="accent1"/>
-          </a:effectRef>
-          <a:fontRef idx="minor">
-            <a:schemeClr val="lt1"/>
-          </a:fontRef>
-        </p:style>
-        <p:txBody>
-          <a:bodyPr rtlCol="0" anchor="ctr"/>
-          <a:lstStyle/>
-          <a:p>
-            <a:pPr algn="ctr"/>
-          </a:p>
-        </p:txBody>
-      </p:sp>
-      <p:sp>
-        <p:nvSpPr>
-          <p:cNvPr id="20" name="TextBox 19"/>
-          <p:cNvSpPr txBox="1"/>
-          <p:nvPr/>
-        </p:nvSpPr>
-        <p:spPr>
-          <a:xfrm>
-            <a:off x="822960" y="3822191"/>
-            <a:ext cx="1207008" cy="502920"/>
-          </a:xfrm>
-          <a:prstGeom prst="rect">
-            <a:avLst/>
-          </a:prstGeom>
-          <a:noFill/>
-        </p:spPr>
-        <p:txBody>
-          <a:bodyPr wrap="square" anchor="ctr">
-            <a:spAutoFit/>
-          </a:bodyPr>
-          <a:lstStyle/>
-          <a:p>
-            <a:pPr algn="l"/>
-            <a:r>
-              <a:rPr sz="1300" b="1">
-                <a:solidFill>
-                  <a:srgbClr val="EAF0FB"/>
-                </a:solidFill>
-                <a:latin typeface="Segoe UI"/>
-              </a:rPr>
-              <a:t>Humberto</a:t>
-            </a:r>
-          </a:p>
-        </p:txBody>
-      </p:sp>
-      <p:sp>
-        <p:nvSpPr>
-          <p:cNvPr id="21" name="Rounded Rectangle 20"/>
-          <p:cNvSpPr/>
-          <p:nvPr/>
-        </p:nvSpPr>
-        <p:spPr>
-          <a:xfrm>
-            <a:off x="2176272" y="3822191"/>
-            <a:ext cx="1207008" cy="502920"/>
-          </a:xfrm>
-          <a:prstGeom prst="roundRect">
-            <a:avLst>
-              <a:gd name="adj" fmla="val 7000"/>
-            </a:avLst>
-          </a:prstGeom>
-          <a:solidFill>
-            <a:srgbClr val="18223A"/>
-          </a:solidFill>
-          <a:ln w="12700">
-            <a:solidFill>
-              <a:srgbClr val="2A3652"/>
-            </a:solidFill>
-          </a:ln>
-          <a:effectLst/>
-        </p:spPr>
-        <p:style>
-          <a:lnRef idx="1">
-            <a:schemeClr val="accent1"/>
-          </a:lnRef>
-          <a:fillRef idx="3">
-            <a:schemeClr val="accent1"/>
-          </a:fillRef>
-          <a:effectRef idx="2">
-            <a:schemeClr val="accent1"/>
-          </a:effectRef>
-          <a:fontRef idx="minor">
-            <a:schemeClr val="lt1"/>
-          </a:fontRef>
-        </p:style>
-        <p:txBody>
-          <a:bodyPr rtlCol="0" anchor="ctr"/>
-          <a:lstStyle/>
-          <a:p>
-            <a:pPr algn="ctr"/>
-          </a:p>
-        </p:txBody>
-      </p:sp>
-      <p:sp>
-        <p:nvSpPr>
-          <p:cNvPr id="22" name="TextBox 21"/>
-          <p:cNvSpPr txBox="1"/>
-          <p:nvPr/>
-        </p:nvSpPr>
-        <p:spPr>
-          <a:xfrm>
-            <a:off x="2176272" y="3822191"/>
-            <a:ext cx="1207008" cy="502920"/>
-          </a:xfrm>
-          <a:prstGeom prst="rect">
-            <a:avLst/>
-          </a:prstGeom>
-          <a:noFill/>
-        </p:spPr>
-        <p:txBody>
-          <a:bodyPr wrap="square" anchor="ctr">
-            <a:spAutoFit/>
-          </a:bodyPr>
-          <a:lstStyle/>
-          <a:p>
-            <a:pPr algn="l"/>
-            <a:r>
-              <a:rPr sz="1300" b="1">
-                <a:solidFill>
-                  <a:srgbClr val="EAF0FB"/>
-                </a:solidFill>
-                <a:latin typeface="Segoe UI"/>
-              </a:rPr>
-              <a:t>Mila</a:t>
-            </a:r>
-          </a:p>
-        </p:txBody>
-      </p:sp>
-      <p:sp>
-        <p:nvSpPr>
-          <p:cNvPr id="23" name="TextBox 22"/>
-          <p:cNvSpPr txBox="1"/>
-          <p:nvPr/>
-        </p:nvSpPr>
-        <p:spPr>
-          <a:xfrm>
-            <a:off x="822960" y="4663440"/>
-            <a:ext cx="10332720" cy="914400"/>
+            <a:off x="6309360" y="2194560"/>
+            <a:ext cx="5120640" cy="3931920"/>
           </a:xfrm>
           <a:prstGeom prst="rect">
             <a:avLst/>
@@ -8808,49 +11731,135 @@
           <a:p>
             <a:pPr>
               <a:lnSpc>
-                <a:spcPct val="125000"/>
+                <a:spcPct val="108000"/>
               </a:lnSpc>
+              <a:spcAft>
+                <a:spcPts val="600"/>
+              </a:spcAft>
             </a:pPr>
             <a:r>
-              <a:rPr sz="1600" b="0">
-                <a:solidFill>
-                  <a:srgbClr val="9AA7BD"/>
-                </a:solidFill>
-                <a:latin typeface="Segoe UI"/>
-              </a:rPr>
-              <a:t>Resultado: um salto na </a:t>
-            </a:r>
-            <a:r>
-              <a:rPr sz="1600" b="1">
+              <a:rPr sz="1400" b="1">
+                <a:solidFill>
+                  <a:srgbClr val="2DD4BF"/>
+                </a:solidFill>
+                <a:latin typeface="Segoe UI"/>
+              </a:rPr>
+              <a:t>▪  </a:t>
+            </a:r>
+            <a:r>
+              <a:rPr sz="1400" b="0">
+                <a:solidFill>
+                  <a:srgbClr val="9AA7BD"/>
+                </a:solidFill>
+                <a:latin typeface="Segoe UI"/>
+              </a:rPr>
+              <a:t>Reuniões comerciais com parceiros como </a:t>
+            </a:r>
+            <a:r>
+              <a:rPr sz="1400" b="1">
                 <a:solidFill>
                   <a:srgbClr val="EAF0FB"/>
                 </a:solidFill>
                 <a:latin typeface="Segoe UI"/>
               </a:rPr>
-              <a:t>qualidade percebida</a:t>
-            </a:r>
-            <a:r>
-              <a:rPr sz="1600" b="0">
-                <a:solidFill>
-                  <a:srgbClr val="9AA7BD"/>
-                </a:solidFill>
-                <a:latin typeface="Segoe UI"/>
-              </a:rPr>
-              <a:t> do time — consistência e confiabilidade que hoje são referência interna.</a:t>
-            </a:r>
-          </a:p>
-        </p:txBody>
-      </p:sp>
-      <p:sp>
-        <p:nvSpPr>
-          <p:cNvPr id="24" name="TextBox 23"/>
+              <a:t>iFood, TotalPass, Claro</a:t>
+            </a:r>
+            <a:r>
+              <a:rPr sz="1400" b="0">
+                <a:solidFill>
+                  <a:srgbClr val="9AA7BD"/>
+                </a:solidFill>
+                <a:latin typeface="Segoe UI"/>
+              </a:rPr>
+              <a:t> etc.</a:t>
+            </a:r>
+          </a:p>
+          <a:p>
+            <a:pPr>
+              <a:lnSpc>
+                <a:spcPct val="108000"/>
+              </a:lnSpc>
+              <a:spcAft>
+                <a:spcPts val="600"/>
+              </a:spcAft>
+            </a:pPr>
+            <a:r>
+              <a:rPr sz="1400" b="1">
+                <a:solidFill>
+                  <a:srgbClr val="2DD4BF"/>
+                </a:solidFill>
+                <a:latin typeface="Segoe UI"/>
+              </a:rPr>
+              <a:t>▪  </a:t>
+            </a:r>
+            <a:r>
+              <a:rPr sz="1400" b="0">
+                <a:solidFill>
+                  <a:srgbClr val="9AA7BD"/>
+                </a:solidFill>
+                <a:latin typeface="Segoe UI"/>
+              </a:rPr>
+              <a:t>Evolução e acompanhamento de custos mensais de </a:t>
+            </a:r>
+            <a:r>
+              <a:rPr sz="1400" b="1">
+                <a:solidFill>
+                  <a:srgbClr val="EAF0FB"/>
+                </a:solidFill>
+                <a:latin typeface="Segoe UI"/>
+              </a:rPr>
+              <a:t>LLM</a:t>
+            </a:r>
+          </a:p>
+          <a:p>
+            <a:pPr>
+              <a:lnSpc>
+                <a:spcPct val="108000"/>
+              </a:lnSpc>
+              <a:spcAft>
+                <a:spcPts val="600"/>
+              </a:spcAft>
+            </a:pPr>
+            <a:r>
+              <a:rPr sz="1400" b="1">
+                <a:solidFill>
+                  <a:srgbClr val="2DD4BF"/>
+                </a:solidFill>
+                <a:latin typeface="Segoe UI"/>
+              </a:rPr>
+              <a:t>▪  </a:t>
+            </a:r>
+            <a:r>
+              <a:rPr sz="1400" b="0">
+                <a:solidFill>
+                  <a:srgbClr val="9AA7BD"/>
+                </a:solidFill>
+                <a:latin typeface="Segoe UI"/>
+              </a:rPr>
+              <a:t>Construção e evolução de novos produtos para parceiros, como </a:t>
+            </a:r>
+            <a:r>
+              <a:rPr sz="1400" b="1">
+                <a:solidFill>
+                  <a:srgbClr val="EAF0FB"/>
+                </a:solidFill>
+                <a:latin typeface="Segoe UI"/>
+              </a:rPr>
+              <a:t>Shapeme</a:t>
+            </a:r>
+          </a:p>
+        </p:txBody>
+      </p:sp>
+      <p:sp>
+        <p:nvSpPr>
+          <p:cNvPr id="6" name="TextBox 5"/>
           <p:cNvSpPr txBox="1"/>
           <p:nvPr/>
         </p:nvSpPr>
         <p:spPr>
           <a:xfrm>
             <a:off x="822960" y="6400800"/>
-            <a:ext cx="7315200" cy="365760"/>
+            <a:ext cx="8229600" cy="365760"/>
           </a:xfrm>
           <a:prstGeom prst="rect">
             <a:avLst/>
@@ -8877,7 +11886,7 @@
       </p:sp>
       <p:sp>
         <p:nvSpPr>
-          <p:cNvPr id="25" name="TextBox 24"/>
+          <p:cNvPr id="7" name="TextBox 6"/>
           <p:cNvSpPr txBox="1"/>
           <p:nvPr/>
         </p:nvSpPr>
@@ -8965,7 +11974,7 @@
                 </a:solidFill>
                 <a:latin typeface="Segoe UI"/>
               </a:rPr>
-              <a:t>DESTAQUES DO PERÍODO</a:t>
+              <a:t>ÁREA 2 · PRODUTO · LIDERANÇA</a:t>
             </a:r>
           </a:p>
         </p:txBody>
@@ -8978,8 +11987,8 @@
         </p:nvSpPr>
         <p:spPr>
           <a:xfrm>
-            <a:off x="822960" y="960120"/>
-            <a:ext cx="10515600" cy="1371600"/>
+            <a:off x="822960" y="914400"/>
+            <a:ext cx="10515600" cy="1280160"/>
           </a:xfrm>
           <a:prstGeom prst="rect">
             <a:avLst/>
@@ -8993,75 +12002,27 @@
           <a:lstStyle/>
           <a:p>
             <a:r>
-              <a:rPr sz="3400" b="1">
+              <a:rPr sz="3000" b="1">
                 <a:solidFill>
                   <a:srgbClr val="EAF0FB"/>
                 </a:solidFill>
                 <a:latin typeface="Segoe UI"/>
               </a:rPr>
-              <a:t>Três entregas que mudaram o patamar</a:t>
-            </a:r>
-          </a:p>
-        </p:txBody>
-      </p:sp>
-      <p:sp>
-        <p:nvSpPr>
-          <p:cNvPr id="4" name="Rounded Rectangle 3"/>
-          <p:cNvSpPr/>
-          <p:nvPr/>
-        </p:nvSpPr>
-        <p:spPr>
-          <a:xfrm>
-            <a:off x="822960" y="2377440"/>
-            <a:ext cx="3337560" cy="2468880"/>
-          </a:xfrm>
-          <a:prstGeom prst="roundRect">
-            <a:avLst>
-              <a:gd name="adj" fmla="val 7000"/>
-            </a:avLst>
-          </a:prstGeom>
-          <a:solidFill>
-            <a:srgbClr val="18223A"/>
-          </a:solidFill>
-          <a:ln w="12700">
-            <a:solidFill>
-              <a:srgbClr val="2A3652"/>
-            </a:solidFill>
-          </a:ln>
-          <a:effectLst/>
-        </p:spPr>
-        <p:style>
-          <a:lnRef idx="1">
-            <a:schemeClr val="accent1"/>
-          </a:lnRef>
-          <a:fillRef idx="3">
-            <a:schemeClr val="accent1"/>
-          </a:fillRef>
-          <a:effectRef idx="2">
-            <a:schemeClr val="accent1"/>
-          </a:effectRef>
-          <a:fontRef idx="minor">
-            <a:schemeClr val="lt1"/>
-          </a:fontRef>
-        </p:style>
-        <p:txBody>
-          <a:bodyPr rtlCol="0" anchor="ctr"/>
-          <a:lstStyle/>
-          <a:p>
-            <a:pPr algn="ctr"/>
-          </a:p>
-        </p:txBody>
-      </p:sp>
-      <p:sp>
-        <p:nvSpPr>
-          <p:cNvPr id="5" name="TextBox 4"/>
+              <a:t>Liderança de Produto</a:t>
+            </a:r>
+          </a:p>
+        </p:txBody>
+      </p:sp>
+      <p:sp>
+        <p:nvSpPr>
+          <p:cNvPr id="4" name="TextBox 3"/>
           <p:cNvSpPr txBox="1"/>
           <p:nvPr/>
         </p:nvSpPr>
         <p:spPr>
           <a:xfrm>
-            <a:off x="1097280" y="2697480"/>
-            <a:ext cx="2788920" cy="1920240"/>
+            <a:off x="822960" y="2194560"/>
+            <a:ext cx="10607040" cy="3931920"/>
           </a:xfrm>
           <a:prstGeom prst="rect">
             <a:avLst/>
@@ -9074,95 +12035,145 @@
           </a:bodyPr>
           <a:lstStyle/>
           <a:p>
-            <a:r>
-              <a:rPr sz="3000" b="1">
-                <a:solidFill>
-                  <a:srgbClr val="2DD4BF"/>
-                </a:solidFill>
-                <a:latin typeface="Segoe UI"/>
-              </a:rPr>
-              <a:t>R$30k → 100k</a:t>
+            <a:pPr>
+              <a:spcAft>
+                <a:spcPts val="600"/>
+              </a:spcAft>
+            </a:pPr>
+            <a:r>
+              <a:rPr sz="1250" b="1">
+                <a:solidFill>
+                  <a:srgbClr val="F4B740"/>
+                </a:solidFill>
+                <a:latin typeface="Segoe UI"/>
+              </a:rPr>
+              <a:t>LIDERANÇA</a:t>
             </a:r>
           </a:p>
           <a:p>
             <a:pPr>
               <a:lnSpc>
-                <a:spcPct val="120000"/>
+                <a:spcPct val="108000"/>
               </a:lnSpc>
-              <a:spcBef>
-                <a:spcPts val="1000"/>
-              </a:spcBef>
+              <a:spcAft>
+                <a:spcPts val="600"/>
+              </a:spcAft>
             </a:pPr>
             <a:r>
-              <a:rPr sz="1350" b="0">
-                <a:solidFill>
-                  <a:srgbClr val="9AA7BD"/>
-                </a:solidFill>
-                <a:latin typeface="Segoe UI"/>
-              </a:rPr>
-              <a:t>MRR do novo produto 100% IA, puxado por iFood e TotalPass México</a:t>
-            </a:r>
-          </a:p>
-        </p:txBody>
-      </p:sp>
-      <p:sp>
-        <p:nvSpPr>
-          <p:cNvPr id="6" name="Rounded Rectangle 5"/>
-          <p:cNvSpPr/>
-          <p:nvPr/>
-        </p:nvSpPr>
-        <p:spPr>
-          <a:xfrm>
-            <a:off x="4425696" y="2377440"/>
-            <a:ext cx="3337560" cy="2468880"/>
-          </a:xfrm>
-          <a:prstGeom prst="roundRect">
-            <a:avLst>
-              <a:gd name="adj" fmla="val 7000"/>
-            </a:avLst>
-          </a:prstGeom>
-          <a:solidFill>
-            <a:srgbClr val="18223A"/>
-          </a:solidFill>
-          <a:ln w="12700">
-            <a:solidFill>
-              <a:srgbClr val="2A3652"/>
-            </a:solidFill>
-          </a:ln>
-          <a:effectLst/>
-        </p:spPr>
-        <p:style>
-          <a:lnRef idx="1">
-            <a:schemeClr val="accent1"/>
-          </a:lnRef>
-          <a:fillRef idx="3">
-            <a:schemeClr val="accent1"/>
-          </a:fillRef>
-          <a:effectRef idx="2">
-            <a:schemeClr val="accent1"/>
-          </a:effectRef>
-          <a:fontRef idx="minor">
-            <a:schemeClr val="lt1"/>
-          </a:fontRef>
-        </p:style>
-        <p:txBody>
-          <a:bodyPr rtlCol="0" anchor="ctr"/>
-          <a:lstStyle/>
-          <a:p>
-            <a:pPr algn="ctr"/>
-          </a:p>
-        </p:txBody>
-      </p:sp>
-      <p:sp>
-        <p:nvSpPr>
-          <p:cNvPr id="7" name="TextBox 6"/>
+              <a:rPr sz="1500" b="1">
+                <a:solidFill>
+                  <a:srgbClr val="2DD4BF"/>
+                </a:solidFill>
+                <a:latin typeface="Segoe UI"/>
+              </a:rPr>
+              <a:t>▪  </a:t>
+            </a:r>
+            <a:r>
+              <a:rPr sz="1500" b="0">
+                <a:solidFill>
+                  <a:srgbClr val="9AA7BD"/>
+                </a:solidFill>
+                <a:latin typeface="Segoe UI"/>
+              </a:rPr>
+              <a:t>Estruturação de plano de evolução da área, com foco na dificuldade de escala</a:t>
+            </a:r>
+          </a:p>
+          <a:p>
+            <a:pPr>
+              <a:lnSpc>
+                <a:spcPct val="108000"/>
+              </a:lnSpc>
+              <a:spcAft>
+                <a:spcPts val="600"/>
+              </a:spcAft>
+            </a:pPr>
+            <a:r>
+              <a:rPr sz="1500" b="1">
+                <a:solidFill>
+                  <a:srgbClr val="2DD4BF"/>
+                </a:solidFill>
+                <a:latin typeface="Segoe UI"/>
+              </a:rPr>
+              <a:t>▪  </a:t>
+            </a:r>
+            <a:r>
+              <a:rPr sz="1500" b="0">
+                <a:solidFill>
+                  <a:srgbClr val="9AA7BD"/>
+                </a:solidFill>
+                <a:latin typeface="Segoe UI"/>
+              </a:rPr>
+              <a:t>Desenvolvimento do líder que ainda não está pronto para voar solo</a:t>
+            </a:r>
+          </a:p>
+          <a:p>
+            <a:pPr>
+              <a:lnSpc>
+                <a:spcPct val="108000"/>
+              </a:lnSpc>
+              <a:spcAft>
+                <a:spcPts val="600"/>
+              </a:spcAft>
+            </a:pPr>
+            <a:r>
+              <a:rPr sz="1500" b="1">
+                <a:solidFill>
+                  <a:srgbClr val="2DD4BF"/>
+                </a:solidFill>
+                <a:latin typeface="Segoe UI"/>
+              </a:rPr>
+              <a:t>▪  </a:t>
+            </a:r>
+            <a:r>
+              <a:rPr sz="1500" b="0">
+                <a:solidFill>
+                  <a:srgbClr val="9AA7BD"/>
+                </a:solidFill>
+                <a:latin typeface="Segoe UI"/>
+              </a:rPr>
+              <a:t>Apoio em todos os processos seletivos e desenvolvimento do líder para escolher pessoas</a:t>
+            </a:r>
+          </a:p>
+          <a:p>
+            <a:pPr>
+              <a:lnSpc>
+                <a:spcPct val="108000"/>
+              </a:lnSpc>
+              <a:spcAft>
+                <a:spcPts val="600"/>
+              </a:spcAft>
+            </a:pPr>
+            <a:r>
+              <a:rPr sz="1500" b="1">
+                <a:solidFill>
+                  <a:srgbClr val="2DD4BF"/>
+                </a:solidFill>
+                <a:latin typeface="Segoe UI"/>
+              </a:rPr>
+              <a:t>▪  </a:t>
+            </a:r>
+            <a:r>
+              <a:rPr sz="1500" b="0">
+                <a:solidFill>
+                  <a:srgbClr val="9AA7BD"/>
+                </a:solidFill>
+                <a:latin typeface="Segoe UI"/>
+              </a:rPr>
+              <a:t>Atuação direta na troca de pessoas-chave do time</a:t>
+            </a:r>
+          </a:p>
+        </p:txBody>
+      </p:sp>
+      <p:sp>
+        <p:nvSpPr>
+          <p:cNvPr id="5" name="TextBox 4"/>
           <p:cNvSpPr txBox="1"/>
           <p:nvPr/>
         </p:nvSpPr>
         <p:spPr>
           <a:xfrm>
-            <a:off x="4700016" y="2697480"/>
-            <a:ext cx="2788920" cy="1920240"/>
+            <a:off x="822960" y="6400800"/>
+            <a:ext cx="8229600" cy="365760"/>
           </a:xfrm>
           <a:prstGeom prst="rect">
             <a:avLst/>
@@ -9176,199 +12187,6 @@
           <a:lstStyle/>
           <a:p>
             <a:r>
-              <a:rPr sz="3000" b="1">
-                <a:solidFill>
-                  <a:srgbClr val="2DD4BF"/>
-                </a:solidFill>
-                <a:latin typeface="Segoe UI"/>
-              </a:rPr>
-              <a:t>15+</a:t>
-            </a:r>
-          </a:p>
-          <a:p>
-            <a:pPr>
-              <a:lnSpc>
-                <a:spcPct val="120000"/>
-              </a:lnSpc>
-              <a:spcBef>
-                <a:spcPts val="1000"/>
-              </a:spcBef>
-            </a:pPr>
-            <a:r>
-              <a:rPr sz="1350" b="0">
-                <a:solidFill>
-                  <a:srgbClr val="9AA7BD"/>
-                </a:solidFill>
-                <a:latin typeface="Segoe UI"/>
-              </a:rPr>
-              <a:t>pessoas contratadas e formadas, com líderes em desenvolvimento</a:t>
-            </a:r>
-          </a:p>
-        </p:txBody>
-      </p:sp>
-      <p:sp>
-        <p:nvSpPr>
-          <p:cNvPr id="8" name="Rounded Rectangle 7"/>
-          <p:cNvSpPr/>
-          <p:nvPr/>
-        </p:nvSpPr>
-        <p:spPr>
-          <a:xfrm>
-            <a:off x="8028431" y="2377440"/>
-            <a:ext cx="3337560" cy="2468880"/>
-          </a:xfrm>
-          <a:prstGeom prst="roundRect">
-            <a:avLst>
-              <a:gd name="adj" fmla="val 7000"/>
-            </a:avLst>
-          </a:prstGeom>
-          <a:solidFill>
-            <a:srgbClr val="18223A"/>
-          </a:solidFill>
-          <a:ln w="12700">
-            <a:solidFill>
-              <a:srgbClr val="2A3652"/>
-            </a:solidFill>
-          </a:ln>
-          <a:effectLst/>
-        </p:spPr>
-        <p:style>
-          <a:lnRef idx="1">
-            <a:schemeClr val="accent1"/>
-          </a:lnRef>
-          <a:fillRef idx="3">
-            <a:schemeClr val="accent1"/>
-          </a:fillRef>
-          <a:effectRef idx="2">
-            <a:schemeClr val="accent1"/>
-          </a:effectRef>
-          <a:fontRef idx="minor">
-            <a:schemeClr val="lt1"/>
-          </a:fontRef>
-        </p:style>
-        <p:txBody>
-          <a:bodyPr rtlCol="0" anchor="ctr"/>
-          <a:lstStyle/>
-          <a:p>
-            <a:pPr algn="ctr"/>
-          </a:p>
-        </p:txBody>
-      </p:sp>
-      <p:sp>
-        <p:nvSpPr>
-          <p:cNvPr id="9" name="TextBox 8"/>
-          <p:cNvSpPr txBox="1"/>
-          <p:nvPr/>
-        </p:nvSpPr>
-        <p:spPr>
-          <a:xfrm>
-            <a:off x="8302752" y="2697480"/>
-            <a:ext cx="2788920" cy="1920240"/>
-          </a:xfrm>
-          <a:prstGeom prst="rect">
-            <a:avLst/>
-          </a:prstGeom>
-          <a:noFill/>
-        </p:spPr>
-        <p:txBody>
-          <a:bodyPr wrap="square">
-            <a:spAutoFit/>
-          </a:bodyPr>
-          <a:lstStyle/>
-          <a:p>
-            <a:r>
-              <a:rPr sz="3000" b="1">
-                <a:solidFill>
-                  <a:srgbClr val="2DD4BF"/>
-                </a:solidFill>
-                <a:latin typeface="Segoe UI"/>
-              </a:rPr>
-              <a:t>~R$800k</a:t>
-            </a:r>
-          </a:p>
-          <a:p>
-            <a:pPr>
-              <a:lnSpc>
-                <a:spcPct val="120000"/>
-              </a:lnSpc>
-              <a:spcBef>
-                <a:spcPts val="1000"/>
-              </a:spcBef>
-            </a:pPr>
-            <a:r>
-              <a:rPr sz="1350" b="0">
-                <a:solidFill>
-                  <a:srgbClr val="9AA7BD"/>
-                </a:solidFill>
-                <a:latin typeface="Segoe UI"/>
-              </a:rPr>
-              <a:t>de custo de nuvem evitado até dez/2026 (Azure → AWS + créditos)</a:t>
-            </a:r>
-          </a:p>
-        </p:txBody>
-      </p:sp>
-      <p:sp>
-        <p:nvSpPr>
-          <p:cNvPr id="10" name="TextBox 9"/>
-          <p:cNvSpPr txBox="1"/>
-          <p:nvPr/>
-        </p:nvSpPr>
-        <p:spPr>
-          <a:xfrm>
-            <a:off x="822960" y="5212080"/>
-            <a:ext cx="10515600" cy="914400"/>
-          </a:xfrm>
-          <a:prstGeom prst="rect">
-            <a:avLst/>
-          </a:prstGeom>
-          <a:noFill/>
-        </p:spPr>
-        <p:txBody>
-          <a:bodyPr wrap="square">
-            <a:spAutoFit/>
-          </a:bodyPr>
-          <a:lstStyle/>
-          <a:p>
-            <a:pPr>
-              <a:lnSpc>
-                <a:spcPct val="120000"/>
-              </a:lnSpc>
-            </a:pPr>
-            <a:r>
-              <a:rPr sz="1400" b="0">
-                <a:solidFill>
-                  <a:srgbClr val="9AA7BD"/>
-                </a:solidFill>
-                <a:latin typeface="Segoe UI"/>
-              </a:rPr>
-              <a:t>Além de receita habilitada em parcerias, risco mitigado em segurança e a base de dados pronta para decisões preditivas.</a:t>
-            </a:r>
-          </a:p>
-        </p:txBody>
-      </p:sp>
-      <p:sp>
-        <p:nvSpPr>
-          <p:cNvPr id="11" name="TextBox 10"/>
-          <p:cNvSpPr txBox="1"/>
-          <p:nvPr/>
-        </p:nvSpPr>
-        <p:spPr>
-          <a:xfrm>
-            <a:off x="822960" y="6400800"/>
-            <a:ext cx="7315200" cy="365760"/>
-          </a:xfrm>
-          <a:prstGeom prst="rect">
-            <a:avLst/>
-          </a:prstGeom>
-          <a:noFill/>
-        </p:spPr>
-        <p:txBody>
-          <a:bodyPr wrap="square">
-            <a:spAutoFit/>
-          </a:bodyPr>
-          <a:lstStyle/>
-          <a:p>
-            <a:r>
               <a:rPr sz="900" b="0">
                 <a:solidFill>
                   <a:srgbClr val="9AA7BD"/>
@@ -9382,7 +12200,7 @@
       </p:sp>
       <p:sp>
         <p:nvSpPr>
-          <p:cNvPr id="12" name="TextBox 11"/>
+          <p:cNvPr id="6" name="TextBox 5"/>
           <p:cNvSpPr txBox="1"/>
           <p:nvPr/>
         </p:nvSpPr>

--- a/docs/conversa-ceo/apresentacao.pptx
+++ b/docs/conversa-ceo/apresentacao.pptx
@@ -3165,49 +3165,30 @@
           </a:p>
         </p:txBody>
       </p:sp>
-      <p:sp>
-        <p:nvSpPr>
-          <p:cNvPr id="3" name="TextBox 2"/>
-          <p:cNvSpPr txBox="1"/>
-          <p:nvPr/>
-        </p:nvSpPr>
-        <p:spPr>
-          <a:xfrm>
-            <a:off x="640080" y="548640"/>
-            <a:ext cx="4114800" cy="548640"/>
-          </a:xfrm>
-          <a:prstGeom prst="rect">
-            <a:avLst/>
-          </a:prstGeom>
-          <a:noFill/>
-        </p:spPr>
-        <p:txBody>
-          <a:bodyPr wrap="square" anchor="ctr">
-            <a:spAutoFit/>
-          </a:bodyPr>
-          <a:lstStyle/>
-          <a:p>
-            <a:r>
-              <a:rPr sz="2600" b="1">
-                <a:solidFill>
-                  <a:srgbClr val="FFFFFF"/>
-                </a:solidFill>
-                <a:latin typeface="Calibri"/>
-              </a:rPr>
-              <a:t>★ </a:t>
-            </a:r>
-            <a:r>
-              <a:rPr sz="2400" b="1">
-                <a:solidFill>
-                  <a:srgbClr val="FFFFFF"/>
-                </a:solidFill>
-                <a:latin typeface="Funnel Display"/>
-              </a:rPr>
-              <a:t>starbem</a:t>
-            </a:r>
-          </a:p>
-        </p:txBody>
-      </p:sp>
+      <p:pic>
+        <p:nvPicPr>
+          <p:cNvPr id="3" name="Picture 2" descr="starbem-logo-white.png"/>
+          <p:cNvPicPr>
+            <a:picLocks noChangeAspect="1"/>
+          </p:cNvPicPr>
+          <p:nvPr/>
+        </p:nvPicPr>
+        <p:blipFill>
+          <a:blip r:embed="rId2"/>
+          <a:stretch>
+            <a:fillRect/>
+          </a:stretch>
+        </p:blipFill>
+        <p:spPr>
+          <a:xfrm>
+            <a:off x="658368" y="548640"/>
+            <a:ext cx="2139351" cy="566928"/>
+          </a:xfrm>
+          <a:prstGeom prst="rect">
+            <a:avLst/>
+          </a:prstGeom>
+        </p:spPr>
+      </p:pic>
       <p:sp>
         <p:nvSpPr>
           <p:cNvPr id="4" name="TextBox 3"/>
@@ -3394,16 +3375,40 @@
           </a:p>
         </p:txBody>
       </p:sp>
-      <p:sp>
-        <p:nvSpPr>
-          <p:cNvPr id="3" name="TextBox 2"/>
+      <p:pic>
+        <p:nvPicPr>
+          <p:cNvPr id="3" name="Picture 2" descr="starbem-logo-white.png"/>
+          <p:cNvPicPr>
+            <a:picLocks noChangeAspect="1"/>
+          </p:cNvPicPr>
+          <p:nvPr/>
+        </p:nvPicPr>
+        <p:blipFill>
+          <a:blip r:embed="rId2"/>
+          <a:stretch>
+            <a:fillRect/>
+          </a:stretch>
+        </p:blipFill>
+        <p:spPr>
+          <a:xfrm>
+            <a:off x="548640" y="265176"/>
+            <a:ext cx="1449238" cy="384048"/>
+          </a:xfrm>
+          <a:prstGeom prst="rect">
+            <a:avLst/>
+          </a:prstGeom>
+        </p:spPr>
+      </p:pic>
+      <p:sp>
+        <p:nvSpPr>
+          <p:cNvPr id="4" name="TextBox 3"/>
           <p:cNvSpPr txBox="1"/>
           <p:nvPr/>
         </p:nvSpPr>
         <p:spPr>
           <a:xfrm>
-            <a:off x="502920" y="182880"/>
-            <a:ext cx="4114800" cy="548640"/>
+            <a:off x="5486400" y="182880"/>
+            <a:ext cx="6217920" cy="548640"/>
           </a:xfrm>
           <a:prstGeom prst="rect">
             <a:avLst/>
@@ -3416,49 +3421,6 @@
           </a:bodyPr>
           <a:lstStyle/>
           <a:p>
-            <a:r>
-              <a:rPr sz="2200" b="1">
-                <a:solidFill>
-                  <a:srgbClr val="FFFFFF"/>
-                </a:solidFill>
-                <a:latin typeface="Calibri"/>
-              </a:rPr>
-              <a:t>★ </a:t>
-            </a:r>
-            <a:r>
-              <a:rPr sz="2000" b="1">
-                <a:solidFill>
-                  <a:srgbClr val="FFFFFF"/>
-                </a:solidFill>
-                <a:latin typeface="Funnel Display"/>
-              </a:rPr>
-              <a:t>starbem</a:t>
-            </a:r>
-          </a:p>
-        </p:txBody>
-      </p:sp>
-      <p:sp>
-        <p:nvSpPr>
-          <p:cNvPr id="4" name="TextBox 3"/>
-          <p:cNvSpPr txBox="1"/>
-          <p:nvPr/>
-        </p:nvSpPr>
-        <p:spPr>
-          <a:xfrm>
-            <a:off x="5486400" y="182880"/>
-            <a:ext cx="6217920" cy="548640"/>
-          </a:xfrm>
-          <a:prstGeom prst="rect">
-            <a:avLst/>
-          </a:prstGeom>
-          <a:noFill/>
-        </p:spPr>
-        <p:txBody>
-          <a:bodyPr wrap="square" anchor="ctr">
-            <a:spAutoFit/>
-          </a:bodyPr>
-          <a:lstStyle/>
-          <a:p>
             <a:pPr algn="ctr"/>
             <a:r>
               <a:rPr sz="1500" b="1">
@@ -3514,7 +3476,7 @@
         </p:nvSpPr>
         <p:spPr>
           <a:xfrm>
-            <a:off x="548640" y="2423160"/>
+            <a:off x="548640" y="2945892"/>
             <a:ext cx="5303520" cy="457200"/>
           </a:xfrm>
           <a:prstGeom prst="roundRect">
@@ -3560,7 +3522,7 @@
         </p:nvSpPr>
         <p:spPr>
           <a:xfrm>
-            <a:off x="777240" y="2423160"/>
+            <a:off x="777240" y="2945892"/>
             <a:ext cx="4846320" cy="457200"/>
           </a:xfrm>
           <a:prstGeom prst="rect">
@@ -3594,8 +3556,8 @@
         </p:nvSpPr>
         <p:spPr>
           <a:xfrm>
-            <a:off x="548640" y="2926080"/>
-            <a:ext cx="5303520" cy="3154680"/>
+            <a:off x="548640" y="3448812"/>
+            <a:ext cx="5303520" cy="2337816"/>
           </a:xfrm>
           <a:prstGeom prst="roundRect">
             <a:avLst>
@@ -3642,8 +3604,8 @@
         </p:nvSpPr>
         <p:spPr>
           <a:xfrm>
-            <a:off x="868680" y="3154680"/>
-            <a:ext cx="4663440" cy="2697480"/>
+            <a:off x="868680" y="3686555"/>
+            <a:ext cx="4663440" cy="1926335"/>
           </a:xfrm>
           <a:prstGeom prst="rect">
             <a:avLst/>
@@ -3795,7 +3757,7 @@
         </p:nvSpPr>
         <p:spPr>
           <a:xfrm>
-            <a:off x="6336792" y="2423160"/>
+            <a:off x="6336792" y="2945892"/>
             <a:ext cx="5303520" cy="457200"/>
           </a:xfrm>
           <a:prstGeom prst="roundRect">
@@ -3841,7 +3803,7 @@
         </p:nvSpPr>
         <p:spPr>
           <a:xfrm>
-            <a:off x="6565392" y="2423160"/>
+            <a:off x="6565392" y="2945892"/>
             <a:ext cx="4846320" cy="457200"/>
           </a:xfrm>
           <a:prstGeom prst="rect">
@@ -3875,8 +3837,8 @@
         </p:nvSpPr>
         <p:spPr>
           <a:xfrm>
-            <a:off x="6336792" y="2926080"/>
-            <a:ext cx="5303520" cy="3154680"/>
+            <a:off x="6336792" y="3448812"/>
+            <a:ext cx="5303520" cy="2337816"/>
           </a:xfrm>
           <a:prstGeom prst="roundRect">
             <a:avLst>
@@ -3923,8 +3885,8 @@
         </p:nvSpPr>
         <p:spPr>
           <a:xfrm>
-            <a:off x="6656831" y="3154680"/>
-            <a:ext cx="4663440" cy="2697480"/>
+            <a:off x="6656831" y="3686555"/>
+            <a:ext cx="4663440" cy="1926335"/>
           </a:xfrm>
           <a:prstGeom prst="rect">
             <a:avLst/>
@@ -4181,16 +4143,40 @@
           </a:p>
         </p:txBody>
       </p:sp>
-      <p:sp>
-        <p:nvSpPr>
-          <p:cNvPr id="3" name="TextBox 2"/>
+      <p:pic>
+        <p:nvPicPr>
+          <p:cNvPr id="3" name="Picture 2" descr="starbem-logo-white.png"/>
+          <p:cNvPicPr>
+            <a:picLocks noChangeAspect="1"/>
+          </p:cNvPicPr>
+          <p:nvPr/>
+        </p:nvPicPr>
+        <p:blipFill>
+          <a:blip r:embed="rId2"/>
+          <a:stretch>
+            <a:fillRect/>
+          </a:stretch>
+        </p:blipFill>
+        <p:spPr>
+          <a:xfrm>
+            <a:off x="548640" y="265176"/>
+            <a:ext cx="1449238" cy="384048"/>
+          </a:xfrm>
+          <a:prstGeom prst="rect">
+            <a:avLst/>
+          </a:prstGeom>
+        </p:spPr>
+      </p:pic>
+      <p:sp>
+        <p:nvSpPr>
+          <p:cNvPr id="4" name="TextBox 3"/>
           <p:cNvSpPr txBox="1"/>
           <p:nvPr/>
         </p:nvSpPr>
         <p:spPr>
           <a:xfrm>
-            <a:off x="502920" y="182880"/>
-            <a:ext cx="4114800" cy="548640"/>
+            <a:off x="5486400" y="182880"/>
+            <a:ext cx="6217920" cy="548640"/>
           </a:xfrm>
           <a:prstGeom prst="rect">
             <a:avLst/>
@@ -4203,49 +4189,6 @@
           </a:bodyPr>
           <a:lstStyle/>
           <a:p>
-            <a:r>
-              <a:rPr sz="2200" b="1">
-                <a:solidFill>
-                  <a:srgbClr val="FFFFFF"/>
-                </a:solidFill>
-                <a:latin typeface="Calibri"/>
-              </a:rPr>
-              <a:t>★ </a:t>
-            </a:r>
-            <a:r>
-              <a:rPr sz="2000" b="1">
-                <a:solidFill>
-                  <a:srgbClr val="FFFFFF"/>
-                </a:solidFill>
-                <a:latin typeface="Funnel Display"/>
-              </a:rPr>
-              <a:t>starbem</a:t>
-            </a:r>
-          </a:p>
-        </p:txBody>
-      </p:sp>
-      <p:sp>
-        <p:nvSpPr>
-          <p:cNvPr id="4" name="TextBox 3"/>
-          <p:cNvSpPr txBox="1"/>
-          <p:nvPr/>
-        </p:nvSpPr>
-        <p:spPr>
-          <a:xfrm>
-            <a:off x="5486400" y="182880"/>
-            <a:ext cx="6217920" cy="548640"/>
-          </a:xfrm>
-          <a:prstGeom prst="rect">
-            <a:avLst/>
-          </a:prstGeom>
-          <a:noFill/>
-        </p:spPr>
-        <p:txBody>
-          <a:bodyPr wrap="square" anchor="ctr">
-            <a:spAutoFit/>
-          </a:bodyPr>
-          <a:lstStyle/>
-          <a:p>
             <a:pPr algn="ctr"/>
             <a:r>
               <a:rPr sz="1500" b="1">
@@ -4301,7 +4244,7 @@
         </p:nvSpPr>
         <p:spPr>
           <a:xfrm>
-            <a:off x="548640" y="2423160"/>
+            <a:off x="548640" y="3031490"/>
             <a:ext cx="11091672" cy="457200"/>
           </a:xfrm>
           <a:prstGeom prst="roundRect">
@@ -4347,7 +4290,7 @@
         </p:nvSpPr>
         <p:spPr>
           <a:xfrm>
-            <a:off x="777240" y="2423160"/>
+            <a:off x="777240" y="3031490"/>
             <a:ext cx="10634472" cy="457200"/>
           </a:xfrm>
           <a:prstGeom prst="rect">
@@ -4381,8 +4324,8 @@
         </p:nvSpPr>
         <p:spPr>
           <a:xfrm>
-            <a:off x="548640" y="2926080"/>
-            <a:ext cx="11091672" cy="3154680"/>
+            <a:off x="548640" y="3534410"/>
+            <a:ext cx="11091672" cy="2166620"/>
           </a:xfrm>
           <a:prstGeom prst="roundRect">
             <a:avLst>
@@ -4429,8 +4372,8 @@
         </p:nvSpPr>
         <p:spPr>
           <a:xfrm>
-            <a:off x="868680" y="3154680"/>
-            <a:ext cx="10424160" cy="2697480"/>
+            <a:off x="868680" y="3772154"/>
+            <a:ext cx="10424160" cy="1755140"/>
           </a:xfrm>
           <a:prstGeom prst="rect">
             <a:avLst/>
@@ -4733,16 +4676,40 @@
           </a:p>
         </p:txBody>
       </p:sp>
-      <p:sp>
-        <p:nvSpPr>
-          <p:cNvPr id="3" name="TextBox 2"/>
+      <p:pic>
+        <p:nvPicPr>
+          <p:cNvPr id="3" name="Picture 2" descr="starbem-logo-white.png"/>
+          <p:cNvPicPr>
+            <a:picLocks noChangeAspect="1"/>
+          </p:cNvPicPr>
+          <p:nvPr/>
+        </p:nvPicPr>
+        <p:blipFill>
+          <a:blip r:embed="rId2"/>
+          <a:stretch>
+            <a:fillRect/>
+          </a:stretch>
+        </p:blipFill>
+        <p:spPr>
+          <a:xfrm>
+            <a:off x="548640" y="265176"/>
+            <a:ext cx="1449238" cy="384048"/>
+          </a:xfrm>
+          <a:prstGeom prst="rect">
+            <a:avLst/>
+          </a:prstGeom>
+        </p:spPr>
+      </p:pic>
+      <p:sp>
+        <p:nvSpPr>
+          <p:cNvPr id="4" name="TextBox 3"/>
           <p:cNvSpPr txBox="1"/>
           <p:nvPr/>
         </p:nvSpPr>
         <p:spPr>
           <a:xfrm>
-            <a:off x="502920" y="182880"/>
-            <a:ext cx="4114800" cy="548640"/>
+            <a:off x="5486400" y="182880"/>
+            <a:ext cx="6217920" cy="548640"/>
           </a:xfrm>
           <a:prstGeom prst="rect">
             <a:avLst/>
@@ -4755,49 +4722,6 @@
           </a:bodyPr>
           <a:lstStyle/>
           <a:p>
-            <a:r>
-              <a:rPr sz="2200" b="1">
-                <a:solidFill>
-                  <a:srgbClr val="FFFFFF"/>
-                </a:solidFill>
-                <a:latin typeface="Calibri"/>
-              </a:rPr>
-              <a:t>★ </a:t>
-            </a:r>
-            <a:r>
-              <a:rPr sz="2000" b="1">
-                <a:solidFill>
-                  <a:srgbClr val="FFFFFF"/>
-                </a:solidFill>
-                <a:latin typeface="Funnel Display"/>
-              </a:rPr>
-              <a:t>starbem</a:t>
-            </a:r>
-          </a:p>
-        </p:txBody>
-      </p:sp>
-      <p:sp>
-        <p:nvSpPr>
-          <p:cNvPr id="4" name="TextBox 3"/>
-          <p:cNvSpPr txBox="1"/>
-          <p:nvPr/>
-        </p:nvSpPr>
-        <p:spPr>
-          <a:xfrm>
-            <a:off x="5486400" y="182880"/>
-            <a:ext cx="6217920" cy="548640"/>
-          </a:xfrm>
-          <a:prstGeom prst="rect">
-            <a:avLst/>
-          </a:prstGeom>
-          <a:noFill/>
-        </p:spPr>
-        <p:txBody>
-          <a:bodyPr wrap="square" anchor="ctr">
-            <a:spAutoFit/>
-          </a:bodyPr>
-          <a:lstStyle/>
-          <a:p>
             <a:pPr algn="ctr"/>
             <a:r>
               <a:rPr sz="1500" b="1">
@@ -4853,8 +4777,8 @@
         </p:nvSpPr>
         <p:spPr>
           <a:xfrm>
-            <a:off x="548640" y="2423160"/>
-            <a:ext cx="11091672" cy="3657600"/>
+            <a:off x="548640" y="3303016"/>
+            <a:ext cx="11091672" cy="2126488"/>
           </a:xfrm>
           <a:prstGeom prst="roundRect">
             <a:avLst>
@@ -4901,8 +4825,8 @@
         </p:nvSpPr>
         <p:spPr>
           <a:xfrm>
-            <a:off x="868680" y="2697479"/>
-            <a:ext cx="5120640" cy="3108960"/>
+            <a:off x="868680" y="3559048"/>
+            <a:ext cx="5120640" cy="1669288"/>
           </a:xfrm>
           <a:prstGeom prst="rect">
             <a:avLst/>
@@ -5045,8 +4969,8 @@
         </p:nvSpPr>
         <p:spPr>
           <a:xfrm>
-            <a:off x="6172200" y="2697479"/>
-            <a:ext cx="5120640" cy="3108960"/>
+            <a:off x="6172200" y="3559048"/>
+            <a:ext cx="5120640" cy="1669288"/>
           </a:xfrm>
           <a:prstGeom prst="rect">
             <a:avLst/>
@@ -5330,16 +5254,40 @@
           </a:p>
         </p:txBody>
       </p:sp>
-      <p:sp>
-        <p:nvSpPr>
-          <p:cNvPr id="3" name="TextBox 2"/>
+      <p:pic>
+        <p:nvPicPr>
+          <p:cNvPr id="3" name="Picture 2" descr="starbem-logo-white.png"/>
+          <p:cNvPicPr>
+            <a:picLocks noChangeAspect="1"/>
+          </p:cNvPicPr>
+          <p:nvPr/>
+        </p:nvPicPr>
+        <p:blipFill>
+          <a:blip r:embed="rId2"/>
+          <a:stretch>
+            <a:fillRect/>
+          </a:stretch>
+        </p:blipFill>
+        <p:spPr>
+          <a:xfrm>
+            <a:off x="548640" y="265176"/>
+            <a:ext cx="1449238" cy="384048"/>
+          </a:xfrm>
+          <a:prstGeom prst="rect">
+            <a:avLst/>
+          </a:prstGeom>
+        </p:spPr>
+      </p:pic>
+      <p:sp>
+        <p:nvSpPr>
+          <p:cNvPr id="4" name="TextBox 3"/>
           <p:cNvSpPr txBox="1"/>
           <p:nvPr/>
         </p:nvSpPr>
         <p:spPr>
           <a:xfrm>
-            <a:off x="502920" y="182880"/>
-            <a:ext cx="4114800" cy="548640"/>
+            <a:off x="5486400" y="182880"/>
+            <a:ext cx="6217920" cy="548640"/>
           </a:xfrm>
           <a:prstGeom prst="rect">
             <a:avLst/>
@@ -5352,49 +5300,6 @@
           </a:bodyPr>
           <a:lstStyle/>
           <a:p>
-            <a:r>
-              <a:rPr sz="2200" b="1">
-                <a:solidFill>
-                  <a:srgbClr val="FFFFFF"/>
-                </a:solidFill>
-                <a:latin typeface="Calibri"/>
-              </a:rPr>
-              <a:t>★ </a:t>
-            </a:r>
-            <a:r>
-              <a:rPr sz="2000" b="1">
-                <a:solidFill>
-                  <a:srgbClr val="FFFFFF"/>
-                </a:solidFill>
-                <a:latin typeface="Funnel Display"/>
-              </a:rPr>
-              <a:t>starbem</a:t>
-            </a:r>
-          </a:p>
-        </p:txBody>
-      </p:sp>
-      <p:sp>
-        <p:nvSpPr>
-          <p:cNvPr id="4" name="TextBox 3"/>
-          <p:cNvSpPr txBox="1"/>
-          <p:nvPr/>
-        </p:nvSpPr>
-        <p:spPr>
-          <a:xfrm>
-            <a:off x="5486400" y="182880"/>
-            <a:ext cx="6217920" cy="548640"/>
-          </a:xfrm>
-          <a:prstGeom prst="rect">
-            <a:avLst/>
-          </a:prstGeom>
-          <a:noFill/>
-        </p:spPr>
-        <p:txBody>
-          <a:bodyPr wrap="square" anchor="ctr">
-            <a:spAutoFit/>
-          </a:bodyPr>
-          <a:lstStyle/>
-          <a:p>
             <a:pPr algn="ctr"/>
             <a:r>
               <a:rPr sz="1500" b="1">
@@ -5450,7 +5355,7 @@
         </p:nvSpPr>
         <p:spPr>
           <a:xfrm>
-            <a:off x="548640" y="2423160"/>
+            <a:off x="548640" y="2706878"/>
             <a:ext cx="5303520" cy="457200"/>
           </a:xfrm>
           <a:prstGeom prst="roundRect">
@@ -5496,7 +5401,7 @@
         </p:nvSpPr>
         <p:spPr>
           <a:xfrm>
-            <a:off x="777240" y="2423160"/>
+            <a:off x="777240" y="2706878"/>
             <a:ext cx="4846320" cy="457200"/>
           </a:xfrm>
           <a:prstGeom prst="rect">
@@ -5530,8 +5435,8 @@
         </p:nvSpPr>
         <p:spPr>
           <a:xfrm>
-            <a:off x="548640" y="2926080"/>
-            <a:ext cx="5303520" cy="3154680"/>
+            <a:off x="548640" y="3209798"/>
+            <a:ext cx="5303520" cy="2815844"/>
           </a:xfrm>
           <a:prstGeom prst="roundRect">
             <a:avLst>
@@ -5578,8 +5483,8 @@
         </p:nvSpPr>
         <p:spPr>
           <a:xfrm>
-            <a:off x="868680" y="3154680"/>
-            <a:ext cx="4663440" cy="2697480"/>
+            <a:off x="868680" y="3447541"/>
+            <a:ext cx="4663440" cy="2404364"/>
           </a:xfrm>
           <a:prstGeom prst="rect">
             <a:avLst/>
@@ -5833,7 +5738,7 @@
         </p:nvSpPr>
         <p:spPr>
           <a:xfrm>
-            <a:off x="6336792" y="2423160"/>
+            <a:off x="6336792" y="2706878"/>
             <a:ext cx="5303520" cy="457200"/>
           </a:xfrm>
           <a:prstGeom prst="roundRect">
@@ -5879,7 +5784,7 @@
         </p:nvSpPr>
         <p:spPr>
           <a:xfrm>
-            <a:off x="6565392" y="2423160"/>
+            <a:off x="6565392" y="2706878"/>
             <a:ext cx="4846320" cy="457200"/>
           </a:xfrm>
           <a:prstGeom prst="rect">
@@ -5913,8 +5818,8 @@
         </p:nvSpPr>
         <p:spPr>
           <a:xfrm>
-            <a:off x="6336792" y="2926080"/>
-            <a:ext cx="5303520" cy="3154680"/>
+            <a:off x="6336792" y="3209798"/>
+            <a:ext cx="5303520" cy="2815844"/>
           </a:xfrm>
           <a:prstGeom prst="roundRect">
             <a:avLst>
@@ -5961,8 +5866,8 @@
         </p:nvSpPr>
         <p:spPr>
           <a:xfrm>
-            <a:off x="6656831" y="3154680"/>
-            <a:ext cx="4663440" cy="2697480"/>
+            <a:off x="6656831" y="3447541"/>
+            <a:ext cx="4663440" cy="2404364"/>
           </a:xfrm>
           <a:prstGeom prst="rect">
             <a:avLst/>
@@ -6201,16 +6106,40 @@
           </a:p>
         </p:txBody>
       </p:sp>
-      <p:sp>
-        <p:nvSpPr>
-          <p:cNvPr id="3" name="TextBox 2"/>
+      <p:pic>
+        <p:nvPicPr>
+          <p:cNvPr id="3" name="Picture 2" descr="starbem-logo-white.png"/>
+          <p:cNvPicPr>
+            <a:picLocks noChangeAspect="1"/>
+          </p:cNvPicPr>
+          <p:nvPr/>
+        </p:nvPicPr>
+        <p:blipFill>
+          <a:blip r:embed="rId2"/>
+          <a:stretch>
+            <a:fillRect/>
+          </a:stretch>
+        </p:blipFill>
+        <p:spPr>
+          <a:xfrm>
+            <a:off x="548640" y="265176"/>
+            <a:ext cx="1449238" cy="384048"/>
+          </a:xfrm>
+          <a:prstGeom prst="rect">
+            <a:avLst/>
+          </a:prstGeom>
+        </p:spPr>
+      </p:pic>
+      <p:sp>
+        <p:nvSpPr>
+          <p:cNvPr id="4" name="TextBox 3"/>
           <p:cNvSpPr txBox="1"/>
           <p:nvPr/>
         </p:nvSpPr>
         <p:spPr>
           <a:xfrm>
-            <a:off x="502920" y="182880"/>
-            <a:ext cx="4114800" cy="548640"/>
+            <a:off x="5486400" y="182880"/>
+            <a:ext cx="6217920" cy="548640"/>
           </a:xfrm>
           <a:prstGeom prst="rect">
             <a:avLst/>
@@ -6223,49 +6152,6 @@
           </a:bodyPr>
           <a:lstStyle/>
           <a:p>
-            <a:r>
-              <a:rPr sz="2200" b="1">
-                <a:solidFill>
-                  <a:srgbClr val="FFFFFF"/>
-                </a:solidFill>
-                <a:latin typeface="Calibri"/>
-              </a:rPr>
-              <a:t>★ </a:t>
-            </a:r>
-            <a:r>
-              <a:rPr sz="2000" b="1">
-                <a:solidFill>
-                  <a:srgbClr val="FFFFFF"/>
-                </a:solidFill>
-                <a:latin typeface="Funnel Display"/>
-              </a:rPr>
-              <a:t>starbem</a:t>
-            </a:r>
-          </a:p>
-        </p:txBody>
-      </p:sp>
-      <p:sp>
-        <p:nvSpPr>
-          <p:cNvPr id="4" name="TextBox 3"/>
-          <p:cNvSpPr txBox="1"/>
-          <p:nvPr/>
-        </p:nvSpPr>
-        <p:spPr>
-          <a:xfrm>
-            <a:off x="5486400" y="182880"/>
-            <a:ext cx="6217920" cy="548640"/>
-          </a:xfrm>
-          <a:prstGeom prst="rect">
-            <a:avLst/>
-          </a:prstGeom>
-          <a:noFill/>
-        </p:spPr>
-        <p:txBody>
-          <a:bodyPr wrap="square" anchor="ctr">
-            <a:spAutoFit/>
-          </a:bodyPr>
-          <a:lstStyle/>
-          <a:p>
             <a:pPr algn="ctr"/>
             <a:r>
               <a:rPr sz="1500" b="1">
@@ -6321,7 +6207,7 @@
         </p:nvSpPr>
         <p:spPr>
           <a:xfrm>
-            <a:off x="548640" y="2423160"/>
+            <a:off x="548640" y="3197860"/>
             <a:ext cx="11091672" cy="457200"/>
           </a:xfrm>
           <a:prstGeom prst="roundRect">
@@ -6367,7 +6253,7 @@
         </p:nvSpPr>
         <p:spPr>
           <a:xfrm>
-            <a:off x="777240" y="2423160"/>
+            <a:off x="777240" y="3197860"/>
             <a:ext cx="10634472" cy="457200"/>
           </a:xfrm>
           <a:prstGeom prst="rect">
@@ -6401,8 +6287,8 @@
         </p:nvSpPr>
         <p:spPr>
           <a:xfrm>
-            <a:off x="548640" y="2926080"/>
-            <a:ext cx="11091672" cy="3154680"/>
+            <a:off x="548640" y="3700780"/>
+            <a:ext cx="11091672" cy="1833880"/>
           </a:xfrm>
           <a:prstGeom prst="roundRect">
             <a:avLst>
@@ -6449,8 +6335,8 @@
         </p:nvSpPr>
         <p:spPr>
           <a:xfrm>
-            <a:off x="868680" y="3154680"/>
-            <a:ext cx="10424160" cy="2697480"/>
+            <a:off x="868680" y="3938524"/>
+            <a:ext cx="10424160" cy="1422400"/>
           </a:xfrm>
           <a:prstGeom prst="rect">
             <a:avLst/>
@@ -6698,49 +6584,30 @@
           </a:p>
         </p:txBody>
       </p:sp>
-      <p:sp>
-        <p:nvSpPr>
-          <p:cNvPr id="3" name="TextBox 2"/>
-          <p:cNvSpPr txBox="1"/>
-          <p:nvPr/>
-        </p:nvSpPr>
-        <p:spPr>
-          <a:xfrm>
-            <a:off x="502920" y="182880"/>
-            <a:ext cx="4114800" cy="548640"/>
-          </a:xfrm>
-          <a:prstGeom prst="rect">
-            <a:avLst/>
-          </a:prstGeom>
-          <a:noFill/>
-        </p:spPr>
-        <p:txBody>
-          <a:bodyPr wrap="square" anchor="ctr">
-            <a:spAutoFit/>
-          </a:bodyPr>
-          <a:lstStyle/>
-          <a:p>
-            <a:r>
-              <a:rPr sz="2200" b="1">
-                <a:solidFill>
-                  <a:srgbClr val="FFFFFF"/>
-                </a:solidFill>
-                <a:latin typeface="Calibri"/>
-              </a:rPr>
-              <a:t>★ </a:t>
-            </a:r>
-            <a:r>
-              <a:rPr sz="2000" b="1">
-                <a:solidFill>
-                  <a:srgbClr val="FFFFFF"/>
-                </a:solidFill>
-                <a:latin typeface="Funnel Display"/>
-              </a:rPr>
-              <a:t>starbem</a:t>
-            </a:r>
-          </a:p>
-        </p:txBody>
-      </p:sp>
+      <p:pic>
+        <p:nvPicPr>
+          <p:cNvPr id="3" name="Picture 2" descr="starbem-logo-white.png"/>
+          <p:cNvPicPr>
+            <a:picLocks noChangeAspect="1"/>
+          </p:cNvPicPr>
+          <p:nvPr/>
+        </p:nvPicPr>
+        <p:blipFill>
+          <a:blip r:embed="rId2"/>
+          <a:stretch>
+            <a:fillRect/>
+          </a:stretch>
+        </p:blipFill>
+        <p:spPr>
+          <a:xfrm>
+            <a:off x="548640" y="265176"/>
+            <a:ext cx="1449238" cy="384048"/>
+          </a:xfrm>
+          <a:prstGeom prst="rect">
+            <a:avLst/>
+          </a:prstGeom>
+        </p:spPr>
+      </p:pic>
       <p:sp>
         <p:nvSpPr>
           <p:cNvPr id="4" name="TextBox 3"/>
@@ -7775,49 +7642,30 @@
           </a:p>
         </p:txBody>
       </p:sp>
-      <p:sp>
-        <p:nvSpPr>
-          <p:cNvPr id="3" name="TextBox 2"/>
-          <p:cNvSpPr txBox="1"/>
-          <p:nvPr/>
-        </p:nvSpPr>
-        <p:spPr>
-          <a:xfrm>
-            <a:off x="502920" y="182880"/>
-            <a:ext cx="4114800" cy="548640"/>
-          </a:xfrm>
-          <a:prstGeom prst="rect">
-            <a:avLst/>
-          </a:prstGeom>
-          <a:noFill/>
-        </p:spPr>
-        <p:txBody>
-          <a:bodyPr wrap="square" anchor="ctr">
-            <a:spAutoFit/>
-          </a:bodyPr>
-          <a:lstStyle/>
-          <a:p>
-            <a:r>
-              <a:rPr sz="2200" b="1">
-                <a:solidFill>
-                  <a:srgbClr val="FFFFFF"/>
-                </a:solidFill>
-                <a:latin typeface="Calibri"/>
-              </a:rPr>
-              <a:t>★ </a:t>
-            </a:r>
-            <a:r>
-              <a:rPr sz="2000" b="1">
-                <a:solidFill>
-                  <a:srgbClr val="FFFFFF"/>
-                </a:solidFill>
-                <a:latin typeface="Funnel Display"/>
-              </a:rPr>
-              <a:t>starbem</a:t>
-            </a:r>
-          </a:p>
-        </p:txBody>
-      </p:sp>
+      <p:pic>
+        <p:nvPicPr>
+          <p:cNvPr id="3" name="Picture 2" descr="starbem-logo-white.png"/>
+          <p:cNvPicPr>
+            <a:picLocks noChangeAspect="1"/>
+          </p:cNvPicPr>
+          <p:nvPr/>
+        </p:nvPicPr>
+        <p:blipFill>
+          <a:blip r:embed="rId2"/>
+          <a:stretch>
+            <a:fillRect/>
+          </a:stretch>
+        </p:blipFill>
+        <p:spPr>
+          <a:xfrm>
+            <a:off x="548640" y="265176"/>
+            <a:ext cx="1449238" cy="384048"/>
+          </a:xfrm>
+          <a:prstGeom prst="rect">
+            <a:avLst/>
+          </a:prstGeom>
+        </p:spPr>
+      </p:pic>
       <p:sp>
         <p:nvSpPr>
           <p:cNvPr id="4" name="TextBox 3"/>
@@ -8480,16 +8328,40 @@
           </a:p>
         </p:txBody>
       </p:sp>
-      <p:sp>
-        <p:nvSpPr>
-          <p:cNvPr id="3" name="TextBox 2"/>
+      <p:pic>
+        <p:nvPicPr>
+          <p:cNvPr id="3" name="Picture 2" descr="starbem-logo-white.png"/>
+          <p:cNvPicPr>
+            <a:picLocks noChangeAspect="1"/>
+          </p:cNvPicPr>
+          <p:nvPr/>
+        </p:nvPicPr>
+        <p:blipFill>
+          <a:blip r:embed="rId2"/>
+          <a:stretch>
+            <a:fillRect/>
+          </a:stretch>
+        </p:blipFill>
+        <p:spPr>
+          <a:xfrm>
+            <a:off x="548640" y="265176"/>
+            <a:ext cx="1449238" cy="384048"/>
+          </a:xfrm>
+          <a:prstGeom prst="rect">
+            <a:avLst/>
+          </a:prstGeom>
+        </p:spPr>
+      </p:pic>
+      <p:sp>
+        <p:nvSpPr>
+          <p:cNvPr id="4" name="TextBox 3"/>
           <p:cNvSpPr txBox="1"/>
           <p:nvPr/>
         </p:nvSpPr>
         <p:spPr>
           <a:xfrm>
-            <a:off x="502920" y="182880"/>
-            <a:ext cx="4114800" cy="548640"/>
+            <a:off x="5486400" y="182880"/>
+            <a:ext cx="6217920" cy="548640"/>
           </a:xfrm>
           <a:prstGeom prst="rect">
             <a:avLst/>
@@ -8502,49 +8374,6 @@
           </a:bodyPr>
           <a:lstStyle/>
           <a:p>
-            <a:r>
-              <a:rPr sz="2200" b="1">
-                <a:solidFill>
-                  <a:srgbClr val="FFFFFF"/>
-                </a:solidFill>
-                <a:latin typeface="Calibri"/>
-              </a:rPr>
-              <a:t>★ </a:t>
-            </a:r>
-            <a:r>
-              <a:rPr sz="2000" b="1">
-                <a:solidFill>
-                  <a:srgbClr val="FFFFFF"/>
-                </a:solidFill>
-                <a:latin typeface="Funnel Display"/>
-              </a:rPr>
-              <a:t>starbem</a:t>
-            </a:r>
-          </a:p>
-        </p:txBody>
-      </p:sp>
-      <p:sp>
-        <p:nvSpPr>
-          <p:cNvPr id="4" name="TextBox 3"/>
-          <p:cNvSpPr txBox="1"/>
-          <p:nvPr/>
-        </p:nvSpPr>
-        <p:spPr>
-          <a:xfrm>
-            <a:off x="5486400" y="182880"/>
-            <a:ext cx="6217920" cy="548640"/>
-          </a:xfrm>
-          <a:prstGeom prst="rect">
-            <a:avLst/>
-          </a:prstGeom>
-          <a:noFill/>
-        </p:spPr>
-        <p:txBody>
-          <a:bodyPr wrap="square" anchor="ctr">
-            <a:spAutoFit/>
-          </a:bodyPr>
-          <a:lstStyle/>
-          <a:p>
             <a:pPr algn="ctr"/>
             <a:r>
               <a:rPr sz="1500" b="1">
@@ -8600,7 +8429,7 @@
         </p:nvSpPr>
         <p:spPr>
           <a:xfrm>
-            <a:off x="548640" y="2423160"/>
+            <a:off x="548640" y="2860802"/>
             <a:ext cx="11091672" cy="457200"/>
           </a:xfrm>
           <a:prstGeom prst="roundRect">
@@ -8646,7 +8475,7 @@
         </p:nvSpPr>
         <p:spPr>
           <a:xfrm>
-            <a:off x="777240" y="2423160"/>
+            <a:off x="777240" y="2860802"/>
             <a:ext cx="10634472" cy="457200"/>
           </a:xfrm>
           <a:prstGeom prst="rect">
@@ -8680,8 +8509,8 @@
         </p:nvSpPr>
         <p:spPr>
           <a:xfrm>
-            <a:off x="548640" y="2926080"/>
-            <a:ext cx="11091672" cy="3154680"/>
+            <a:off x="548640" y="3363722"/>
+            <a:ext cx="11091672" cy="2507996"/>
           </a:xfrm>
           <a:prstGeom prst="roundRect">
             <a:avLst>
@@ -8728,8 +8557,8 @@
         </p:nvSpPr>
         <p:spPr>
           <a:xfrm>
-            <a:off x="868680" y="3154680"/>
-            <a:ext cx="10424160" cy="2697480"/>
+            <a:off x="868680" y="3601466"/>
+            <a:ext cx="10424160" cy="2096515"/>
           </a:xfrm>
           <a:prstGeom prst="rect">
             <a:avLst/>
@@ -9059,49 +8888,30 @@
           </a:p>
         </p:txBody>
       </p:sp>
-      <p:sp>
-        <p:nvSpPr>
-          <p:cNvPr id="3" name="TextBox 2"/>
-          <p:cNvSpPr txBox="1"/>
-          <p:nvPr/>
-        </p:nvSpPr>
-        <p:spPr>
-          <a:xfrm>
-            <a:off x="502920" y="182880"/>
-            <a:ext cx="4114800" cy="548640"/>
-          </a:xfrm>
-          <a:prstGeom prst="rect">
-            <a:avLst/>
-          </a:prstGeom>
-          <a:noFill/>
-        </p:spPr>
-        <p:txBody>
-          <a:bodyPr wrap="square" anchor="ctr">
-            <a:spAutoFit/>
-          </a:bodyPr>
-          <a:lstStyle/>
-          <a:p>
-            <a:r>
-              <a:rPr sz="2200" b="1">
-                <a:solidFill>
-                  <a:srgbClr val="FFFFFF"/>
-                </a:solidFill>
-                <a:latin typeface="Calibri"/>
-              </a:rPr>
-              <a:t>★ </a:t>
-            </a:r>
-            <a:r>
-              <a:rPr sz="2000" b="1">
-                <a:solidFill>
-                  <a:srgbClr val="FFFFFF"/>
-                </a:solidFill>
-                <a:latin typeface="Funnel Display"/>
-              </a:rPr>
-              <a:t>starbem</a:t>
-            </a:r>
-          </a:p>
-        </p:txBody>
-      </p:sp>
+      <p:pic>
+        <p:nvPicPr>
+          <p:cNvPr id="3" name="Picture 2" descr="starbem-logo-white.png"/>
+          <p:cNvPicPr>
+            <a:picLocks noChangeAspect="1"/>
+          </p:cNvPicPr>
+          <p:nvPr/>
+        </p:nvPicPr>
+        <p:blipFill>
+          <a:blip r:embed="rId2"/>
+          <a:stretch>
+            <a:fillRect/>
+          </a:stretch>
+        </p:blipFill>
+        <p:spPr>
+          <a:xfrm>
+            <a:off x="548640" y="265176"/>
+            <a:ext cx="1449238" cy="384048"/>
+          </a:xfrm>
+          <a:prstGeom prst="rect">
+            <a:avLst/>
+          </a:prstGeom>
+        </p:spPr>
+      </p:pic>
       <p:sp>
         <p:nvSpPr>
           <p:cNvPr id="4" name="TextBox 3"/>
@@ -9913,49 +9723,30 @@
           </a:p>
         </p:txBody>
       </p:sp>
-      <p:sp>
-        <p:nvSpPr>
-          <p:cNvPr id="3" name="TextBox 2"/>
-          <p:cNvSpPr txBox="1"/>
-          <p:nvPr/>
-        </p:nvSpPr>
-        <p:spPr>
-          <a:xfrm>
-            <a:off x="502920" y="182880"/>
-            <a:ext cx="4114800" cy="548640"/>
-          </a:xfrm>
-          <a:prstGeom prst="rect">
-            <a:avLst/>
-          </a:prstGeom>
-          <a:noFill/>
-        </p:spPr>
-        <p:txBody>
-          <a:bodyPr wrap="square" anchor="ctr">
-            <a:spAutoFit/>
-          </a:bodyPr>
-          <a:lstStyle/>
-          <a:p>
-            <a:r>
-              <a:rPr sz="2200" b="1">
-                <a:solidFill>
-                  <a:srgbClr val="FFFFFF"/>
-                </a:solidFill>
-                <a:latin typeface="Calibri"/>
-              </a:rPr>
-              <a:t>★ </a:t>
-            </a:r>
-            <a:r>
-              <a:rPr sz="2000" b="1">
-                <a:solidFill>
-                  <a:srgbClr val="FFFFFF"/>
-                </a:solidFill>
-                <a:latin typeface="Funnel Display"/>
-              </a:rPr>
-              <a:t>starbem</a:t>
-            </a:r>
-          </a:p>
-        </p:txBody>
-      </p:sp>
+      <p:pic>
+        <p:nvPicPr>
+          <p:cNvPr id="3" name="Picture 2" descr="starbem-logo-white.png"/>
+          <p:cNvPicPr>
+            <a:picLocks noChangeAspect="1"/>
+          </p:cNvPicPr>
+          <p:nvPr/>
+        </p:nvPicPr>
+        <p:blipFill>
+          <a:blip r:embed="rId2"/>
+          <a:stretch>
+            <a:fillRect/>
+          </a:stretch>
+        </p:blipFill>
+        <p:spPr>
+          <a:xfrm>
+            <a:off x="548640" y="265176"/>
+            <a:ext cx="1449238" cy="384048"/>
+          </a:xfrm>
+          <a:prstGeom prst="rect">
+            <a:avLst/>
+          </a:prstGeom>
+        </p:spPr>
+      </p:pic>
       <p:sp>
         <p:nvSpPr>
           <p:cNvPr id="4" name="TextBox 3"/>
@@ -11024,49 +10815,30 @@
           </a:p>
         </p:txBody>
       </p:sp>
-      <p:sp>
-        <p:nvSpPr>
-          <p:cNvPr id="3" name="TextBox 2"/>
-          <p:cNvSpPr txBox="1"/>
-          <p:nvPr/>
-        </p:nvSpPr>
-        <p:spPr>
-          <a:xfrm>
-            <a:off x="502920" y="182880"/>
-            <a:ext cx="4114800" cy="548640"/>
-          </a:xfrm>
-          <a:prstGeom prst="rect">
-            <a:avLst/>
-          </a:prstGeom>
-          <a:noFill/>
-        </p:spPr>
-        <p:txBody>
-          <a:bodyPr wrap="square" anchor="ctr">
-            <a:spAutoFit/>
-          </a:bodyPr>
-          <a:lstStyle/>
-          <a:p>
-            <a:r>
-              <a:rPr sz="2200" b="1">
-                <a:solidFill>
-                  <a:srgbClr val="FFFFFF"/>
-                </a:solidFill>
-                <a:latin typeface="Calibri"/>
-              </a:rPr>
-              <a:t>★ </a:t>
-            </a:r>
-            <a:r>
-              <a:rPr sz="2000" b="1">
-                <a:solidFill>
-                  <a:srgbClr val="FFFFFF"/>
-                </a:solidFill>
-                <a:latin typeface="Funnel Display"/>
-              </a:rPr>
-              <a:t>starbem</a:t>
-            </a:r>
-          </a:p>
-        </p:txBody>
-      </p:sp>
+      <p:pic>
+        <p:nvPicPr>
+          <p:cNvPr id="3" name="Picture 2" descr="starbem-logo-white.png"/>
+          <p:cNvPicPr>
+            <a:picLocks noChangeAspect="1"/>
+          </p:cNvPicPr>
+          <p:nvPr/>
+        </p:nvPicPr>
+        <p:blipFill>
+          <a:blip r:embed="rId2"/>
+          <a:stretch>
+            <a:fillRect/>
+          </a:stretch>
+        </p:blipFill>
+        <p:spPr>
+          <a:xfrm>
+            <a:off x="548640" y="265176"/>
+            <a:ext cx="1449238" cy="384048"/>
+          </a:xfrm>
+          <a:prstGeom prst="rect">
+            <a:avLst/>
+          </a:prstGeom>
+        </p:spPr>
+      </p:pic>
       <p:sp>
         <p:nvSpPr>
           <p:cNvPr id="4" name="TextBox 3"/>
@@ -11589,16 +11361,40 @@
           </a:p>
         </p:txBody>
       </p:sp>
-      <p:sp>
-        <p:nvSpPr>
-          <p:cNvPr id="3" name="TextBox 2"/>
+      <p:pic>
+        <p:nvPicPr>
+          <p:cNvPr id="3" name="Picture 2" descr="starbem-logo-white.png"/>
+          <p:cNvPicPr>
+            <a:picLocks noChangeAspect="1"/>
+          </p:cNvPicPr>
+          <p:nvPr/>
+        </p:nvPicPr>
+        <p:blipFill>
+          <a:blip r:embed="rId2"/>
+          <a:stretch>
+            <a:fillRect/>
+          </a:stretch>
+        </p:blipFill>
+        <p:spPr>
+          <a:xfrm>
+            <a:off x="548640" y="265176"/>
+            <a:ext cx="1449238" cy="384048"/>
+          </a:xfrm>
+          <a:prstGeom prst="rect">
+            <a:avLst/>
+          </a:prstGeom>
+        </p:spPr>
+      </p:pic>
+      <p:sp>
+        <p:nvSpPr>
+          <p:cNvPr id="4" name="TextBox 3"/>
           <p:cNvSpPr txBox="1"/>
           <p:nvPr/>
         </p:nvSpPr>
         <p:spPr>
           <a:xfrm>
-            <a:off x="502920" y="182880"/>
-            <a:ext cx="4114800" cy="548640"/>
+            <a:off x="5486400" y="182880"/>
+            <a:ext cx="6217920" cy="548640"/>
           </a:xfrm>
           <a:prstGeom prst="rect">
             <a:avLst/>
@@ -11611,49 +11407,6 @@
           </a:bodyPr>
           <a:lstStyle/>
           <a:p>
-            <a:r>
-              <a:rPr sz="2200" b="1">
-                <a:solidFill>
-                  <a:srgbClr val="FFFFFF"/>
-                </a:solidFill>
-                <a:latin typeface="Calibri"/>
-              </a:rPr>
-              <a:t>★ </a:t>
-            </a:r>
-            <a:r>
-              <a:rPr sz="2000" b="1">
-                <a:solidFill>
-                  <a:srgbClr val="FFFFFF"/>
-                </a:solidFill>
-                <a:latin typeface="Funnel Display"/>
-              </a:rPr>
-              <a:t>starbem</a:t>
-            </a:r>
-          </a:p>
-        </p:txBody>
-      </p:sp>
-      <p:sp>
-        <p:nvSpPr>
-          <p:cNvPr id="4" name="TextBox 3"/>
-          <p:cNvSpPr txBox="1"/>
-          <p:nvPr/>
-        </p:nvSpPr>
-        <p:spPr>
-          <a:xfrm>
-            <a:off x="5486400" y="182880"/>
-            <a:ext cx="6217920" cy="548640"/>
-          </a:xfrm>
-          <a:prstGeom prst="rect">
-            <a:avLst/>
-          </a:prstGeom>
-          <a:noFill/>
-        </p:spPr>
-        <p:txBody>
-          <a:bodyPr wrap="square" anchor="ctr">
-            <a:spAutoFit/>
-          </a:bodyPr>
-          <a:lstStyle/>
-          <a:p>
             <a:pPr algn="ctr"/>
             <a:r>
               <a:rPr sz="1500" b="1">
@@ -11709,8 +11462,8 @@
         </p:nvSpPr>
         <p:spPr>
           <a:xfrm>
-            <a:off x="548640" y="2423160"/>
-            <a:ext cx="11091672" cy="3657600"/>
+            <a:off x="548640" y="3408680"/>
+            <a:ext cx="11091672" cy="1915160"/>
           </a:xfrm>
           <a:prstGeom prst="roundRect">
             <a:avLst>
@@ -11757,8 +11510,8 @@
         </p:nvSpPr>
         <p:spPr>
           <a:xfrm>
-            <a:off x="868680" y="2697479"/>
-            <a:ext cx="5120640" cy="3108960"/>
+            <a:off x="868680" y="3664712"/>
+            <a:ext cx="5120640" cy="1457960"/>
           </a:xfrm>
           <a:prstGeom prst="rect">
             <a:avLst/>
@@ -11937,8 +11690,8 @@
         </p:nvSpPr>
         <p:spPr>
           <a:xfrm>
-            <a:off x="6172200" y="2697479"/>
-            <a:ext cx="5120640" cy="3108960"/>
+            <a:off x="6172200" y="3664712"/>
+            <a:ext cx="5120640" cy="1457960"/>
           </a:xfrm>
           <a:prstGeom prst="rect">
             <a:avLst/>
@@ -12167,16 +11920,40 @@
           </a:p>
         </p:txBody>
       </p:sp>
-      <p:sp>
-        <p:nvSpPr>
-          <p:cNvPr id="3" name="TextBox 2"/>
+      <p:pic>
+        <p:nvPicPr>
+          <p:cNvPr id="3" name="Picture 2" descr="starbem-logo-white.png"/>
+          <p:cNvPicPr>
+            <a:picLocks noChangeAspect="1"/>
+          </p:cNvPicPr>
+          <p:nvPr/>
+        </p:nvPicPr>
+        <p:blipFill>
+          <a:blip r:embed="rId2"/>
+          <a:stretch>
+            <a:fillRect/>
+          </a:stretch>
+        </p:blipFill>
+        <p:spPr>
+          <a:xfrm>
+            <a:off x="548640" y="265176"/>
+            <a:ext cx="1449238" cy="384048"/>
+          </a:xfrm>
+          <a:prstGeom prst="rect">
+            <a:avLst/>
+          </a:prstGeom>
+        </p:spPr>
+      </p:pic>
+      <p:sp>
+        <p:nvSpPr>
+          <p:cNvPr id="4" name="TextBox 3"/>
           <p:cNvSpPr txBox="1"/>
           <p:nvPr/>
         </p:nvSpPr>
         <p:spPr>
           <a:xfrm>
-            <a:off x="502920" y="182880"/>
-            <a:ext cx="4114800" cy="548640"/>
+            <a:off x="5486400" y="182880"/>
+            <a:ext cx="6217920" cy="548640"/>
           </a:xfrm>
           <a:prstGeom prst="rect">
             <a:avLst/>
@@ -12189,49 +11966,6 @@
           </a:bodyPr>
           <a:lstStyle/>
           <a:p>
-            <a:r>
-              <a:rPr sz="2200" b="1">
-                <a:solidFill>
-                  <a:srgbClr val="FFFFFF"/>
-                </a:solidFill>
-                <a:latin typeface="Calibri"/>
-              </a:rPr>
-              <a:t>★ </a:t>
-            </a:r>
-            <a:r>
-              <a:rPr sz="2000" b="1">
-                <a:solidFill>
-                  <a:srgbClr val="FFFFFF"/>
-                </a:solidFill>
-                <a:latin typeface="Funnel Display"/>
-              </a:rPr>
-              <a:t>starbem</a:t>
-            </a:r>
-          </a:p>
-        </p:txBody>
-      </p:sp>
-      <p:sp>
-        <p:nvSpPr>
-          <p:cNvPr id="4" name="TextBox 3"/>
-          <p:cNvSpPr txBox="1"/>
-          <p:nvPr/>
-        </p:nvSpPr>
-        <p:spPr>
-          <a:xfrm>
-            <a:off x="5486400" y="182880"/>
-            <a:ext cx="6217920" cy="548640"/>
-          </a:xfrm>
-          <a:prstGeom prst="rect">
-            <a:avLst/>
-          </a:prstGeom>
-          <a:noFill/>
-        </p:spPr>
-        <p:txBody>
-          <a:bodyPr wrap="square" anchor="ctr">
-            <a:spAutoFit/>
-          </a:bodyPr>
-          <a:lstStyle/>
-          <a:p>
             <a:pPr algn="ctr"/>
             <a:r>
               <a:rPr sz="1500" b="1">
@@ -12287,8 +12021,8 @@
         </p:nvSpPr>
         <p:spPr>
           <a:xfrm>
-            <a:off x="548640" y="2423160"/>
-            <a:ext cx="11091672" cy="3657600"/>
+            <a:off x="548640" y="3152902"/>
+            <a:ext cx="11091672" cy="2426716"/>
           </a:xfrm>
           <a:prstGeom prst="roundRect">
             <a:avLst>
@@ -12335,8 +12069,8 @@
         </p:nvSpPr>
         <p:spPr>
           <a:xfrm>
-            <a:off x="868680" y="2697479"/>
-            <a:ext cx="5120640" cy="3108960"/>
+            <a:off x="868680" y="3408934"/>
+            <a:ext cx="5120640" cy="1969516"/>
           </a:xfrm>
           <a:prstGeom prst="rect">
             <a:avLst/>
@@ -12516,8 +12250,8 @@
         </p:nvSpPr>
         <p:spPr>
           <a:xfrm>
-            <a:off x="6172200" y="2697479"/>
-            <a:ext cx="5120640" cy="3108960"/>
+            <a:off x="6172200" y="3408934"/>
+            <a:ext cx="5120640" cy="1969516"/>
           </a:xfrm>
           <a:prstGeom prst="rect">
             <a:avLst/>
@@ -12802,16 +12536,40 @@
           </a:p>
         </p:txBody>
       </p:sp>
-      <p:sp>
-        <p:nvSpPr>
-          <p:cNvPr id="3" name="TextBox 2"/>
+      <p:pic>
+        <p:nvPicPr>
+          <p:cNvPr id="3" name="Picture 2" descr="starbem-logo-white.png"/>
+          <p:cNvPicPr>
+            <a:picLocks noChangeAspect="1"/>
+          </p:cNvPicPr>
+          <p:nvPr/>
+        </p:nvPicPr>
+        <p:blipFill>
+          <a:blip r:embed="rId2"/>
+          <a:stretch>
+            <a:fillRect/>
+          </a:stretch>
+        </p:blipFill>
+        <p:spPr>
+          <a:xfrm>
+            <a:off x="548640" y="265176"/>
+            <a:ext cx="1449238" cy="384048"/>
+          </a:xfrm>
+          <a:prstGeom prst="rect">
+            <a:avLst/>
+          </a:prstGeom>
+        </p:spPr>
+      </p:pic>
+      <p:sp>
+        <p:nvSpPr>
+          <p:cNvPr id="4" name="TextBox 3"/>
           <p:cNvSpPr txBox="1"/>
           <p:nvPr/>
         </p:nvSpPr>
         <p:spPr>
           <a:xfrm>
-            <a:off x="502920" y="182880"/>
-            <a:ext cx="4114800" cy="548640"/>
+            <a:off x="5486400" y="182880"/>
+            <a:ext cx="6217920" cy="548640"/>
           </a:xfrm>
           <a:prstGeom prst="rect">
             <a:avLst/>
@@ -12824,49 +12582,6 @@
           </a:bodyPr>
           <a:lstStyle/>
           <a:p>
-            <a:r>
-              <a:rPr sz="2200" b="1">
-                <a:solidFill>
-                  <a:srgbClr val="FFFFFF"/>
-                </a:solidFill>
-                <a:latin typeface="Calibri"/>
-              </a:rPr>
-              <a:t>★ </a:t>
-            </a:r>
-            <a:r>
-              <a:rPr sz="2000" b="1">
-                <a:solidFill>
-                  <a:srgbClr val="FFFFFF"/>
-                </a:solidFill>
-                <a:latin typeface="Funnel Display"/>
-              </a:rPr>
-              <a:t>starbem</a:t>
-            </a:r>
-          </a:p>
-        </p:txBody>
-      </p:sp>
-      <p:sp>
-        <p:nvSpPr>
-          <p:cNvPr id="4" name="TextBox 3"/>
-          <p:cNvSpPr txBox="1"/>
-          <p:nvPr/>
-        </p:nvSpPr>
-        <p:spPr>
-          <a:xfrm>
-            <a:off x="5486400" y="182880"/>
-            <a:ext cx="6217920" cy="548640"/>
-          </a:xfrm>
-          <a:prstGeom prst="rect">
-            <a:avLst/>
-          </a:prstGeom>
-          <a:noFill/>
-        </p:spPr>
-        <p:txBody>
-          <a:bodyPr wrap="square" anchor="ctr">
-            <a:spAutoFit/>
-          </a:bodyPr>
-          <a:lstStyle/>
-          <a:p>
             <a:pPr algn="ctr"/>
             <a:r>
               <a:rPr sz="1500" b="1">
@@ -12922,8 +12637,8 @@
         </p:nvSpPr>
         <p:spPr>
           <a:xfrm>
-            <a:off x="548640" y="2423160"/>
-            <a:ext cx="11091672" cy="3657600"/>
+            <a:off x="548640" y="3347466"/>
+            <a:ext cx="11091672" cy="2037588"/>
           </a:xfrm>
           <a:prstGeom prst="roundRect">
             <a:avLst>
@@ -12970,8 +12685,8 @@
         </p:nvSpPr>
         <p:spPr>
           <a:xfrm>
-            <a:off x="868680" y="2697479"/>
-            <a:ext cx="5120640" cy="3108960"/>
+            <a:off x="868680" y="3603497"/>
+            <a:ext cx="5120640" cy="1580388"/>
           </a:xfrm>
           <a:prstGeom prst="rect">
             <a:avLst/>
@@ -13123,8 +12838,8 @@
         </p:nvSpPr>
         <p:spPr>
           <a:xfrm>
-            <a:off x="6172200" y="2697479"/>
-            <a:ext cx="5120640" cy="3108960"/>
+            <a:off x="6172200" y="3603497"/>
+            <a:ext cx="5120640" cy="1580388"/>
           </a:xfrm>
           <a:prstGeom prst="rect">
             <a:avLst/>
@@ -13371,16 +13086,40 @@
           </a:p>
         </p:txBody>
       </p:sp>
-      <p:sp>
-        <p:nvSpPr>
-          <p:cNvPr id="3" name="TextBox 2"/>
+      <p:pic>
+        <p:nvPicPr>
+          <p:cNvPr id="3" name="Picture 2" descr="starbem-logo-white.png"/>
+          <p:cNvPicPr>
+            <a:picLocks noChangeAspect="1"/>
+          </p:cNvPicPr>
+          <p:nvPr/>
+        </p:nvPicPr>
+        <p:blipFill>
+          <a:blip r:embed="rId2"/>
+          <a:stretch>
+            <a:fillRect/>
+          </a:stretch>
+        </p:blipFill>
+        <p:spPr>
+          <a:xfrm>
+            <a:off x="548640" y="265176"/>
+            <a:ext cx="1449238" cy="384048"/>
+          </a:xfrm>
+          <a:prstGeom prst="rect">
+            <a:avLst/>
+          </a:prstGeom>
+        </p:spPr>
+      </p:pic>
+      <p:sp>
+        <p:nvSpPr>
+          <p:cNvPr id="4" name="TextBox 3"/>
           <p:cNvSpPr txBox="1"/>
           <p:nvPr/>
         </p:nvSpPr>
         <p:spPr>
           <a:xfrm>
-            <a:off x="502920" y="182880"/>
-            <a:ext cx="4114800" cy="548640"/>
+            <a:off x="5486400" y="182880"/>
+            <a:ext cx="6217920" cy="548640"/>
           </a:xfrm>
           <a:prstGeom prst="rect">
             <a:avLst/>
@@ -13393,49 +13132,6 @@
           </a:bodyPr>
           <a:lstStyle/>
           <a:p>
-            <a:r>
-              <a:rPr sz="2200" b="1">
-                <a:solidFill>
-                  <a:srgbClr val="FFFFFF"/>
-                </a:solidFill>
-                <a:latin typeface="Calibri"/>
-              </a:rPr>
-              <a:t>★ </a:t>
-            </a:r>
-            <a:r>
-              <a:rPr sz="2000" b="1">
-                <a:solidFill>
-                  <a:srgbClr val="FFFFFF"/>
-                </a:solidFill>
-                <a:latin typeface="Funnel Display"/>
-              </a:rPr>
-              <a:t>starbem</a:t>
-            </a:r>
-          </a:p>
-        </p:txBody>
-      </p:sp>
-      <p:sp>
-        <p:nvSpPr>
-          <p:cNvPr id="4" name="TextBox 3"/>
-          <p:cNvSpPr txBox="1"/>
-          <p:nvPr/>
-        </p:nvSpPr>
-        <p:spPr>
-          <a:xfrm>
-            <a:off x="5486400" y="182880"/>
-            <a:ext cx="6217920" cy="548640"/>
-          </a:xfrm>
-          <a:prstGeom prst="rect">
-            <a:avLst/>
-          </a:prstGeom>
-          <a:noFill/>
-        </p:spPr>
-        <p:txBody>
-          <a:bodyPr wrap="square" anchor="ctr">
-            <a:spAutoFit/>
-          </a:bodyPr>
-          <a:lstStyle/>
-          <a:p>
             <a:pPr algn="ctr"/>
             <a:r>
               <a:rPr sz="1500" b="1">
@@ -13491,8 +13187,8 @@
         </p:nvSpPr>
         <p:spPr>
           <a:xfrm>
-            <a:off x="548640" y="2423160"/>
-            <a:ext cx="11091672" cy="3657600"/>
+            <a:off x="548640" y="3453129"/>
+            <a:ext cx="11091672" cy="1826260"/>
           </a:xfrm>
           <a:prstGeom prst="roundRect">
             <a:avLst>
@@ -13539,8 +13235,8 @@
         </p:nvSpPr>
         <p:spPr>
           <a:xfrm>
-            <a:off x="868680" y="2697479"/>
-            <a:ext cx="5120640" cy="3108960"/>
+            <a:off x="868680" y="3709162"/>
+            <a:ext cx="5120640" cy="1369060"/>
           </a:xfrm>
           <a:prstGeom prst="rect">
             <a:avLst/>
@@ -13655,8 +13351,8 @@
         </p:nvSpPr>
         <p:spPr>
           <a:xfrm>
-            <a:off x="6172200" y="2697479"/>
-            <a:ext cx="5120640" cy="3108960"/>
+            <a:off x="6172200" y="3709162"/>
+            <a:ext cx="5120640" cy="1369060"/>
           </a:xfrm>
           <a:prstGeom prst="rect">
             <a:avLst/>
@@ -13903,16 +13599,40 @@
           </a:p>
         </p:txBody>
       </p:sp>
-      <p:sp>
-        <p:nvSpPr>
-          <p:cNvPr id="3" name="TextBox 2"/>
+      <p:pic>
+        <p:nvPicPr>
+          <p:cNvPr id="3" name="Picture 2" descr="starbem-logo-white.png"/>
+          <p:cNvPicPr>
+            <a:picLocks noChangeAspect="1"/>
+          </p:cNvPicPr>
+          <p:nvPr/>
+        </p:nvPicPr>
+        <p:blipFill>
+          <a:blip r:embed="rId2"/>
+          <a:stretch>
+            <a:fillRect/>
+          </a:stretch>
+        </p:blipFill>
+        <p:spPr>
+          <a:xfrm>
+            <a:off x="548640" y="265176"/>
+            <a:ext cx="1449238" cy="384048"/>
+          </a:xfrm>
+          <a:prstGeom prst="rect">
+            <a:avLst/>
+          </a:prstGeom>
+        </p:spPr>
+      </p:pic>
+      <p:sp>
+        <p:nvSpPr>
+          <p:cNvPr id="4" name="TextBox 3"/>
           <p:cNvSpPr txBox="1"/>
           <p:nvPr/>
         </p:nvSpPr>
         <p:spPr>
           <a:xfrm>
-            <a:off x="502920" y="182880"/>
-            <a:ext cx="4114800" cy="548640"/>
+            <a:off x="5486400" y="182880"/>
+            <a:ext cx="6217920" cy="548640"/>
           </a:xfrm>
           <a:prstGeom prst="rect">
             <a:avLst/>
@@ -13925,49 +13645,6 @@
           </a:bodyPr>
           <a:lstStyle/>
           <a:p>
-            <a:r>
-              <a:rPr sz="2200" b="1">
-                <a:solidFill>
-                  <a:srgbClr val="FFFFFF"/>
-                </a:solidFill>
-                <a:latin typeface="Calibri"/>
-              </a:rPr>
-              <a:t>★ </a:t>
-            </a:r>
-            <a:r>
-              <a:rPr sz="2000" b="1">
-                <a:solidFill>
-                  <a:srgbClr val="FFFFFF"/>
-                </a:solidFill>
-                <a:latin typeface="Funnel Display"/>
-              </a:rPr>
-              <a:t>starbem</a:t>
-            </a:r>
-          </a:p>
-        </p:txBody>
-      </p:sp>
-      <p:sp>
-        <p:nvSpPr>
-          <p:cNvPr id="4" name="TextBox 3"/>
-          <p:cNvSpPr txBox="1"/>
-          <p:nvPr/>
-        </p:nvSpPr>
-        <p:spPr>
-          <a:xfrm>
-            <a:off x="5486400" y="182880"/>
-            <a:ext cx="6217920" cy="548640"/>
-          </a:xfrm>
-          <a:prstGeom prst="rect">
-            <a:avLst/>
-          </a:prstGeom>
-          <a:noFill/>
-        </p:spPr>
-        <p:txBody>
-          <a:bodyPr wrap="square" anchor="ctr">
-            <a:spAutoFit/>
-          </a:bodyPr>
-          <a:lstStyle/>
-          <a:p>
             <a:pPr algn="ctr"/>
             <a:r>
               <a:rPr sz="1500" b="1">
@@ -14023,7 +13700,7 @@
         </p:nvSpPr>
         <p:spPr>
           <a:xfrm>
-            <a:off x="548640" y="2423160"/>
+            <a:off x="548640" y="3197860"/>
             <a:ext cx="11091672" cy="457200"/>
           </a:xfrm>
           <a:prstGeom prst="roundRect">
@@ -14069,7 +13746,7 @@
         </p:nvSpPr>
         <p:spPr>
           <a:xfrm>
-            <a:off x="777240" y="2423160"/>
+            <a:off x="777240" y="3197860"/>
             <a:ext cx="10634472" cy="457200"/>
           </a:xfrm>
           <a:prstGeom prst="rect">
@@ -14103,8 +13780,8 @@
         </p:nvSpPr>
         <p:spPr>
           <a:xfrm>
-            <a:off x="548640" y="2926080"/>
-            <a:ext cx="11091672" cy="3154680"/>
+            <a:off x="548640" y="3700780"/>
+            <a:ext cx="11091672" cy="1833880"/>
           </a:xfrm>
           <a:prstGeom prst="roundRect">
             <a:avLst>
@@ -14151,8 +13828,8 @@
         </p:nvSpPr>
         <p:spPr>
           <a:xfrm>
-            <a:off x="868680" y="3154680"/>
-            <a:ext cx="10424160" cy="2697480"/>
+            <a:off x="868680" y="3938524"/>
+            <a:ext cx="10424160" cy="1422400"/>
           </a:xfrm>
           <a:prstGeom prst="rect">
             <a:avLst/>
@@ -14391,16 +14068,40 @@
           </a:p>
         </p:txBody>
       </p:sp>
-      <p:sp>
-        <p:nvSpPr>
-          <p:cNvPr id="3" name="TextBox 2"/>
+      <p:pic>
+        <p:nvPicPr>
+          <p:cNvPr id="3" name="Picture 2" descr="starbem-logo-white.png"/>
+          <p:cNvPicPr>
+            <a:picLocks noChangeAspect="1"/>
+          </p:cNvPicPr>
+          <p:nvPr/>
+        </p:nvPicPr>
+        <p:blipFill>
+          <a:blip r:embed="rId2"/>
+          <a:stretch>
+            <a:fillRect/>
+          </a:stretch>
+        </p:blipFill>
+        <p:spPr>
+          <a:xfrm>
+            <a:off x="548640" y="265176"/>
+            <a:ext cx="1449238" cy="384048"/>
+          </a:xfrm>
+          <a:prstGeom prst="rect">
+            <a:avLst/>
+          </a:prstGeom>
+        </p:spPr>
+      </p:pic>
+      <p:sp>
+        <p:nvSpPr>
+          <p:cNvPr id="4" name="TextBox 3"/>
           <p:cNvSpPr txBox="1"/>
           <p:nvPr/>
         </p:nvSpPr>
         <p:spPr>
           <a:xfrm>
-            <a:off x="502920" y="182880"/>
-            <a:ext cx="4114800" cy="548640"/>
+            <a:off x="5486400" y="182880"/>
+            <a:ext cx="6217920" cy="548640"/>
           </a:xfrm>
           <a:prstGeom prst="rect">
             <a:avLst/>
@@ -14413,49 +14114,6 @@
           </a:bodyPr>
           <a:lstStyle/>
           <a:p>
-            <a:r>
-              <a:rPr sz="2200" b="1">
-                <a:solidFill>
-                  <a:srgbClr val="FFFFFF"/>
-                </a:solidFill>
-                <a:latin typeface="Calibri"/>
-              </a:rPr>
-              <a:t>★ </a:t>
-            </a:r>
-            <a:r>
-              <a:rPr sz="2000" b="1">
-                <a:solidFill>
-                  <a:srgbClr val="FFFFFF"/>
-                </a:solidFill>
-                <a:latin typeface="Funnel Display"/>
-              </a:rPr>
-              <a:t>starbem</a:t>
-            </a:r>
-          </a:p>
-        </p:txBody>
-      </p:sp>
-      <p:sp>
-        <p:nvSpPr>
-          <p:cNvPr id="4" name="TextBox 3"/>
-          <p:cNvSpPr txBox="1"/>
-          <p:nvPr/>
-        </p:nvSpPr>
-        <p:spPr>
-          <a:xfrm>
-            <a:off x="5486400" y="182880"/>
-            <a:ext cx="6217920" cy="548640"/>
-          </a:xfrm>
-          <a:prstGeom prst="rect">
-            <a:avLst/>
-          </a:prstGeom>
-          <a:noFill/>
-        </p:spPr>
-        <p:txBody>
-          <a:bodyPr wrap="square" anchor="ctr">
-            <a:spAutoFit/>
-          </a:bodyPr>
-          <a:lstStyle/>
-          <a:p>
             <a:pPr algn="ctr"/>
             <a:r>
               <a:rPr sz="1500" b="1">
@@ -14511,7 +14169,7 @@
         </p:nvSpPr>
         <p:spPr>
           <a:xfrm>
-            <a:off x="548640" y="2423160"/>
+            <a:off x="548640" y="2601214"/>
             <a:ext cx="5303520" cy="457200"/>
           </a:xfrm>
           <a:prstGeom prst="roundRect">
@@ -14557,7 +14215,7 @@
         </p:nvSpPr>
         <p:spPr>
           <a:xfrm>
-            <a:off x="777240" y="2423160"/>
+            <a:off x="777240" y="2601214"/>
             <a:ext cx="4846320" cy="457200"/>
           </a:xfrm>
           <a:prstGeom prst="rect">
@@ -14591,8 +14249,8 @@
         </p:nvSpPr>
         <p:spPr>
           <a:xfrm>
-            <a:off x="548640" y="2926080"/>
-            <a:ext cx="5303520" cy="3154680"/>
+            <a:off x="548640" y="3104134"/>
+            <a:ext cx="5303520" cy="3027171"/>
           </a:xfrm>
           <a:prstGeom prst="roundRect">
             <a:avLst>
@@ -14639,8 +14297,8 @@
         </p:nvSpPr>
         <p:spPr>
           <a:xfrm>
-            <a:off x="868680" y="3154680"/>
-            <a:ext cx="4663440" cy="2697480"/>
+            <a:off x="868680" y="3341878"/>
+            <a:ext cx="4663440" cy="2615691"/>
           </a:xfrm>
           <a:prstGeom prst="rect">
             <a:avLst/>
@@ -14894,7 +14552,7 @@
         </p:nvSpPr>
         <p:spPr>
           <a:xfrm>
-            <a:off x="6336792" y="2423160"/>
+            <a:off x="6336792" y="2601214"/>
             <a:ext cx="5303520" cy="457200"/>
           </a:xfrm>
           <a:prstGeom prst="roundRect">
@@ -14940,7 +14598,7 @@
         </p:nvSpPr>
         <p:spPr>
           <a:xfrm>
-            <a:off x="6565392" y="2423160"/>
+            <a:off x="6565392" y="2601214"/>
             <a:ext cx="4846320" cy="457200"/>
           </a:xfrm>
           <a:prstGeom prst="rect">
@@ -14974,8 +14632,8 @@
         </p:nvSpPr>
         <p:spPr>
           <a:xfrm>
-            <a:off x="6336792" y="2926080"/>
-            <a:ext cx="5303520" cy="3154680"/>
+            <a:off x="6336792" y="3104134"/>
+            <a:ext cx="5303520" cy="3027171"/>
           </a:xfrm>
           <a:prstGeom prst="roundRect">
             <a:avLst>
@@ -15022,8 +14680,8 @@
         </p:nvSpPr>
         <p:spPr>
           <a:xfrm>
-            <a:off x="6656831" y="3154680"/>
-            <a:ext cx="4663440" cy="2697480"/>
+            <a:off x="6656831" y="3341878"/>
+            <a:ext cx="4663440" cy="2615691"/>
           </a:xfrm>
           <a:prstGeom prst="rect">
             <a:avLst/>
